--- a/Präsentation_AutoMedic_final.pptx
+++ b/Präsentation_AutoMedic_final.pptx
@@ -4,6 +4,9 @@
   <p:sldMasterIdLst>
     <p:sldMasterId id="2147483648" r:id="rId1"/>
   </p:sldMasterIdLst>
+  <p:notesMasterIdLst>
+    <p:notesMasterId r:id="rId20"/>
+  </p:notesMasterIdLst>
   <p:sldIdLst>
     <p:sldId id="256" r:id="rId2"/>
     <p:sldId id="257" r:id="rId3"/>
@@ -24,9 +27,6 @@
     <p:sldId id="272" r:id="rId18"/>
     <p:sldId id="273" r:id="rId19"/>
   </p:sldIdLst>
-  <p:notesMasterIdLst>
-    <p:notesMasterId r:id="rId20"/>
-  </p:notesMasterIdLst>
   <p:sldSz cx="12192000" cy="6858000"/>
   <p:notesSz cx="6858000" cy="12192000"/>
   <p:defaultTextStyle>
@@ -124,35 +124,35 @@
   <p:extLst>
     <p:ext uri="{521415D9-36F7-43E2-AB2F-B90AF26B5E84}">
       <p14:sectionLst xmlns:p14="http://schemas.microsoft.com/office/powerpoint/2010/main">
-        <p14:section name="Einstieg" id="{b81d1c0d-e791-124c-1a8a-1bb67d9d685d}">
+        <p14:section name="Einstieg" id="{B81D1C0D-E791-124C-1A8A-1BB67D9D685D}">
           <p14:sldIdLst>
             <p14:sldId id="256"/>
             <p14:sldId id="257"/>
           </p14:sldIdLst>
         </p14:section>
-        <p14:section name="Problem &amp; Idee" id="{a6137753-2a42-e313-be42-5bdb38e937b9}">
+        <p14:section name="Problem &amp; Idee" id="{A6137753-2A42-E313-BE42-5BDB38E937B9}">
           <p14:sldIdLst>
             <p14:sldId id="258"/>
             <p14:sldId id="259"/>
           </p14:sldIdLst>
         </p14:section>
-        <p14:section name="Unsere Lösung" id="{a41feedb-9849-45f8-950b-515b3a597f6f}">
+        <p14:section name="Unsere Lösung" id="{A41FEEDB-9849-45F8-950B-515B3A597F6F}">
           <p14:sldIdLst>
             <p14:sldId id="260"/>
           </p14:sldIdLst>
         </p14:section>
-        <p14:section name="Markt &amp; Geschäftsmodell" id="{877b4d6c-a940-ed4a-db30-0e01b5e6ead7}">
+        <p14:section name="Markt &amp; Geschäftsmodell" id="{877B4D6C-A940-ED4A-DB30-0E01B5E6EAD7}">
           <p14:sldIdLst>
             <p14:sldId id="261"/>
             <p14:sldId id="262"/>
           </p14:sldIdLst>
         </p14:section>
-        <p14:section name="Abgrenzung" id="{2cf7dcd2-d97d-1f57-e966-e7605b523c33}">
+        <p14:section name="Abgrenzung" id="{2CF7DCD2-D97D-1F57-E966-E7605B523C33}">
           <p14:sldIdLst>
             <p14:sldId id="263"/>
           </p14:sldIdLst>
         </p14:section>
-        <p14:section name="User Stories &amp; Demo" id="{c65f9fec-bc82-419b-16ed-4f8cb4131b08}">
+        <p14:section name="User Stories &amp; Demo" id="{C65F9FEC-BC82-419B-16ED-4F8CB4131B08}">
           <p14:sldIdLst>
             <p14:sldId id="264"/>
             <p14:sldId id="265"/>
@@ -162,13 +162,13 @@
             <p14:sldId id="269"/>
           </p14:sldIdLst>
         </p14:section>
-        <p14:section name="Systemanalyse" id="{6d8c80b4-38cf-8b62-519a-eccc9f7f13ec}">
+        <p14:section name="Systemanalyse" id="{6D8C80B4-38CF-8B62-519A-ECCC9F7F13EC}">
           <p14:sldIdLst>
             <p14:sldId id="270"/>
             <p14:sldId id="271"/>
           </p14:sldIdLst>
         </p14:section>
-        <p14:section name="Fazit &amp; Ausblick" id="{17457f18-de91-e8ec-988e-26394f76b4d7}">
+        <p14:section name="Fazit &amp; Ausblick" id="{17457F18-DE91-E8EC-988E-26394F76B4D7}">
           <p14:sldIdLst>
             <p14:sldId id="272"/>
             <p14:sldId id="273"/>
@@ -205,234 +205,10 @@
           <a:chExt cx="0" cy="0"/>
         </a:xfrm>
       </p:grpSpPr>
-      <p:sp>
-        <p:nvSpPr>
-          <p:cNvPr id="2" name="Header Placeholder 1"/>
-          <p:cNvSpPr>
-            <a:spLocks noGrp="1"/>
-          </p:cNvSpPr>
-          <p:nvPr>
-            <p:ph type="hdr" sz="quarter"/>
-          </p:nvPr>
-        </p:nvSpPr>
-        <p:spPr>
-          <a:xfrm>
-            <a:off x="0" y="0"/>
-            <a:ext cx="2971800" cy="458788"/>
-          </a:xfrm>
-          <a:prstGeom prst="rect">
-            <a:avLst/>
-          </a:prstGeom>
-        </p:spPr>
-        <p:txBody>
-          <a:bodyPr vert="horz" lIns="91440" tIns="45720" rIns="91440" bIns="45720" rtlCol="0"/>
-          <a:lstStyle>
-            <a:lvl1pPr algn="l">
-              <a:defRPr sz="1200"/>
-            </a:lvl1pPr>
-          </a:lstStyle>
-          <a:p>
-            <a:endParaRPr lang="en-US"/>
-          </a:p>
-        </p:txBody>
-      </p:sp>
-      <p:sp>
-        <p:nvSpPr>
-          <p:cNvPr id="3" name="Date Placeholder 2"/>
-          <p:cNvSpPr>
-            <a:spLocks noGrp="1"/>
-          </p:cNvSpPr>
-          <p:nvPr>
-            <p:ph type="dt" idx="1"/>
-          </p:nvPr>
-        </p:nvSpPr>
-        <p:spPr>
-          <a:xfrm>
-            <a:off x="3884613" y="0"/>
-            <a:ext cx="2971800" cy="458788"/>
-          </a:xfrm>
-          <a:prstGeom prst="rect">
-            <a:avLst/>
-          </a:prstGeom>
-        </p:spPr>
-        <p:txBody>
-          <a:bodyPr vert="horz" lIns="91440" tIns="45720" rIns="91440" bIns="45720" rtlCol="0"/>
-          <a:lstStyle>
-            <a:lvl1pPr algn="r">
-              <a:defRPr sz="1200"/>
-            </a:lvl1pPr>
-          </a:lstStyle>
-          <a:p>
-            <a:fld id="{5282F153-3F37-0F45-9E97-73ACFA13230C}" type="datetimeFigureOut">
-              <a:rPr lang="en-US"/>
-              <a:t>7/23/19</a:t>
-            </a:fld>
-            <a:endParaRPr lang="en-US"/>
-          </a:p>
-        </p:txBody>
-      </p:sp>
-      <p:sp>
-        <p:nvSpPr>
-          <p:cNvPr id="4" name="Slide Image Placeholder 3"/>
-          <p:cNvSpPr>
-            <a:spLocks noGrp="1" noRot="1" noChangeAspect="1"/>
-          </p:cNvSpPr>
-          <p:nvPr>
-            <p:ph type="sldImg" idx="2"/>
-          </p:nvPr>
-        </p:nvSpPr>
-        <p:spPr>
-          <a:xfrm>
-            <a:off x="685800" y="1143000"/>
-            <a:ext cx="5486400" cy="3086100"/>
-          </a:xfrm>
-          <a:prstGeom prst="rect">
-            <a:avLst/>
-          </a:prstGeom>
-          <a:noFill/>
-          <a:ln w="12700">
-            <a:solidFill>
-              <a:prstClr val="black"/>
-            </a:solidFill>
-          </a:ln>
-        </p:spPr>
-        <p:txBody>
-          <a:bodyPr vert="horz" lIns="91440" tIns="45720" rIns="91440" bIns="45720" rtlCol="0" anchor="ctr"/>
-          <a:lstStyle/>
-          <a:p>
-            <a:endParaRPr lang="en-US"/>
-          </a:p>
-        </p:txBody>
-      </p:sp>
-      <p:sp>
-        <p:nvSpPr>
-          <p:cNvPr id="5" name="Notes Placeholder 4"/>
-          <p:cNvSpPr>
-            <a:spLocks noGrp="1"/>
-          </p:cNvSpPr>
-          <p:nvPr>
-            <p:ph type="body" sz="quarter" idx="3"/>
-          </p:nvPr>
-        </p:nvSpPr>
-        <p:spPr>
-          <a:xfrm>
-            <a:off x="685800" y="4400550"/>
-            <a:ext cx="5486400" cy="3600450"/>
-          </a:xfrm>
-          <a:prstGeom prst="rect">
-            <a:avLst/>
-          </a:prstGeom>
-        </p:spPr>
-        <p:txBody>
-          <a:bodyPr vert="horz" lIns="91440" tIns="45720" rIns="91440" bIns="45720" rtlCol="0"/>
-          <a:lstStyle/>
-          <a:p>
-            <a:pPr lvl="0"/>
-            <a:r>
-              <a:rPr lang="en-US"/>
-              <a:t>Click to edit Master text styles</a:t>
-            </a:r>
-          </a:p>
-          <a:p>
-            <a:pPr lvl="1"/>
-            <a:r>
-              <a:rPr lang="en-US"/>
-              <a:t>Second level</a:t>
-            </a:r>
-          </a:p>
-          <a:p>
-            <a:pPr lvl="2"/>
-            <a:r>
-              <a:rPr lang="en-US"/>
-              <a:t>Third level</a:t>
-            </a:r>
-          </a:p>
-          <a:p>
-            <a:pPr lvl="3"/>
-            <a:r>
-              <a:rPr lang="en-US"/>
-              <a:t>Fourth level</a:t>
-            </a:r>
-          </a:p>
-          <a:p>
-            <a:pPr lvl="4"/>
-            <a:r>
-              <a:rPr lang="en-US"/>
-              <a:t>Fifth level</a:t>
-            </a:r>
-          </a:p>
-        </p:txBody>
-      </p:sp>
-      <p:sp>
-        <p:nvSpPr>
-          <p:cNvPr id="6" name="Footer Placeholder 5"/>
-          <p:cNvSpPr>
-            <a:spLocks noGrp="1"/>
-          </p:cNvSpPr>
-          <p:nvPr>
-            <p:ph type="ftr" sz="quarter" idx="4"/>
-          </p:nvPr>
-        </p:nvSpPr>
-        <p:spPr>
-          <a:xfrm>
-            <a:off x="0" y="8685213"/>
-            <a:ext cx="2971800" cy="458787"/>
-          </a:xfrm>
-          <a:prstGeom prst="rect">
-            <a:avLst/>
-          </a:prstGeom>
-        </p:spPr>
-        <p:txBody>
-          <a:bodyPr vert="horz" lIns="91440" tIns="45720" rIns="91440" bIns="45720" rtlCol="0" anchor="b"/>
-          <a:lstStyle>
-            <a:lvl1pPr algn="l">
-              <a:defRPr sz="1200"/>
-            </a:lvl1pPr>
-          </a:lstStyle>
-          <a:p>
-            <a:endParaRPr lang="en-US"/>
-          </a:p>
-        </p:txBody>
-      </p:sp>
-      <p:sp>
-        <p:nvSpPr>
-          <p:cNvPr id="7" name="Slide Number Placeholder 6"/>
-          <p:cNvSpPr>
-            <a:spLocks noGrp="1"/>
-          </p:cNvSpPr>
-          <p:nvPr>
-            <p:ph type="sldNum" sz="quarter" idx="5"/>
-          </p:nvPr>
-        </p:nvSpPr>
-        <p:spPr>
-          <a:xfrm>
-            <a:off x="3884613" y="8685213"/>
-            <a:ext cx="2971800" cy="458787"/>
-          </a:xfrm>
-          <a:prstGeom prst="rect">
-            <a:avLst/>
-          </a:prstGeom>
-        </p:spPr>
-        <p:txBody>
-          <a:bodyPr vert="horz" lIns="91440" tIns="45720" rIns="91440" bIns="45720" rtlCol="0" anchor="b"/>
-          <a:lstStyle>
-            <a:lvl1pPr algn="r">
-              <a:defRPr sz="1200"/>
-            </a:lvl1pPr>
-          </a:lstStyle>
-          <a:p>
-            <a:fld id="{CE5E9CC1-C706-0F49-92D6-E571CC5EEA8F}" type="slidenum">
-              <a:rPr lang="en-US"/>
-              <a:t>‹#›</a:t>
-            </a:fld>
-            <a:endParaRPr lang="en-US"/>
-          </a:p>
-        </p:txBody>
-      </p:sp>
     </p:spTree>
     <p:extLst>
       <p:ext uri="{BB962C8B-B14F-4D97-AF65-F5344CB8AC3E}">
-        <p14:creationId xmlns:p14="http://schemas.microsoft.com/office/powerpoint/2010/main" val="1024086991"/>
+        <p14:creationId xmlns:p14="http://schemas.microsoft.com/office/powerpoint/2010/main" val="3447827903"/>
       </p:ext>
     </p:extLst>
   </p:cSld>
@@ -581,7 +357,6 @@
               <a:t>Begrüßung und kurze Vorstellung des Teams: Fabian, Lennart, Thilo, Helen, Luca und Niharini.
 AutoMedic ist eine digitale Terminbuchungsplattform für Arztpraxen – entstanden in der Fallstudie im Modul Methoden der Wirtschaftsinformatik (3. Semester).</a:t>
             </a:r>
-            <a:endParaRPr lang="en-US" dirty="0"/>
           </a:p>
         </p:txBody>
       </p:sp>
@@ -677,7 +452,6 @@
 • Die Arztpraxis wird automatisch benachrichtigt
 Demo-Hinweis: Während der Simulation die Schritte 1–5 der Reihe nach zeigen.</a:t>
             </a:r>
-            <a:endParaRPr lang="en-US" dirty="0"/>
           </a:p>
         </p:txBody>
       </p:sp>
@@ -773,7 +547,6 @@
 • Ich erhalte eine Statusrückmeldung nach abgeschlossener Vermittlung
 Demo-Hinweis: Während der Simulation die Schritte 1–5 der Reihe nach zeigen.</a:t>
             </a:r>
-            <a:endParaRPr lang="en-US" dirty="0"/>
           </a:p>
         </p:txBody>
       </p:sp>
@@ -870,7 +643,6 @@
 • Der Patient erhält eine Zusammenfassung der Konsultation
 Demo-Hinweis: Während der Simulation die Schritte 1–5 der Reihe nach zeigen.</a:t>
             </a:r>
-            <a:endParaRPr lang="en-US" dirty="0"/>
           </a:p>
         </p:txBody>
       </p:sp>
@@ -966,7 +738,6 @@
 • Wenn keine Apotheke gefunden wird, erhalte ich einen entsprechenden Hinweis
 Demo-Hinweis: Während der Simulation die Schritte 1–5 der Reihe nach zeigen.</a:t>
             </a:r>
-            <a:endParaRPr lang="en-US" dirty="0"/>
           </a:p>
         </p:txBody>
       </p:sp>
@@ -1062,7 +833,6 @@
 • Nach Freigabe erhalte ich eine Willkommensnachricht und Zugang zur Plattform
 Demo-Hinweis: Während der Simulation die Schritte 1–5 der Reihe nach zeigen.</a:t>
             </a:r>
-            <a:endParaRPr lang="en-US" dirty="0"/>
           </a:p>
         </p:txBody>
       </p:sp>
@@ -1152,7 +922,6 @@
 Verwendete Elemente: Pools &amp; Lanes, Datenobjekte, Datenspeicher.
 Werkzeuge: bpmn.io / Camunda.</a:t>
             </a:r>
-            <a:endParaRPr lang="en-US" dirty="0"/>
           </a:p>
         </p:txBody>
       </p:sp>
@@ -1243,7 +1012,6 @@
 5 Sequenzdiagramme: Termin buchen, Überweisen, Post-Termin, Apotheke, Registrierung – also genau die fünf User Stories aus der Demo. Verwendete Fragmente: alt / opt / par / loop; hierarchische Nachrichten-Nummerierung.
 Werkzeuge: Visual Paradigm, draw.io, Camunda.</a:t>
             </a:r>
-            <a:endParaRPr lang="en-US" dirty="0"/>
           </a:p>
         </p:txBody>
       </p:sp>
@@ -1343,7 +1111,6 @@
 • Methodengestützte Systemanalyse schafft Klarheit und verhindert Missverständnisse im Team.
 • BPMN und UML sind ideale Werkzeuge, um Anforderungen präzise zu dokumentieren.</a:t>
             </a:r>
-            <a:endParaRPr lang="en-US" dirty="0"/>
           </a:p>
         </p:txBody>
       </p:sp>
@@ -1435,7 +1202,6 @@
 • UML: Use Case, Klassendiagramm, 5 Sequenzdiagramme (Visual Paradigm)
 • Ausführliche Dokumentation: Projektdokumentation AutoMedic (PDF).</a:t>
             </a:r>
-            <a:endParaRPr lang="en-US" dirty="0"/>
           </a:p>
         </p:txBody>
       </p:sp>
@@ -1530,7 +1296,6 @@
 6. Systemanalyse – BPMN- und UML-Modelle.
 7. Fazit &amp; Ausblick.</a:t>
             </a:r>
-            <a:endParaRPr lang="en-US" dirty="0"/>
           </a:p>
         </p:txBody>
       </p:sp>
@@ -1621,7 +1386,6 @@
 • Vergessene Termine: Ohne automatische Erinnerung entstehen Leerlaufzeiten und No-Shows.
 • Manuelle Änderungen: Verschiebungen und Absagen werden mühsam per Hand eingetragen – fehleranfällig.</a:t>
             </a:r>
-            <a:endParaRPr lang="en-US" dirty="0"/>
           </a:p>
         </p:txBody>
       </p:sp>
@@ -1714,7 +1478,6 @@
 • Entscheidung: Arztpraxis als Domäne mit hohem Digitalisierungsbedarf.
 Team: Fabian, Lennart, Thilo, Helen, Luca, Niharini.</a:t>
             </a:r>
-            <a:endParaRPr lang="en-US" dirty="0"/>
           </a:p>
         </p:txBody>
       </p:sp>
@@ -1804,7 +1567,6 @@
 Was die Praxis kann: Sprechzeiten &amp; Verfügbarkeiten verwalten; Termine einsehen und organisieren; Patienteninformationen pflegen; neue Patienten digital freischalten; Notfälle priorisieren; Post-Termin-Nachbereitung durchführen.
 AutoMedic übernimmt automatisch: Terminverfügbarkeit, Erinnerungen, Benachrichtigungen und Stornierungen.</a:t>
             </a:r>
-            <a:endParaRPr lang="en-US" dirty="0"/>
           </a:p>
         </p:txBody>
       </p:sp>
@@ -1895,7 +1657,6 @@
 • Markttrend: E-Health-Markt in Deutschland &gt; 6 Mrd. EUR (2023); Online-Terminbuchung wächst jährlich um mehr als 20 %.
 • Unser Fokus: kleine &amp; mittlere Praxen ohne eigene IT – hoher Automatisierungsbedarf, einfache Integration.</a:t>
             </a:r>
-            <a:endParaRPr lang="en-US" dirty="0"/>
           </a:p>
         </p:txBody>
       </p:sp>
@@ -1992,7 +1753,6 @@
 • System: Automatisierung, papierlos, Echtzeit-Daten
 Automatisierungspotenziale: Terminverfügbarkeitsprüfung · Erinnerungen &amp; Bestätigungen · Absage &amp; Slot-Freigabe · Rezeptdigitalisierung · Überweisungsvermittlung.</a:t>
             </a:r>
-            <a:endParaRPr lang="en-US" dirty="0"/>
           </a:p>
         </p:txBody>
       </p:sp>
@@ -2082,7 +1842,6 @@
 Unsere Alleinstellungsmerkmale (fett): Überweisungsvermittlung zwischen Haus- und Facharzt, Apotheken-Integration (Verfügbarkeit &amp; Reservierung), vollständige Post-Termin-Nachbereitung (Diagnose, Rezept, Folgetermin) und die Priorisierung von Notfallpatienten.
 Doctolib bietet Post-Termin-Funktionen nur teilweise; Jameda unterstützt Verschieben/Absagen nur eingeschränkt.</a:t>
             </a:r>
-            <a:endParaRPr lang="en-US" dirty="0"/>
           </a:p>
         </p:txBody>
       </p:sp>
@@ -2176,7 +1935,6 @@
 5. Patient – Registrierung &amp; Freischaltung durch die Praxis
 Zu jeder Story gibt es eine eigene Folie mit den Ablaufschritten, die während der Simulation eingeblendet bleibt.</a:t>
             </a:r>
-            <a:endParaRPr lang="en-US" dirty="0"/>
           </a:p>
         </p:txBody>
       </p:sp>
@@ -2254,6 +2012,7 @@
         <a:solidFill>
           <a:schemeClr val="tx1"/>
         </a:solidFill>
+        <a:effectLst/>
       </p:bgPr>
     </p:bg>
     <p:spTree>
@@ -2286,6 +2045,7 @@
         <a:solidFill>
           <a:schemeClr val="bg1"/>
         </a:solidFill>
+        <a:effectLst/>
       </p:bgPr>
     </p:bg>
     <p:spTree>
@@ -2304,14 +2064,14 @@
       </p:grpSpPr>
       <p:pic>
         <p:nvPicPr>
-          <p:cNvPr id="2" name="Image 0" descr="/private/tmp/claude-501/-Users-helenstark-Documents-Lernzettel-WebProgrammierung/d4309317-c575-44fe-a25d-9aac008a91a2/scratchpad/logo_trim.png">    </p:cNvPr>
+          <p:cNvPr id="2" name="Image 0" descr="/private/tmp/claude-501/-Users-helenstark-Documents-Lernzettel-WebProgrammierung/d4309317-c575-44fe-a25d-9aac008a91a2/scratchpad/logo_trim.png"/>
           <p:cNvPicPr>
             <a:picLocks noChangeAspect="1"/>
           </p:cNvPicPr>
           <p:nvPr/>
         </p:nvPicPr>
         <p:blipFill>
-          <a:blip r:embed="rId1"/>
+          <a:blip r:embed="rId2"/>
           <a:stretch>
             <a:fillRect/>
           </a:stretch>
@@ -2329,9 +2089,11 @@
       <p:sp>
         <p:nvSpPr>
           <p:cNvPr id="3" name="Text 0"/>
-          <p:cNvSpPr/>
+          <p:cNvSpPr>
+            <a:spLocks noGrp="1"/>
+          </p:cNvSpPr>
           <p:nvPr>
-            <p:ph idx="101" type="body" hasCustomPrompt="1"/>
+            <p:ph type="body" idx="101" hasCustomPrompt="1"/>
           </p:nvPr>
         </p:nvSpPr>
         <p:spPr>
@@ -2348,7 +2110,7 @@
         <p:txBody>
           <a:bodyPr wrap="square" rtlCol="0"/>
           <a:lstStyle>
-            <a:lvl1pPr indent="0" marL="0">
+            <a:lvl1pPr marL="0" indent="0">
               <a:buNone/>
               <a:defRPr lang="en-US" sz="1400" b="1" dirty="0">
                 <a:solidFill>
@@ -2358,7 +2120,7 @@
             </a:lvl1pPr>
           </a:lstStyle>
           <a:p>
-            <a:pPr indent="0" marL="0">
+            <a:pPr marL="0" indent="0">
               <a:buNone/>
             </a:pPr>
             <a:endParaRPr lang="en-US" sz="1400" dirty="0"/>
@@ -2368,9 +2130,11 @@
       <p:sp>
         <p:nvSpPr>
           <p:cNvPr id="4" name="Text 0"/>
-          <p:cNvSpPr/>
+          <p:cNvSpPr>
+            <a:spLocks noGrp="1"/>
+          </p:cNvSpPr>
           <p:nvPr>
-            <p:ph idx="102" type="title" hasCustomPrompt="1"/>
+            <p:ph type="title" idx="102" hasCustomPrompt="1"/>
           </p:nvPr>
         </p:nvSpPr>
         <p:spPr>
@@ -2387,7 +2151,7 @@
         <p:txBody>
           <a:bodyPr wrap="square" rtlCol="0"/>
           <a:lstStyle>
-            <a:lvl1pPr algn="l" indent="0" marL="0">
+            <a:lvl1pPr marL="0" indent="0" algn="l">
               <a:buNone/>
               <a:defRPr lang="en-US" sz="3400" b="1" dirty="0">
                 <a:solidFill>
@@ -2397,7 +2161,7 @@
             </a:lvl1pPr>
           </a:lstStyle>
           <a:p>
-            <a:pPr algn="l" indent="0" marL="0">
+            <a:pPr marL="0" indent="0" algn="l">
               <a:buNone/>
             </a:pPr>
             <a:endParaRPr lang="en-US" sz="3400" dirty="0"/>
@@ -2424,7 +2188,7 @@
           </a:prstGeom>
           <a:extLst>
             <a:ext uri="{C572A759-6A51-4108-AA02-DFA0A04FC94B}">
-              <ma14:wrappingTextBoxFlag xmlns:ma14="http://schemas.microsoft.com/office/mac/drawingml/2011/main" val="0"/>
+              <ma14:wrappingTextBoxFlag xmlns:ma14="http://schemas.microsoft.com/office/mac/drawingml/2011/main" xmlns="" val="0"/>
             </a:ext>
           </a:extLst>
         </p:spPr>
@@ -2442,8 +2206,8 @@
           <a:p>
             <a:pPr algn="r"/>
             <a:fld id="{F7021451-1387-4CA6-816F-3879F97B5CBC}" type="slidenum">
-              <a:rPr b="0" lang="en-US"/>
-              <a:t>1003</a:t>
+              <a:rPr lang="en-US" b="0"/>
+              <a:t>‹Nr.›</a:t>
             </a:fld>
             <a:endParaRPr lang="en-US"/>
           </a:p>
@@ -2460,6 +2224,11 @@
 <file path=ppt/slideMasters/slideMaster1.xml><?xml version="1.0" encoding="utf-8"?>
 <p:sldMaster xmlns:a="http://schemas.openxmlformats.org/drawingml/2006/main" xmlns:r="http://schemas.openxmlformats.org/officeDocument/2006/relationships" xmlns:p="http://schemas.openxmlformats.org/presentationml/2006/main">
   <p:cSld>
+    <p:bg>
+      <p:bgRef idx="1001">
+        <a:schemeClr val="bg1"/>
+      </p:bgRef>
+    </p:bg>
     <p:spTree>
       <p:nvGrpSpPr>
         <p:cNvPr id="1" name=""/>
@@ -2494,7 +2263,7 @@
           </a:prstGeom>
           <a:extLst>
             <a:ext uri="{C572A759-6A51-4108-AA02-DFA0A04FC94B}">
-              <ma14:wrappingTextBoxFlag xmlns:ma14="http://schemas.microsoft.com/office/mac/drawingml/2011/main" val="0"/>
+              <ma14:wrappingTextBoxFlag xmlns:ma14="http://schemas.microsoft.com/office/mac/drawingml/2011/main" xmlns="" val="0"/>
             </a:ext>
           </a:extLst>
         </p:spPr>
@@ -2512,8 +2281,8 @@
           <a:p>
             <a:pPr algn="r"/>
             <a:fld id="{F7021451-1387-4CA6-816F-3879F97B5CBC}" type="slidenum">
-              <a:rPr b="0" lang="en-US"/>
-              <a:t>null</a:t>
+              <a:rPr lang="en-US" b="0"/>
+              <a:t>‹Nr.›</a:t>
             </a:fld>
             <a:endParaRPr lang="en-US"/>
           </a:p>
@@ -2824,17 +2593,24 @@
             <a:prstDash val="solid"/>
           </a:ln>
         </p:spPr>
+        <p:txBody>
+          <a:bodyPr/>
+          <a:lstStyle/>
+          <a:p>
+            <a:endParaRPr lang="de-DE"/>
+          </a:p>
+        </p:txBody>
       </p:sp>
       <p:pic>
         <p:nvPicPr>
-          <p:cNvPr id="3" name="Image 0" descr="/private/tmp/claude-501/-Users-helenstark-Documents-Lernzettel-WebProgrammierung/d4309317-c575-44fe-a25d-9aac008a91a2/scratchpad/un/ppt/media/image-1-1.png">    </p:cNvPr>
+          <p:cNvPr id="3" name="Image 0" descr="/private/tmp/claude-501/-Users-helenstark-Documents-Lernzettel-WebProgrammierung/d4309317-c575-44fe-a25d-9aac008a91a2/scratchpad/un/ppt/media/image-1-1.png"/>
           <p:cNvPicPr>
             <a:picLocks noChangeAspect="1"/>
           </p:cNvPicPr>
           <p:nvPr/>
         </p:nvPicPr>
         <p:blipFill>
-          <a:blip r:embed="rId1"/>
+          <a:blip r:embed="rId3"/>
           <a:stretch>
             <a:fillRect/>
           </a:stretch>
@@ -2870,7 +2646,7 @@
           <a:bodyPr wrap="square" lIns="0" tIns="0" rIns="0" bIns="0" rtlCol="0" anchor="ctr"/>
           <a:lstStyle/>
           <a:p>
-            <a:pPr indent="0" marL="0">
+            <a:pPr marL="0" indent="0">
               <a:buNone/>
             </a:pPr>
             <a:r>
@@ -2906,7 +2682,7 @@
           <a:bodyPr wrap="square" lIns="0" tIns="0" rIns="0" bIns="0" rtlCol="0" anchor="ctr"/>
           <a:lstStyle/>
           <a:p>
-            <a:pPr indent="0" marL="0">
+            <a:pPr marL="0" indent="0">
               <a:buNone/>
             </a:pPr>
             <a:r>
@@ -2942,7 +2718,7 @@
           <a:bodyPr wrap="square" lIns="0" tIns="0" rIns="0" bIns="0" rtlCol="0" anchor="ctr"/>
           <a:lstStyle/>
           <a:p>
-            <a:pPr indent="0" marL="0">
+            <a:pPr marL="0" indent="0">
               <a:buNone/>
             </a:pPr>
             <a:r>
@@ -2978,7 +2754,7 @@
           <a:bodyPr wrap="square" lIns="0" tIns="0" rIns="0" bIns="0" rtlCol="0" anchor="ctr"/>
           <a:lstStyle/>
           <a:p>
-            <a:pPr indent="0" marL="0">
+            <a:pPr marL="0" indent="0">
               <a:buNone/>
             </a:pPr>
             <a:r>
@@ -3021,9 +2797,11 @@
       <p:sp>
         <p:nvSpPr>
           <p:cNvPr id="2" name="Text 0"/>
-          <p:cNvSpPr/>
+          <p:cNvSpPr>
+            <a:spLocks noGrp="1"/>
+          </p:cNvSpPr>
           <p:nvPr>
-            <p:ph idx="101" type="body" hasCustomPrompt="1"/>
+            <p:ph type="body" idx="101" hasCustomPrompt="1"/>
           </p:nvPr>
         </p:nvSpPr>
         <p:spPr>
@@ -3041,7 +2819,7 @@
           <a:bodyPr wrap="square" lIns="0" tIns="0" rIns="0" bIns="0" rtlCol="0" anchor="ctr"/>
           <a:lstStyle/>
           <a:p>
-            <a:pPr indent="0" marL="0">
+            <a:pPr marL="0" indent="0">
               <a:buNone/>
             </a:pPr>
             <a:r>
@@ -3059,9 +2837,11 @@
       <p:sp>
         <p:nvSpPr>
           <p:cNvPr id="3" name="Text 0"/>
-          <p:cNvSpPr/>
+          <p:cNvSpPr>
+            <a:spLocks noGrp="1"/>
+          </p:cNvSpPr>
           <p:nvPr>
-            <p:ph idx="102" type="title" hasCustomPrompt="1"/>
+            <p:ph type="title" idx="102" hasCustomPrompt="1"/>
           </p:nvPr>
         </p:nvSpPr>
         <p:spPr>
@@ -3079,7 +2859,7 @@
           <a:bodyPr wrap="square" lIns="0" tIns="0" rIns="0" bIns="0" rtlCol="0" anchor="ctr"/>
           <a:lstStyle/>
           <a:p>
-            <a:pPr algn="l" indent="0" marL="0">
+            <a:pPr marL="0" indent="0" algn="l">
               <a:buNone/>
             </a:pPr>
             <a:r>
@@ -3120,6 +2900,13 @@
             <a:prstDash val="solid"/>
           </a:ln>
         </p:spPr>
+        <p:txBody>
+          <a:bodyPr/>
+          <a:lstStyle/>
+          <a:p>
+            <a:endParaRPr lang="de-DE"/>
+          </a:p>
+        </p:txBody>
       </p:sp>
       <p:sp>
         <p:nvSpPr>
@@ -3145,17 +2932,24 @@
             <a:prstDash val="solid"/>
           </a:ln>
         </p:spPr>
+        <p:txBody>
+          <a:bodyPr/>
+          <a:lstStyle/>
+          <a:p>
+            <a:endParaRPr lang="de-DE"/>
+          </a:p>
+        </p:txBody>
       </p:sp>
       <p:pic>
         <p:nvPicPr>
-          <p:cNvPr id="6" name="Image 0" descr="preencoded.png">    </p:cNvPr>
+          <p:cNvPr id="6" name="Image 0" descr="preencoded.png"/>
           <p:cNvPicPr>
             <a:picLocks noChangeAspect="1"/>
           </p:cNvPicPr>
           <p:nvPr/>
         </p:nvPicPr>
         <p:blipFill>
-          <a:blip r:embed="rId1"/>
+          <a:blip r:embed="rId3"/>
           <a:stretch>
             <a:fillRect/>
           </a:stretch>
@@ -3191,7 +2985,7 @@
           <a:bodyPr wrap="square" lIns="0" tIns="0" rIns="0" bIns="0" rtlCol="0" anchor="ctr"/>
           <a:lstStyle/>
           <a:p>
-            <a:pPr indent="0" marL="0">
+            <a:pPr marL="0" indent="0">
               <a:buNone/>
             </a:pPr>
             <a:r>
@@ -3202,9 +2996,6 @@
               </a:rPr>
               <a:t>Als </a:t>
             </a:r>
-            <a:pPr indent="0" marL="0">
-              <a:buNone/>
-            </a:pPr>
             <a:r>
               <a:rPr lang="en-US" sz="2100" b="1" dirty="0">
                 <a:solidFill>
@@ -3213,9 +3004,6 @@
               </a:rPr>
               <a:t>Patient</a:t>
             </a:r>
-            <a:pPr indent="0" marL="0">
-              <a:buNone/>
-            </a:pPr>
             <a:r>
               <a:rPr lang="en-US" sz="2100" dirty="0">
                 <a:solidFill>
@@ -3224,9 +3012,6 @@
               </a:rPr>
               <a:t> möchte ich online einen freien Termin finden und direkt buchen, </a:t>
             </a:r>
-            <a:pPr indent="0" marL="0">
-              <a:buNone/>
-            </a:pPr>
             <a:r>
               <a:rPr lang="en-US" sz="2100" dirty="0">
                 <a:solidFill>
@@ -3265,6 +3050,13 @@
             <a:prstDash val="solid"/>
           </a:ln>
         </p:spPr>
+        <p:txBody>
+          <a:bodyPr/>
+          <a:lstStyle/>
+          <a:p>
+            <a:endParaRPr lang="de-DE"/>
+          </a:p>
+        </p:txBody>
       </p:sp>
       <p:sp>
         <p:nvSpPr>
@@ -3290,6 +3082,13 @@
             <a:prstDash val="solid"/>
           </a:ln>
         </p:spPr>
+        <p:txBody>
+          <a:bodyPr/>
+          <a:lstStyle/>
+          <a:p>
+            <a:endParaRPr lang="de-DE"/>
+          </a:p>
+        </p:txBody>
       </p:sp>
       <p:sp>
         <p:nvSpPr>
@@ -3312,7 +3111,7 @@
           <a:bodyPr wrap="square" lIns="0" tIns="0" rIns="0" bIns="0" rtlCol="0" anchor="ctr"/>
           <a:lstStyle/>
           <a:p>
-            <a:pPr algn="ctr" indent="0" marL="0">
+            <a:pPr marL="0" indent="0" algn="ctr">
               <a:buNone/>
             </a:pPr>
             <a:r>
@@ -3348,7 +3147,7 @@
           <a:bodyPr wrap="square" lIns="0" tIns="0" rIns="0" bIns="0" rtlCol="0" anchor="t"/>
           <a:lstStyle/>
           <a:p>
-            <a:pPr algn="ctr" indent="0" marL="0">
+            <a:pPr marL="0" indent="0" algn="ctr">
               <a:buNone/>
             </a:pPr>
             <a:r>
@@ -3365,14 +3164,14 @@
       </p:sp>
       <p:pic>
         <p:nvPicPr>
-          <p:cNvPr id="12" name="Image 1" descr="preencoded.png">    </p:cNvPr>
+          <p:cNvPr id="12" name="Image 1" descr="preencoded.png"/>
           <p:cNvPicPr>
             <a:picLocks noChangeAspect="1"/>
           </p:cNvPicPr>
           <p:nvPr/>
         </p:nvPicPr>
         <p:blipFill>
-          <a:blip r:embed="rId2"/>
+          <a:blip r:embed="rId4"/>
           <a:stretch>
             <a:fillRect/>
           </a:stretch>
@@ -3413,6 +3212,13 @@
             <a:prstDash val="solid"/>
           </a:ln>
         </p:spPr>
+        <p:txBody>
+          <a:bodyPr/>
+          <a:lstStyle/>
+          <a:p>
+            <a:endParaRPr lang="de-DE"/>
+          </a:p>
+        </p:txBody>
       </p:sp>
       <p:sp>
         <p:nvSpPr>
@@ -3438,6 +3244,13 @@
             <a:prstDash val="solid"/>
           </a:ln>
         </p:spPr>
+        <p:txBody>
+          <a:bodyPr/>
+          <a:lstStyle/>
+          <a:p>
+            <a:endParaRPr lang="de-DE"/>
+          </a:p>
+        </p:txBody>
       </p:sp>
       <p:sp>
         <p:nvSpPr>
@@ -3460,7 +3273,7 @@
           <a:bodyPr wrap="square" lIns="0" tIns="0" rIns="0" bIns="0" rtlCol="0" anchor="ctr"/>
           <a:lstStyle/>
           <a:p>
-            <a:pPr algn="ctr" indent="0" marL="0">
+            <a:pPr marL="0" indent="0" algn="ctr">
               <a:buNone/>
             </a:pPr>
             <a:r>
@@ -3496,7 +3309,7 @@
           <a:bodyPr wrap="square" lIns="0" tIns="0" rIns="0" bIns="0" rtlCol="0" anchor="t"/>
           <a:lstStyle/>
           <a:p>
-            <a:pPr algn="ctr" indent="0" marL="0">
+            <a:pPr marL="0" indent="0" algn="ctr">
               <a:buNone/>
             </a:pPr>
             <a:r>
@@ -3513,14 +3326,14 @@
       </p:sp>
       <p:pic>
         <p:nvPicPr>
-          <p:cNvPr id="17" name="Image 2" descr="preencoded.png">    </p:cNvPr>
+          <p:cNvPr id="17" name="Image 2" descr="preencoded.png"/>
           <p:cNvPicPr>
             <a:picLocks noChangeAspect="1"/>
           </p:cNvPicPr>
           <p:nvPr/>
         </p:nvPicPr>
         <p:blipFill>
-          <a:blip r:embed="rId3"/>
+          <a:blip r:embed="rId4"/>
           <a:stretch>
             <a:fillRect/>
           </a:stretch>
@@ -3561,6 +3374,13 @@
             <a:prstDash val="solid"/>
           </a:ln>
         </p:spPr>
+        <p:txBody>
+          <a:bodyPr/>
+          <a:lstStyle/>
+          <a:p>
+            <a:endParaRPr lang="de-DE"/>
+          </a:p>
+        </p:txBody>
       </p:sp>
       <p:sp>
         <p:nvSpPr>
@@ -3586,6 +3406,13 @@
             <a:prstDash val="solid"/>
           </a:ln>
         </p:spPr>
+        <p:txBody>
+          <a:bodyPr/>
+          <a:lstStyle/>
+          <a:p>
+            <a:endParaRPr lang="de-DE"/>
+          </a:p>
+        </p:txBody>
       </p:sp>
       <p:sp>
         <p:nvSpPr>
@@ -3608,7 +3435,7 @@
           <a:bodyPr wrap="square" lIns="0" tIns="0" rIns="0" bIns="0" rtlCol="0" anchor="ctr"/>
           <a:lstStyle/>
           <a:p>
-            <a:pPr algn="ctr" indent="0" marL="0">
+            <a:pPr marL="0" indent="0" algn="ctr">
               <a:buNone/>
             </a:pPr>
             <a:r>
@@ -3644,7 +3471,7 @@
           <a:bodyPr wrap="square" lIns="0" tIns="0" rIns="0" bIns="0" rtlCol="0" anchor="t"/>
           <a:lstStyle/>
           <a:p>
-            <a:pPr algn="ctr" indent="0" marL="0">
+            <a:pPr marL="0" indent="0" algn="ctr">
               <a:buNone/>
             </a:pPr>
             <a:r>
@@ -3661,7 +3488,7 @@
       </p:sp>
       <p:pic>
         <p:nvPicPr>
-          <p:cNvPr id="22" name="Image 3" descr="preencoded.png">    </p:cNvPr>
+          <p:cNvPr id="22" name="Image 3" descr="preencoded.png"/>
           <p:cNvPicPr>
             <a:picLocks noChangeAspect="1"/>
           </p:cNvPicPr>
@@ -3709,6 +3536,13 @@
             <a:prstDash val="solid"/>
           </a:ln>
         </p:spPr>
+        <p:txBody>
+          <a:bodyPr/>
+          <a:lstStyle/>
+          <a:p>
+            <a:endParaRPr lang="de-DE"/>
+          </a:p>
+        </p:txBody>
       </p:sp>
       <p:sp>
         <p:nvSpPr>
@@ -3734,6 +3568,13 @@
             <a:prstDash val="solid"/>
           </a:ln>
         </p:spPr>
+        <p:txBody>
+          <a:bodyPr/>
+          <a:lstStyle/>
+          <a:p>
+            <a:endParaRPr lang="de-DE"/>
+          </a:p>
+        </p:txBody>
       </p:sp>
       <p:sp>
         <p:nvSpPr>
@@ -3756,7 +3597,7 @@
           <a:bodyPr wrap="square" lIns="0" tIns="0" rIns="0" bIns="0" rtlCol="0" anchor="ctr"/>
           <a:lstStyle/>
           <a:p>
-            <a:pPr algn="ctr" indent="0" marL="0">
+            <a:pPr marL="0" indent="0" algn="ctr">
               <a:buNone/>
             </a:pPr>
             <a:r>
@@ -3792,7 +3633,7 @@
           <a:bodyPr wrap="square" lIns="0" tIns="0" rIns="0" bIns="0" rtlCol="0" anchor="t"/>
           <a:lstStyle/>
           <a:p>
-            <a:pPr algn="ctr" indent="0" marL="0">
+            <a:pPr marL="0" indent="0" algn="ctr">
               <a:buNone/>
             </a:pPr>
             <a:r>
@@ -3809,14 +3650,14 @@
       </p:sp>
       <p:pic>
         <p:nvPicPr>
-          <p:cNvPr id="27" name="Image 4" descr="preencoded.png">    </p:cNvPr>
+          <p:cNvPr id="27" name="Image 4" descr="preencoded.png"/>
           <p:cNvPicPr>
             <a:picLocks noChangeAspect="1"/>
           </p:cNvPicPr>
           <p:nvPr/>
         </p:nvPicPr>
         <p:blipFill>
-          <a:blip r:embed="rId5"/>
+          <a:blip r:embed="rId4"/>
           <a:stretch>
             <a:fillRect/>
           </a:stretch>
@@ -3857,6 +3698,13 @@
             <a:prstDash val="solid"/>
           </a:ln>
         </p:spPr>
+        <p:txBody>
+          <a:bodyPr/>
+          <a:lstStyle/>
+          <a:p>
+            <a:endParaRPr lang="de-DE"/>
+          </a:p>
+        </p:txBody>
       </p:sp>
       <p:sp>
         <p:nvSpPr>
@@ -3882,6 +3730,13 @@
             <a:prstDash val="solid"/>
           </a:ln>
         </p:spPr>
+        <p:txBody>
+          <a:bodyPr/>
+          <a:lstStyle/>
+          <a:p>
+            <a:endParaRPr lang="de-DE"/>
+          </a:p>
+        </p:txBody>
       </p:sp>
       <p:sp>
         <p:nvSpPr>
@@ -3904,7 +3759,7 @@
           <a:bodyPr wrap="square" lIns="0" tIns="0" rIns="0" bIns="0" rtlCol="0" anchor="ctr"/>
           <a:lstStyle/>
           <a:p>
-            <a:pPr algn="ctr" indent="0" marL="0">
+            <a:pPr marL="0" indent="0" algn="ctr">
               <a:buNone/>
             </a:pPr>
             <a:r>
@@ -3940,7 +3795,7 @@
           <a:bodyPr wrap="square" lIns="0" tIns="0" rIns="0" bIns="0" rtlCol="0" anchor="t"/>
           <a:lstStyle/>
           <a:p>
-            <a:pPr algn="ctr" indent="0" marL="0">
+            <a:pPr marL="0" indent="0" algn="ctr">
               <a:buNone/>
             </a:pPr>
             <a:r>
@@ -3957,7 +3812,7 @@
       </p:sp>
       <p:sp>
         <p:nvSpPr>
-          <p:cNvPr id="25" name="Slide Number Placeholder 0"/>
+          <p:cNvPr id="32" name="Slide Number Placeholder 0"/>
           <p:cNvSpPr>
             <a:spLocks noGrp="1"/>
           </p:cNvSpPr>
@@ -3975,7 +3830,7 @@
           </a:prstGeom>
           <a:extLst>
             <a:ext uri="{C572A759-6A51-4108-AA02-DFA0A04FC94B}">
-              <ma14:wrappingTextBoxFlag xmlns:ma14="http://schemas.microsoft.com/office/mac/drawingml/2011/main" val="0"/>
+              <ma14:wrappingTextBoxFlag xmlns:ma14="http://schemas.microsoft.com/office/mac/drawingml/2011/main" xmlns="" val="0"/>
             </a:ext>
           </a:extLst>
         </p:spPr>
@@ -3993,7 +3848,7 @@
           <a:p>
             <a:pPr algn="r"/>
             <a:fld id="{F7021451-1387-4CA6-816F-3879F97B5CBC}" type="slidenum">
-              <a:rPr b="0" lang="en-US"/>
+              <a:rPr lang="en-US" b="0"/>
               <a:t>10</a:t>
             </a:fld>
             <a:endParaRPr lang="en-US"/>
@@ -4028,9 +3883,11 @@
       <p:sp>
         <p:nvSpPr>
           <p:cNvPr id="2" name="Text 0"/>
-          <p:cNvSpPr/>
+          <p:cNvSpPr>
+            <a:spLocks noGrp="1"/>
+          </p:cNvSpPr>
           <p:nvPr>
-            <p:ph idx="101" type="body" hasCustomPrompt="1"/>
+            <p:ph type="body" idx="101" hasCustomPrompt="1"/>
           </p:nvPr>
         </p:nvSpPr>
         <p:spPr>
@@ -4048,7 +3905,7 @@
           <a:bodyPr wrap="square" lIns="0" tIns="0" rIns="0" bIns="0" rtlCol="0" anchor="ctr"/>
           <a:lstStyle/>
           <a:p>
-            <a:pPr indent="0" marL="0">
+            <a:pPr marL="0" indent="0">
               <a:buNone/>
             </a:pPr>
             <a:r>
@@ -4066,9 +3923,11 @@
       <p:sp>
         <p:nvSpPr>
           <p:cNvPr id="3" name="Text 0"/>
-          <p:cNvSpPr/>
+          <p:cNvSpPr>
+            <a:spLocks noGrp="1"/>
+          </p:cNvSpPr>
           <p:nvPr>
-            <p:ph idx="102" type="title" hasCustomPrompt="1"/>
+            <p:ph type="title" idx="102" hasCustomPrompt="1"/>
           </p:nvPr>
         </p:nvSpPr>
         <p:spPr>
@@ -4086,7 +3945,7 @@
           <a:bodyPr wrap="square" lIns="0" tIns="0" rIns="0" bIns="0" rtlCol="0" anchor="ctr"/>
           <a:lstStyle/>
           <a:p>
-            <a:pPr algn="l" indent="0" marL="0">
+            <a:pPr marL="0" indent="0" algn="l">
               <a:buNone/>
             </a:pPr>
             <a:r>
@@ -4127,6 +3986,13 @@
             <a:prstDash val="solid"/>
           </a:ln>
         </p:spPr>
+        <p:txBody>
+          <a:bodyPr/>
+          <a:lstStyle/>
+          <a:p>
+            <a:endParaRPr lang="de-DE"/>
+          </a:p>
+        </p:txBody>
       </p:sp>
       <p:sp>
         <p:nvSpPr>
@@ -4152,17 +4018,24 @@
             <a:prstDash val="solid"/>
           </a:ln>
         </p:spPr>
+        <p:txBody>
+          <a:bodyPr/>
+          <a:lstStyle/>
+          <a:p>
+            <a:endParaRPr lang="de-DE"/>
+          </a:p>
+        </p:txBody>
       </p:sp>
       <p:pic>
         <p:nvPicPr>
-          <p:cNvPr id="6" name="Image 0" descr="preencoded.png">    </p:cNvPr>
+          <p:cNvPr id="6" name="Image 0" descr="preencoded.png"/>
           <p:cNvPicPr>
             <a:picLocks noChangeAspect="1"/>
           </p:cNvPicPr>
           <p:nvPr/>
         </p:nvPicPr>
         <p:blipFill>
-          <a:blip r:embed="rId1"/>
+          <a:blip r:embed="rId3"/>
           <a:stretch>
             <a:fillRect/>
           </a:stretch>
@@ -4198,7 +4071,7 @@
           <a:bodyPr wrap="square" lIns="0" tIns="0" rIns="0" bIns="0" rtlCol="0" anchor="ctr"/>
           <a:lstStyle/>
           <a:p>
-            <a:pPr indent="0" marL="0">
+            <a:pPr marL="0" indent="0">
               <a:buNone/>
             </a:pPr>
             <a:r>
@@ -4209,9 +4082,6 @@
               </a:rPr>
               <a:t>Als </a:t>
             </a:r>
-            <a:pPr indent="0" marL="0">
-              <a:buNone/>
-            </a:pPr>
             <a:r>
               <a:rPr lang="en-US" sz="2100" b="1" dirty="0">
                 <a:solidFill>
@@ -4220,9 +4090,6 @@
               </a:rPr>
               <a:t>Hausarzt</a:t>
             </a:r>
-            <a:pPr indent="0" marL="0">
-              <a:buNone/>
-            </a:pPr>
             <a:r>
               <a:rPr lang="en-US" sz="2100" dirty="0">
                 <a:solidFill>
@@ -4231,9 +4098,6 @@
               </a:rPr>
               <a:t> möchte ich einen Patienten digital überweisen und direkt einen Facharzttermin vermitteln lassen, </a:t>
             </a:r>
-            <a:pPr indent="0" marL="0">
-              <a:buNone/>
-            </a:pPr>
             <a:r>
               <a:rPr lang="en-US" sz="2100" dirty="0">
                 <a:solidFill>
@@ -4272,6 +4136,13 @@
             <a:prstDash val="solid"/>
           </a:ln>
         </p:spPr>
+        <p:txBody>
+          <a:bodyPr/>
+          <a:lstStyle/>
+          <a:p>
+            <a:endParaRPr lang="de-DE"/>
+          </a:p>
+        </p:txBody>
       </p:sp>
       <p:sp>
         <p:nvSpPr>
@@ -4297,6 +4168,13 @@
             <a:prstDash val="solid"/>
           </a:ln>
         </p:spPr>
+        <p:txBody>
+          <a:bodyPr/>
+          <a:lstStyle/>
+          <a:p>
+            <a:endParaRPr lang="de-DE"/>
+          </a:p>
+        </p:txBody>
       </p:sp>
       <p:sp>
         <p:nvSpPr>
@@ -4319,7 +4197,7 @@
           <a:bodyPr wrap="square" lIns="0" tIns="0" rIns="0" bIns="0" rtlCol="0" anchor="ctr"/>
           <a:lstStyle/>
           <a:p>
-            <a:pPr algn="ctr" indent="0" marL="0">
+            <a:pPr marL="0" indent="0" algn="ctr">
               <a:buNone/>
             </a:pPr>
             <a:r>
@@ -4355,7 +4233,7 @@
           <a:bodyPr wrap="square" lIns="0" tIns="0" rIns="0" bIns="0" rtlCol="0" anchor="t"/>
           <a:lstStyle/>
           <a:p>
-            <a:pPr algn="ctr" indent="0" marL="0">
+            <a:pPr marL="0" indent="0" algn="ctr">
               <a:buNone/>
             </a:pPr>
             <a:r>
@@ -4372,14 +4250,14 @@
       </p:sp>
       <p:pic>
         <p:nvPicPr>
-          <p:cNvPr id="12" name="Image 1" descr="preencoded.png">    </p:cNvPr>
+          <p:cNvPr id="12" name="Image 1" descr="preencoded.png"/>
           <p:cNvPicPr>
             <a:picLocks noChangeAspect="1"/>
           </p:cNvPicPr>
           <p:nvPr/>
         </p:nvPicPr>
         <p:blipFill>
-          <a:blip r:embed="rId2"/>
+          <a:blip r:embed="rId4"/>
           <a:stretch>
             <a:fillRect/>
           </a:stretch>
@@ -4420,6 +4298,13 @@
             <a:prstDash val="solid"/>
           </a:ln>
         </p:spPr>
+        <p:txBody>
+          <a:bodyPr/>
+          <a:lstStyle/>
+          <a:p>
+            <a:endParaRPr lang="de-DE"/>
+          </a:p>
+        </p:txBody>
       </p:sp>
       <p:sp>
         <p:nvSpPr>
@@ -4445,6 +4330,13 @@
             <a:prstDash val="solid"/>
           </a:ln>
         </p:spPr>
+        <p:txBody>
+          <a:bodyPr/>
+          <a:lstStyle/>
+          <a:p>
+            <a:endParaRPr lang="de-DE"/>
+          </a:p>
+        </p:txBody>
       </p:sp>
       <p:sp>
         <p:nvSpPr>
@@ -4467,7 +4359,7 @@
           <a:bodyPr wrap="square" lIns="0" tIns="0" rIns="0" bIns="0" rtlCol="0" anchor="ctr"/>
           <a:lstStyle/>
           <a:p>
-            <a:pPr algn="ctr" indent="0" marL="0">
+            <a:pPr marL="0" indent="0" algn="ctr">
               <a:buNone/>
             </a:pPr>
             <a:r>
@@ -4503,7 +4395,7 @@
           <a:bodyPr wrap="square" lIns="0" tIns="0" rIns="0" bIns="0" rtlCol="0" anchor="t"/>
           <a:lstStyle/>
           <a:p>
-            <a:pPr algn="ctr" indent="0" marL="0">
+            <a:pPr marL="0" indent="0" algn="ctr">
               <a:buNone/>
             </a:pPr>
             <a:r>
@@ -4520,14 +4412,14 @@
       </p:sp>
       <p:pic>
         <p:nvPicPr>
-          <p:cNvPr id="17" name="Image 2" descr="preencoded.png">    </p:cNvPr>
+          <p:cNvPr id="17" name="Image 2" descr="preencoded.png"/>
           <p:cNvPicPr>
             <a:picLocks noChangeAspect="1"/>
           </p:cNvPicPr>
           <p:nvPr/>
         </p:nvPicPr>
         <p:blipFill>
-          <a:blip r:embed="rId3"/>
+          <a:blip r:embed="rId4"/>
           <a:stretch>
             <a:fillRect/>
           </a:stretch>
@@ -4568,6 +4460,13 @@
             <a:prstDash val="solid"/>
           </a:ln>
         </p:spPr>
+        <p:txBody>
+          <a:bodyPr/>
+          <a:lstStyle/>
+          <a:p>
+            <a:endParaRPr lang="de-DE"/>
+          </a:p>
+        </p:txBody>
       </p:sp>
       <p:sp>
         <p:nvSpPr>
@@ -4593,6 +4492,13 @@
             <a:prstDash val="solid"/>
           </a:ln>
         </p:spPr>
+        <p:txBody>
+          <a:bodyPr/>
+          <a:lstStyle/>
+          <a:p>
+            <a:endParaRPr lang="de-DE"/>
+          </a:p>
+        </p:txBody>
       </p:sp>
       <p:sp>
         <p:nvSpPr>
@@ -4615,7 +4521,7 @@
           <a:bodyPr wrap="square" lIns="0" tIns="0" rIns="0" bIns="0" rtlCol="0" anchor="ctr"/>
           <a:lstStyle/>
           <a:p>
-            <a:pPr algn="ctr" indent="0" marL="0">
+            <a:pPr marL="0" indent="0" algn="ctr">
               <a:buNone/>
             </a:pPr>
             <a:r>
@@ -4651,7 +4557,7 @@
           <a:bodyPr wrap="square" lIns="0" tIns="0" rIns="0" bIns="0" rtlCol="0" anchor="t"/>
           <a:lstStyle/>
           <a:p>
-            <a:pPr algn="ctr" indent="0" marL="0">
+            <a:pPr marL="0" indent="0" algn="ctr">
               <a:buNone/>
             </a:pPr>
             <a:r>
@@ -4668,7 +4574,7 @@
       </p:sp>
       <p:pic>
         <p:nvPicPr>
-          <p:cNvPr id="22" name="Image 3" descr="preencoded.png">    </p:cNvPr>
+          <p:cNvPr id="22" name="Image 3" descr="preencoded.png"/>
           <p:cNvPicPr>
             <a:picLocks noChangeAspect="1"/>
           </p:cNvPicPr>
@@ -4716,6 +4622,13 @@
             <a:prstDash val="solid"/>
           </a:ln>
         </p:spPr>
+        <p:txBody>
+          <a:bodyPr/>
+          <a:lstStyle/>
+          <a:p>
+            <a:endParaRPr lang="de-DE"/>
+          </a:p>
+        </p:txBody>
       </p:sp>
       <p:sp>
         <p:nvSpPr>
@@ -4741,6 +4654,13 @@
             <a:prstDash val="solid"/>
           </a:ln>
         </p:spPr>
+        <p:txBody>
+          <a:bodyPr/>
+          <a:lstStyle/>
+          <a:p>
+            <a:endParaRPr lang="de-DE"/>
+          </a:p>
+        </p:txBody>
       </p:sp>
       <p:sp>
         <p:nvSpPr>
@@ -4763,7 +4683,7 @@
           <a:bodyPr wrap="square" lIns="0" tIns="0" rIns="0" bIns="0" rtlCol="0" anchor="ctr"/>
           <a:lstStyle/>
           <a:p>
-            <a:pPr algn="ctr" indent="0" marL="0">
+            <a:pPr marL="0" indent="0" algn="ctr">
               <a:buNone/>
             </a:pPr>
             <a:r>
@@ -4799,7 +4719,7 @@
           <a:bodyPr wrap="square" lIns="0" tIns="0" rIns="0" bIns="0" rtlCol="0" anchor="t"/>
           <a:lstStyle/>
           <a:p>
-            <a:pPr algn="ctr" indent="0" marL="0">
+            <a:pPr marL="0" indent="0" algn="ctr">
               <a:buNone/>
             </a:pPr>
             <a:r>
@@ -4816,14 +4736,14 @@
       </p:sp>
       <p:pic>
         <p:nvPicPr>
-          <p:cNvPr id="27" name="Image 4" descr="preencoded.png">    </p:cNvPr>
+          <p:cNvPr id="27" name="Image 4" descr="preencoded.png"/>
           <p:cNvPicPr>
             <a:picLocks noChangeAspect="1"/>
           </p:cNvPicPr>
           <p:nvPr/>
         </p:nvPicPr>
         <p:blipFill>
-          <a:blip r:embed="rId5"/>
+          <a:blip r:embed="rId4"/>
           <a:stretch>
             <a:fillRect/>
           </a:stretch>
@@ -4864,6 +4784,13 @@
             <a:prstDash val="solid"/>
           </a:ln>
         </p:spPr>
+        <p:txBody>
+          <a:bodyPr/>
+          <a:lstStyle/>
+          <a:p>
+            <a:endParaRPr lang="de-DE"/>
+          </a:p>
+        </p:txBody>
       </p:sp>
       <p:sp>
         <p:nvSpPr>
@@ -4889,6 +4816,13 @@
             <a:prstDash val="solid"/>
           </a:ln>
         </p:spPr>
+        <p:txBody>
+          <a:bodyPr/>
+          <a:lstStyle/>
+          <a:p>
+            <a:endParaRPr lang="de-DE"/>
+          </a:p>
+        </p:txBody>
       </p:sp>
       <p:sp>
         <p:nvSpPr>
@@ -4911,7 +4845,7 @@
           <a:bodyPr wrap="square" lIns="0" tIns="0" rIns="0" bIns="0" rtlCol="0" anchor="ctr"/>
           <a:lstStyle/>
           <a:p>
-            <a:pPr algn="ctr" indent="0" marL="0">
+            <a:pPr marL="0" indent="0" algn="ctr">
               <a:buNone/>
             </a:pPr>
             <a:r>
@@ -4947,7 +4881,7 @@
           <a:bodyPr wrap="square" lIns="0" tIns="0" rIns="0" bIns="0" rtlCol="0" anchor="t"/>
           <a:lstStyle/>
           <a:p>
-            <a:pPr algn="ctr" indent="0" marL="0">
+            <a:pPr marL="0" indent="0" algn="ctr">
               <a:buNone/>
             </a:pPr>
             <a:r>
@@ -4964,7 +4898,7 @@
       </p:sp>
       <p:sp>
         <p:nvSpPr>
-          <p:cNvPr id="25" name="Slide Number Placeholder 0"/>
+          <p:cNvPr id="32" name="Slide Number Placeholder 0"/>
           <p:cNvSpPr>
             <a:spLocks noGrp="1"/>
           </p:cNvSpPr>
@@ -4982,7 +4916,7 @@
           </a:prstGeom>
           <a:extLst>
             <a:ext uri="{C572A759-6A51-4108-AA02-DFA0A04FC94B}">
-              <ma14:wrappingTextBoxFlag xmlns:ma14="http://schemas.microsoft.com/office/mac/drawingml/2011/main" val="0"/>
+              <ma14:wrappingTextBoxFlag xmlns:ma14="http://schemas.microsoft.com/office/mac/drawingml/2011/main" xmlns="" val="0"/>
             </a:ext>
           </a:extLst>
         </p:spPr>
@@ -5000,7 +4934,7 @@
           <a:p>
             <a:pPr algn="r"/>
             <a:fld id="{F7021451-1387-4CA6-816F-3879F97B5CBC}" type="slidenum">
-              <a:rPr b="0" lang="en-US"/>
+              <a:rPr lang="en-US" b="0"/>
               <a:t>11</a:t>
             </a:fld>
             <a:endParaRPr lang="en-US"/>
@@ -5035,9 +4969,11 @@
       <p:sp>
         <p:nvSpPr>
           <p:cNvPr id="2" name="Text 0"/>
-          <p:cNvSpPr/>
+          <p:cNvSpPr>
+            <a:spLocks noGrp="1"/>
+          </p:cNvSpPr>
           <p:nvPr>
-            <p:ph idx="101" type="body" hasCustomPrompt="1"/>
+            <p:ph type="body" idx="101" hasCustomPrompt="1"/>
           </p:nvPr>
         </p:nvSpPr>
         <p:spPr>
@@ -5055,7 +4991,7 @@
           <a:bodyPr wrap="square" lIns="0" tIns="0" rIns="0" bIns="0" rtlCol="0" anchor="ctr"/>
           <a:lstStyle/>
           <a:p>
-            <a:pPr indent="0" marL="0">
+            <a:pPr marL="0" indent="0">
               <a:buNone/>
             </a:pPr>
             <a:r>
@@ -5073,9 +5009,11 @@
       <p:sp>
         <p:nvSpPr>
           <p:cNvPr id="3" name="Text 0"/>
-          <p:cNvSpPr/>
+          <p:cNvSpPr>
+            <a:spLocks noGrp="1"/>
+          </p:cNvSpPr>
           <p:nvPr>
-            <p:ph idx="102" type="title" hasCustomPrompt="1"/>
+            <p:ph type="title" idx="102" hasCustomPrompt="1"/>
           </p:nvPr>
         </p:nvSpPr>
         <p:spPr>
@@ -5093,7 +5031,7 @@
           <a:bodyPr wrap="square" lIns="0" tIns="0" rIns="0" bIns="0" rtlCol="0" anchor="ctr"/>
           <a:lstStyle/>
           <a:p>
-            <a:pPr algn="l" indent="0" marL="0">
+            <a:pPr marL="0" indent="0" algn="l">
               <a:buNone/>
             </a:pPr>
             <a:r>
@@ -5134,6 +5072,13 @@
             <a:prstDash val="solid"/>
           </a:ln>
         </p:spPr>
+        <p:txBody>
+          <a:bodyPr/>
+          <a:lstStyle/>
+          <a:p>
+            <a:endParaRPr lang="de-DE"/>
+          </a:p>
+        </p:txBody>
       </p:sp>
       <p:sp>
         <p:nvSpPr>
@@ -5159,17 +5104,24 @@
             <a:prstDash val="solid"/>
           </a:ln>
         </p:spPr>
+        <p:txBody>
+          <a:bodyPr/>
+          <a:lstStyle/>
+          <a:p>
+            <a:endParaRPr lang="de-DE"/>
+          </a:p>
+        </p:txBody>
       </p:sp>
       <p:pic>
         <p:nvPicPr>
-          <p:cNvPr id="6" name="Image 0" descr="preencoded.png">    </p:cNvPr>
+          <p:cNvPr id="6" name="Image 0" descr="preencoded.png"/>
           <p:cNvPicPr>
             <a:picLocks noChangeAspect="1"/>
           </p:cNvPicPr>
           <p:nvPr/>
         </p:nvPicPr>
         <p:blipFill>
-          <a:blip r:embed="rId1"/>
+          <a:blip r:embed="rId3"/>
           <a:stretch>
             <a:fillRect/>
           </a:stretch>
@@ -5205,7 +5157,7 @@
           <a:bodyPr wrap="square" lIns="0" tIns="0" rIns="0" bIns="0" rtlCol="0" anchor="ctr"/>
           <a:lstStyle/>
           <a:p>
-            <a:pPr indent="0" marL="0">
+            <a:pPr marL="0" indent="0">
               <a:buNone/>
             </a:pPr>
             <a:r>
@@ -5216,9 +5168,6 @@
               </a:rPr>
               <a:t>Als </a:t>
             </a:r>
-            <a:pPr indent="0" marL="0">
-              <a:buNone/>
-            </a:pPr>
             <a:r>
               <a:rPr lang="en-US" sz="2100" b="1" dirty="0">
                 <a:solidFill>
@@ -5227,9 +5176,6 @@
               </a:rPr>
               <a:t>Arzt</a:t>
             </a:r>
-            <a:pPr indent="0" marL="0">
-              <a:buNone/>
-            </a:pPr>
             <a:r>
               <a:rPr lang="en-US" sz="2100" dirty="0">
                 <a:solidFill>
@@ -5238,9 +5184,6 @@
               </a:rPr>
               <a:t> möchte ich Diagnose, Rezept und Folgetermin digital dokumentieren und versenden, </a:t>
             </a:r>
-            <a:pPr indent="0" marL="0">
-              <a:buNone/>
-            </a:pPr>
             <a:r>
               <a:rPr lang="en-US" sz="2100" dirty="0">
                 <a:solidFill>
@@ -5279,6 +5222,13 @@
             <a:prstDash val="solid"/>
           </a:ln>
         </p:spPr>
+        <p:txBody>
+          <a:bodyPr/>
+          <a:lstStyle/>
+          <a:p>
+            <a:endParaRPr lang="de-DE"/>
+          </a:p>
+        </p:txBody>
       </p:sp>
       <p:sp>
         <p:nvSpPr>
@@ -5304,6 +5254,13 @@
             <a:prstDash val="solid"/>
           </a:ln>
         </p:spPr>
+        <p:txBody>
+          <a:bodyPr/>
+          <a:lstStyle/>
+          <a:p>
+            <a:endParaRPr lang="de-DE"/>
+          </a:p>
+        </p:txBody>
       </p:sp>
       <p:sp>
         <p:nvSpPr>
@@ -5326,7 +5283,7 @@
           <a:bodyPr wrap="square" lIns="0" tIns="0" rIns="0" bIns="0" rtlCol="0" anchor="ctr"/>
           <a:lstStyle/>
           <a:p>
-            <a:pPr algn="ctr" indent="0" marL="0">
+            <a:pPr marL="0" indent="0" algn="ctr">
               <a:buNone/>
             </a:pPr>
             <a:r>
@@ -5362,7 +5319,7 @@
           <a:bodyPr wrap="square" lIns="0" tIns="0" rIns="0" bIns="0" rtlCol="0" anchor="t"/>
           <a:lstStyle/>
           <a:p>
-            <a:pPr algn="ctr" indent="0" marL="0">
+            <a:pPr marL="0" indent="0" algn="ctr">
               <a:buNone/>
             </a:pPr>
             <a:r>
@@ -5379,14 +5336,14 @@
       </p:sp>
       <p:pic>
         <p:nvPicPr>
-          <p:cNvPr id="12" name="Image 1" descr="preencoded.png">    </p:cNvPr>
+          <p:cNvPr id="12" name="Image 1" descr="preencoded.png"/>
           <p:cNvPicPr>
             <a:picLocks noChangeAspect="1"/>
           </p:cNvPicPr>
           <p:nvPr/>
         </p:nvPicPr>
         <p:blipFill>
-          <a:blip r:embed="rId2"/>
+          <a:blip r:embed="rId4"/>
           <a:stretch>
             <a:fillRect/>
           </a:stretch>
@@ -5427,6 +5384,13 @@
             <a:prstDash val="solid"/>
           </a:ln>
         </p:spPr>
+        <p:txBody>
+          <a:bodyPr/>
+          <a:lstStyle/>
+          <a:p>
+            <a:endParaRPr lang="de-DE"/>
+          </a:p>
+        </p:txBody>
       </p:sp>
       <p:sp>
         <p:nvSpPr>
@@ -5452,6 +5416,13 @@
             <a:prstDash val="solid"/>
           </a:ln>
         </p:spPr>
+        <p:txBody>
+          <a:bodyPr/>
+          <a:lstStyle/>
+          <a:p>
+            <a:endParaRPr lang="de-DE"/>
+          </a:p>
+        </p:txBody>
       </p:sp>
       <p:sp>
         <p:nvSpPr>
@@ -5474,7 +5445,7 @@
           <a:bodyPr wrap="square" lIns="0" tIns="0" rIns="0" bIns="0" rtlCol="0" anchor="ctr"/>
           <a:lstStyle/>
           <a:p>
-            <a:pPr algn="ctr" indent="0" marL="0">
+            <a:pPr marL="0" indent="0" algn="ctr">
               <a:buNone/>
             </a:pPr>
             <a:r>
@@ -5510,7 +5481,7 @@
           <a:bodyPr wrap="square" lIns="0" tIns="0" rIns="0" bIns="0" rtlCol="0" anchor="t"/>
           <a:lstStyle/>
           <a:p>
-            <a:pPr algn="ctr" indent="0" marL="0">
+            <a:pPr marL="0" indent="0" algn="ctr">
               <a:buNone/>
             </a:pPr>
             <a:r>
@@ -5527,14 +5498,14 @@
       </p:sp>
       <p:pic>
         <p:nvPicPr>
-          <p:cNvPr id="17" name="Image 2" descr="preencoded.png">    </p:cNvPr>
+          <p:cNvPr id="17" name="Image 2" descr="preencoded.png"/>
           <p:cNvPicPr>
             <a:picLocks noChangeAspect="1"/>
           </p:cNvPicPr>
           <p:nvPr/>
         </p:nvPicPr>
         <p:blipFill>
-          <a:blip r:embed="rId3"/>
+          <a:blip r:embed="rId4"/>
           <a:stretch>
             <a:fillRect/>
           </a:stretch>
@@ -5575,6 +5546,13 @@
             <a:prstDash val="solid"/>
           </a:ln>
         </p:spPr>
+        <p:txBody>
+          <a:bodyPr/>
+          <a:lstStyle/>
+          <a:p>
+            <a:endParaRPr lang="de-DE"/>
+          </a:p>
+        </p:txBody>
       </p:sp>
       <p:sp>
         <p:nvSpPr>
@@ -5600,6 +5578,13 @@
             <a:prstDash val="solid"/>
           </a:ln>
         </p:spPr>
+        <p:txBody>
+          <a:bodyPr/>
+          <a:lstStyle/>
+          <a:p>
+            <a:endParaRPr lang="de-DE"/>
+          </a:p>
+        </p:txBody>
       </p:sp>
       <p:sp>
         <p:nvSpPr>
@@ -5622,7 +5607,7 @@
           <a:bodyPr wrap="square" lIns="0" tIns="0" rIns="0" bIns="0" rtlCol="0" anchor="ctr"/>
           <a:lstStyle/>
           <a:p>
-            <a:pPr algn="ctr" indent="0" marL="0">
+            <a:pPr marL="0" indent="0" algn="ctr">
               <a:buNone/>
             </a:pPr>
             <a:r>
@@ -5658,7 +5643,7 @@
           <a:bodyPr wrap="square" lIns="0" tIns="0" rIns="0" bIns="0" rtlCol="0" anchor="t"/>
           <a:lstStyle/>
           <a:p>
-            <a:pPr algn="ctr" indent="0" marL="0">
+            <a:pPr marL="0" indent="0" algn="ctr">
               <a:buNone/>
             </a:pPr>
             <a:r>
@@ -5675,7 +5660,7 @@
       </p:sp>
       <p:pic>
         <p:nvPicPr>
-          <p:cNvPr id="22" name="Image 3" descr="preencoded.png">    </p:cNvPr>
+          <p:cNvPr id="22" name="Image 3" descr="preencoded.png"/>
           <p:cNvPicPr>
             <a:picLocks noChangeAspect="1"/>
           </p:cNvPicPr>
@@ -5723,6 +5708,13 @@
             <a:prstDash val="solid"/>
           </a:ln>
         </p:spPr>
+        <p:txBody>
+          <a:bodyPr/>
+          <a:lstStyle/>
+          <a:p>
+            <a:endParaRPr lang="de-DE"/>
+          </a:p>
+        </p:txBody>
       </p:sp>
       <p:sp>
         <p:nvSpPr>
@@ -5748,6 +5740,13 @@
             <a:prstDash val="solid"/>
           </a:ln>
         </p:spPr>
+        <p:txBody>
+          <a:bodyPr/>
+          <a:lstStyle/>
+          <a:p>
+            <a:endParaRPr lang="de-DE"/>
+          </a:p>
+        </p:txBody>
       </p:sp>
       <p:sp>
         <p:nvSpPr>
@@ -5770,7 +5769,7 @@
           <a:bodyPr wrap="square" lIns="0" tIns="0" rIns="0" bIns="0" rtlCol="0" anchor="ctr"/>
           <a:lstStyle/>
           <a:p>
-            <a:pPr algn="ctr" indent="0" marL="0">
+            <a:pPr marL="0" indent="0" algn="ctr">
               <a:buNone/>
             </a:pPr>
             <a:r>
@@ -5806,7 +5805,7 @@
           <a:bodyPr wrap="square" lIns="0" tIns="0" rIns="0" bIns="0" rtlCol="0" anchor="t"/>
           <a:lstStyle/>
           <a:p>
-            <a:pPr algn="ctr" indent="0" marL="0">
+            <a:pPr marL="0" indent="0" algn="ctr">
               <a:buNone/>
             </a:pPr>
             <a:r>
@@ -5823,14 +5822,14 @@
       </p:sp>
       <p:pic>
         <p:nvPicPr>
-          <p:cNvPr id="27" name="Image 4" descr="preencoded.png">    </p:cNvPr>
+          <p:cNvPr id="27" name="Image 4" descr="preencoded.png"/>
           <p:cNvPicPr>
             <a:picLocks noChangeAspect="1"/>
           </p:cNvPicPr>
           <p:nvPr/>
         </p:nvPicPr>
         <p:blipFill>
-          <a:blip r:embed="rId5"/>
+          <a:blip r:embed="rId4"/>
           <a:stretch>
             <a:fillRect/>
           </a:stretch>
@@ -5871,6 +5870,13 @@
             <a:prstDash val="solid"/>
           </a:ln>
         </p:spPr>
+        <p:txBody>
+          <a:bodyPr/>
+          <a:lstStyle/>
+          <a:p>
+            <a:endParaRPr lang="de-DE"/>
+          </a:p>
+        </p:txBody>
       </p:sp>
       <p:sp>
         <p:nvSpPr>
@@ -5896,6 +5902,13 @@
             <a:prstDash val="solid"/>
           </a:ln>
         </p:spPr>
+        <p:txBody>
+          <a:bodyPr/>
+          <a:lstStyle/>
+          <a:p>
+            <a:endParaRPr lang="de-DE"/>
+          </a:p>
+        </p:txBody>
       </p:sp>
       <p:sp>
         <p:nvSpPr>
@@ -5918,7 +5931,7 @@
           <a:bodyPr wrap="square" lIns="0" tIns="0" rIns="0" bIns="0" rtlCol="0" anchor="ctr"/>
           <a:lstStyle/>
           <a:p>
-            <a:pPr algn="ctr" indent="0" marL="0">
+            <a:pPr marL="0" indent="0" algn="ctr">
               <a:buNone/>
             </a:pPr>
             <a:r>
@@ -5954,7 +5967,7 @@
           <a:bodyPr wrap="square" lIns="0" tIns="0" rIns="0" bIns="0" rtlCol="0" anchor="t"/>
           <a:lstStyle/>
           <a:p>
-            <a:pPr algn="ctr" indent="0" marL="0">
+            <a:pPr marL="0" indent="0" algn="ctr">
               <a:buNone/>
             </a:pPr>
             <a:r>
@@ -5971,7 +5984,7 @@
       </p:sp>
       <p:sp>
         <p:nvSpPr>
-          <p:cNvPr id="25" name="Slide Number Placeholder 0"/>
+          <p:cNvPr id="32" name="Slide Number Placeholder 0"/>
           <p:cNvSpPr>
             <a:spLocks noGrp="1"/>
           </p:cNvSpPr>
@@ -5989,7 +6002,7 @@
           </a:prstGeom>
           <a:extLst>
             <a:ext uri="{C572A759-6A51-4108-AA02-DFA0A04FC94B}">
-              <ma14:wrappingTextBoxFlag xmlns:ma14="http://schemas.microsoft.com/office/mac/drawingml/2011/main" val="0"/>
+              <ma14:wrappingTextBoxFlag xmlns:ma14="http://schemas.microsoft.com/office/mac/drawingml/2011/main" xmlns="" val="0"/>
             </a:ext>
           </a:extLst>
         </p:spPr>
@@ -6007,7 +6020,7 @@
           <a:p>
             <a:pPr algn="r"/>
             <a:fld id="{F7021451-1387-4CA6-816F-3879F97B5CBC}" type="slidenum">
-              <a:rPr b="0" lang="en-US"/>
+              <a:rPr lang="en-US" b="0"/>
               <a:t>12</a:t>
             </a:fld>
             <a:endParaRPr lang="en-US"/>
@@ -6042,9 +6055,11 @@
       <p:sp>
         <p:nvSpPr>
           <p:cNvPr id="2" name="Text 0"/>
-          <p:cNvSpPr/>
+          <p:cNvSpPr>
+            <a:spLocks noGrp="1"/>
+          </p:cNvSpPr>
           <p:nvPr>
-            <p:ph idx="101" type="body" hasCustomPrompt="1"/>
+            <p:ph type="body" idx="101" hasCustomPrompt="1"/>
           </p:nvPr>
         </p:nvSpPr>
         <p:spPr>
@@ -6062,7 +6077,7 @@
           <a:bodyPr wrap="square" lIns="0" tIns="0" rIns="0" bIns="0" rtlCol="0" anchor="ctr"/>
           <a:lstStyle/>
           <a:p>
-            <a:pPr indent="0" marL="0">
+            <a:pPr marL="0" indent="0">
               <a:buNone/>
             </a:pPr>
             <a:r>
@@ -6080,9 +6095,11 @@
       <p:sp>
         <p:nvSpPr>
           <p:cNvPr id="3" name="Text 0"/>
-          <p:cNvSpPr/>
+          <p:cNvSpPr>
+            <a:spLocks noGrp="1"/>
+          </p:cNvSpPr>
           <p:nvPr>
-            <p:ph idx="102" type="title" hasCustomPrompt="1"/>
+            <p:ph type="title" idx="102" hasCustomPrompt="1"/>
           </p:nvPr>
         </p:nvSpPr>
         <p:spPr>
@@ -6100,7 +6117,7 @@
           <a:bodyPr wrap="square" lIns="0" tIns="0" rIns="0" bIns="0" rtlCol="0" anchor="ctr"/>
           <a:lstStyle/>
           <a:p>
-            <a:pPr algn="l" indent="0" marL="0">
+            <a:pPr marL="0" indent="0" algn="l">
               <a:buNone/>
             </a:pPr>
             <a:r>
@@ -6141,6 +6158,13 @@
             <a:prstDash val="solid"/>
           </a:ln>
         </p:spPr>
+        <p:txBody>
+          <a:bodyPr/>
+          <a:lstStyle/>
+          <a:p>
+            <a:endParaRPr lang="de-DE"/>
+          </a:p>
+        </p:txBody>
       </p:sp>
       <p:sp>
         <p:nvSpPr>
@@ -6166,17 +6190,24 @@
             <a:prstDash val="solid"/>
           </a:ln>
         </p:spPr>
+        <p:txBody>
+          <a:bodyPr/>
+          <a:lstStyle/>
+          <a:p>
+            <a:endParaRPr lang="de-DE"/>
+          </a:p>
+        </p:txBody>
       </p:sp>
       <p:pic>
         <p:nvPicPr>
-          <p:cNvPr id="6" name="Image 0" descr="preencoded.png">    </p:cNvPr>
+          <p:cNvPr id="6" name="Image 0" descr="preencoded.png"/>
           <p:cNvPicPr>
             <a:picLocks noChangeAspect="1"/>
           </p:cNvPicPr>
           <p:nvPr/>
         </p:nvPicPr>
         <p:blipFill>
-          <a:blip r:embed="rId1"/>
+          <a:blip r:embed="rId3"/>
           <a:stretch>
             <a:fillRect/>
           </a:stretch>
@@ -6212,7 +6243,7 @@
           <a:bodyPr wrap="square" lIns="0" tIns="0" rIns="0" bIns="0" rtlCol="0" anchor="ctr"/>
           <a:lstStyle/>
           <a:p>
-            <a:pPr indent="0" marL="0">
+            <a:pPr marL="0" indent="0">
               <a:buNone/>
             </a:pPr>
             <a:r>
@@ -6223,9 +6254,6 @@
               </a:rPr>
               <a:t>Als </a:t>
             </a:r>
-            <a:pPr indent="0" marL="0">
-              <a:buNone/>
-            </a:pPr>
             <a:r>
               <a:rPr lang="en-US" sz="2100" b="1" dirty="0">
                 <a:solidFill>
@@ -6234,9 +6262,6 @@
               </a:rPr>
               <a:t>Patient</a:t>
             </a:r>
-            <a:pPr indent="0" marL="0">
-              <a:buNone/>
-            </a:pPr>
             <a:r>
               <a:rPr lang="en-US" sz="2100" dirty="0">
                 <a:solidFill>
@@ -6245,9 +6270,6 @@
               </a:rPr>
               <a:t> möchte ich eine Apotheke in der Nähe finden, die mein Medikament vorrätig hat, und es reservieren, </a:t>
             </a:r>
-            <a:pPr indent="0" marL="0">
-              <a:buNone/>
-            </a:pPr>
             <a:r>
               <a:rPr lang="en-US" sz="2100" dirty="0">
                 <a:solidFill>
@@ -6286,6 +6308,13 @@
             <a:prstDash val="solid"/>
           </a:ln>
         </p:spPr>
+        <p:txBody>
+          <a:bodyPr/>
+          <a:lstStyle/>
+          <a:p>
+            <a:endParaRPr lang="de-DE"/>
+          </a:p>
+        </p:txBody>
       </p:sp>
       <p:sp>
         <p:nvSpPr>
@@ -6311,6 +6340,13 @@
             <a:prstDash val="solid"/>
           </a:ln>
         </p:spPr>
+        <p:txBody>
+          <a:bodyPr/>
+          <a:lstStyle/>
+          <a:p>
+            <a:endParaRPr lang="de-DE"/>
+          </a:p>
+        </p:txBody>
       </p:sp>
       <p:sp>
         <p:nvSpPr>
@@ -6333,7 +6369,7 @@
           <a:bodyPr wrap="square" lIns="0" tIns="0" rIns="0" bIns="0" rtlCol="0" anchor="ctr"/>
           <a:lstStyle/>
           <a:p>
-            <a:pPr algn="ctr" indent="0" marL="0">
+            <a:pPr marL="0" indent="0" algn="ctr">
               <a:buNone/>
             </a:pPr>
             <a:r>
@@ -6369,7 +6405,7 @@
           <a:bodyPr wrap="square" lIns="0" tIns="0" rIns="0" bIns="0" rtlCol="0" anchor="t"/>
           <a:lstStyle/>
           <a:p>
-            <a:pPr algn="ctr" indent="0" marL="0">
+            <a:pPr marL="0" indent="0" algn="ctr">
               <a:buNone/>
             </a:pPr>
             <a:r>
@@ -6386,14 +6422,14 @@
       </p:sp>
       <p:pic>
         <p:nvPicPr>
-          <p:cNvPr id="12" name="Image 1" descr="preencoded.png">    </p:cNvPr>
+          <p:cNvPr id="12" name="Image 1" descr="preencoded.png"/>
           <p:cNvPicPr>
             <a:picLocks noChangeAspect="1"/>
           </p:cNvPicPr>
           <p:nvPr/>
         </p:nvPicPr>
         <p:blipFill>
-          <a:blip r:embed="rId2"/>
+          <a:blip r:embed="rId4"/>
           <a:stretch>
             <a:fillRect/>
           </a:stretch>
@@ -6434,6 +6470,13 @@
             <a:prstDash val="solid"/>
           </a:ln>
         </p:spPr>
+        <p:txBody>
+          <a:bodyPr/>
+          <a:lstStyle/>
+          <a:p>
+            <a:endParaRPr lang="de-DE"/>
+          </a:p>
+        </p:txBody>
       </p:sp>
       <p:sp>
         <p:nvSpPr>
@@ -6459,6 +6502,13 @@
             <a:prstDash val="solid"/>
           </a:ln>
         </p:spPr>
+        <p:txBody>
+          <a:bodyPr/>
+          <a:lstStyle/>
+          <a:p>
+            <a:endParaRPr lang="de-DE"/>
+          </a:p>
+        </p:txBody>
       </p:sp>
       <p:sp>
         <p:nvSpPr>
@@ -6481,7 +6531,7 @@
           <a:bodyPr wrap="square" lIns="0" tIns="0" rIns="0" bIns="0" rtlCol="0" anchor="ctr"/>
           <a:lstStyle/>
           <a:p>
-            <a:pPr algn="ctr" indent="0" marL="0">
+            <a:pPr marL="0" indent="0" algn="ctr">
               <a:buNone/>
             </a:pPr>
             <a:r>
@@ -6517,7 +6567,7 @@
           <a:bodyPr wrap="square" lIns="0" tIns="0" rIns="0" bIns="0" rtlCol="0" anchor="t"/>
           <a:lstStyle/>
           <a:p>
-            <a:pPr algn="ctr" indent="0" marL="0">
+            <a:pPr marL="0" indent="0" algn="ctr">
               <a:buNone/>
             </a:pPr>
             <a:r>
@@ -6534,14 +6584,14 @@
       </p:sp>
       <p:pic>
         <p:nvPicPr>
-          <p:cNvPr id="17" name="Image 2" descr="preencoded.png">    </p:cNvPr>
+          <p:cNvPr id="17" name="Image 2" descr="preencoded.png"/>
           <p:cNvPicPr>
             <a:picLocks noChangeAspect="1"/>
           </p:cNvPicPr>
           <p:nvPr/>
         </p:nvPicPr>
         <p:blipFill>
-          <a:blip r:embed="rId3"/>
+          <a:blip r:embed="rId4"/>
           <a:stretch>
             <a:fillRect/>
           </a:stretch>
@@ -6582,6 +6632,13 @@
             <a:prstDash val="solid"/>
           </a:ln>
         </p:spPr>
+        <p:txBody>
+          <a:bodyPr/>
+          <a:lstStyle/>
+          <a:p>
+            <a:endParaRPr lang="de-DE"/>
+          </a:p>
+        </p:txBody>
       </p:sp>
       <p:sp>
         <p:nvSpPr>
@@ -6607,6 +6664,13 @@
             <a:prstDash val="solid"/>
           </a:ln>
         </p:spPr>
+        <p:txBody>
+          <a:bodyPr/>
+          <a:lstStyle/>
+          <a:p>
+            <a:endParaRPr lang="de-DE"/>
+          </a:p>
+        </p:txBody>
       </p:sp>
       <p:sp>
         <p:nvSpPr>
@@ -6629,7 +6693,7 @@
           <a:bodyPr wrap="square" lIns="0" tIns="0" rIns="0" bIns="0" rtlCol="0" anchor="ctr"/>
           <a:lstStyle/>
           <a:p>
-            <a:pPr algn="ctr" indent="0" marL="0">
+            <a:pPr marL="0" indent="0" algn="ctr">
               <a:buNone/>
             </a:pPr>
             <a:r>
@@ -6665,7 +6729,7 @@
           <a:bodyPr wrap="square" lIns="0" tIns="0" rIns="0" bIns="0" rtlCol="0" anchor="t"/>
           <a:lstStyle/>
           <a:p>
-            <a:pPr algn="ctr" indent="0" marL="0">
+            <a:pPr marL="0" indent="0" algn="ctr">
               <a:buNone/>
             </a:pPr>
             <a:r>
@@ -6682,7 +6746,7 @@
       </p:sp>
       <p:pic>
         <p:nvPicPr>
-          <p:cNvPr id="22" name="Image 3" descr="preencoded.png">    </p:cNvPr>
+          <p:cNvPr id="22" name="Image 3" descr="preencoded.png"/>
           <p:cNvPicPr>
             <a:picLocks noChangeAspect="1"/>
           </p:cNvPicPr>
@@ -6730,6 +6794,13 @@
             <a:prstDash val="solid"/>
           </a:ln>
         </p:spPr>
+        <p:txBody>
+          <a:bodyPr/>
+          <a:lstStyle/>
+          <a:p>
+            <a:endParaRPr lang="de-DE"/>
+          </a:p>
+        </p:txBody>
       </p:sp>
       <p:sp>
         <p:nvSpPr>
@@ -6755,6 +6826,13 @@
             <a:prstDash val="solid"/>
           </a:ln>
         </p:spPr>
+        <p:txBody>
+          <a:bodyPr/>
+          <a:lstStyle/>
+          <a:p>
+            <a:endParaRPr lang="de-DE"/>
+          </a:p>
+        </p:txBody>
       </p:sp>
       <p:sp>
         <p:nvSpPr>
@@ -6777,7 +6855,7 @@
           <a:bodyPr wrap="square" lIns="0" tIns="0" rIns="0" bIns="0" rtlCol="0" anchor="ctr"/>
           <a:lstStyle/>
           <a:p>
-            <a:pPr algn="ctr" indent="0" marL="0">
+            <a:pPr marL="0" indent="0" algn="ctr">
               <a:buNone/>
             </a:pPr>
             <a:r>
@@ -6813,7 +6891,7 @@
           <a:bodyPr wrap="square" lIns="0" tIns="0" rIns="0" bIns="0" rtlCol="0" anchor="t"/>
           <a:lstStyle/>
           <a:p>
-            <a:pPr algn="ctr" indent="0" marL="0">
+            <a:pPr marL="0" indent="0" algn="ctr">
               <a:buNone/>
             </a:pPr>
             <a:r>
@@ -6830,14 +6908,14 @@
       </p:sp>
       <p:pic>
         <p:nvPicPr>
-          <p:cNvPr id="27" name="Image 4" descr="preencoded.png">    </p:cNvPr>
+          <p:cNvPr id="27" name="Image 4" descr="preencoded.png"/>
           <p:cNvPicPr>
             <a:picLocks noChangeAspect="1"/>
           </p:cNvPicPr>
           <p:nvPr/>
         </p:nvPicPr>
         <p:blipFill>
-          <a:blip r:embed="rId5"/>
+          <a:blip r:embed="rId4"/>
           <a:stretch>
             <a:fillRect/>
           </a:stretch>
@@ -6878,6 +6956,13 @@
             <a:prstDash val="solid"/>
           </a:ln>
         </p:spPr>
+        <p:txBody>
+          <a:bodyPr/>
+          <a:lstStyle/>
+          <a:p>
+            <a:endParaRPr lang="de-DE"/>
+          </a:p>
+        </p:txBody>
       </p:sp>
       <p:sp>
         <p:nvSpPr>
@@ -6903,6 +6988,13 @@
             <a:prstDash val="solid"/>
           </a:ln>
         </p:spPr>
+        <p:txBody>
+          <a:bodyPr/>
+          <a:lstStyle/>
+          <a:p>
+            <a:endParaRPr lang="de-DE"/>
+          </a:p>
+        </p:txBody>
       </p:sp>
       <p:sp>
         <p:nvSpPr>
@@ -6925,7 +7017,7 @@
           <a:bodyPr wrap="square" lIns="0" tIns="0" rIns="0" bIns="0" rtlCol="0" anchor="ctr"/>
           <a:lstStyle/>
           <a:p>
-            <a:pPr algn="ctr" indent="0" marL="0">
+            <a:pPr marL="0" indent="0" algn="ctr">
               <a:buNone/>
             </a:pPr>
             <a:r>
@@ -6961,7 +7053,7 @@
           <a:bodyPr wrap="square" lIns="0" tIns="0" rIns="0" bIns="0" rtlCol="0" anchor="t"/>
           <a:lstStyle/>
           <a:p>
-            <a:pPr algn="ctr" indent="0" marL="0">
+            <a:pPr marL="0" indent="0" algn="ctr">
               <a:buNone/>
             </a:pPr>
             <a:r>
@@ -6997,7 +7089,7 @@
           <a:bodyPr wrap="square" lIns="0" tIns="0" rIns="0" bIns="0" rtlCol="0" anchor="ctr"/>
           <a:lstStyle/>
           <a:p>
-            <a:pPr indent="0" marL="0">
+            <a:pPr marL="0" indent="0">
               <a:buNone/>
             </a:pPr>
             <a:r>
@@ -7008,9 +7100,6 @@
               </a:rPr>
               <a:t>Alternativer Ablauf:  </a:t>
             </a:r>
-            <a:pPr indent="0" marL="0">
-              <a:buNone/>
-            </a:pPr>
             <a:r>
               <a:rPr lang="en-US" sz="1500" dirty="0">
                 <a:solidFill>
@@ -7025,7 +7114,7 @@
       </p:sp>
       <p:sp>
         <p:nvSpPr>
-          <p:cNvPr id="25" name="Slide Number Placeholder 0"/>
+          <p:cNvPr id="33" name="Slide Number Placeholder 0"/>
           <p:cNvSpPr>
             <a:spLocks noGrp="1"/>
           </p:cNvSpPr>
@@ -7043,7 +7132,7 @@
           </a:prstGeom>
           <a:extLst>
             <a:ext uri="{C572A759-6A51-4108-AA02-DFA0A04FC94B}">
-              <ma14:wrappingTextBoxFlag xmlns:ma14="http://schemas.microsoft.com/office/mac/drawingml/2011/main" val="0"/>
+              <ma14:wrappingTextBoxFlag xmlns:ma14="http://schemas.microsoft.com/office/mac/drawingml/2011/main" xmlns="" val="0"/>
             </a:ext>
           </a:extLst>
         </p:spPr>
@@ -7061,7 +7150,7 @@
           <a:p>
             <a:pPr algn="r"/>
             <a:fld id="{F7021451-1387-4CA6-816F-3879F97B5CBC}" type="slidenum">
-              <a:rPr b="0" lang="en-US"/>
+              <a:rPr lang="en-US" b="0"/>
               <a:t>13</a:t>
             </a:fld>
             <a:endParaRPr lang="en-US"/>
@@ -7096,9 +7185,11 @@
       <p:sp>
         <p:nvSpPr>
           <p:cNvPr id="2" name="Text 0"/>
-          <p:cNvSpPr/>
+          <p:cNvSpPr>
+            <a:spLocks noGrp="1"/>
+          </p:cNvSpPr>
           <p:nvPr>
-            <p:ph idx="101" type="body" hasCustomPrompt="1"/>
+            <p:ph type="body" idx="101" hasCustomPrompt="1"/>
           </p:nvPr>
         </p:nvSpPr>
         <p:spPr>
@@ -7116,7 +7207,7 @@
           <a:bodyPr wrap="square" lIns="0" tIns="0" rIns="0" bIns="0" rtlCol="0" anchor="ctr"/>
           <a:lstStyle/>
           <a:p>
-            <a:pPr indent="0" marL="0">
+            <a:pPr marL="0" indent="0">
               <a:buNone/>
             </a:pPr>
             <a:r>
@@ -7134,9 +7225,11 @@
       <p:sp>
         <p:nvSpPr>
           <p:cNvPr id="3" name="Text 0"/>
-          <p:cNvSpPr/>
+          <p:cNvSpPr>
+            <a:spLocks noGrp="1"/>
+          </p:cNvSpPr>
           <p:nvPr>
-            <p:ph idx="102" type="title" hasCustomPrompt="1"/>
+            <p:ph type="title" idx="102" hasCustomPrompt="1"/>
           </p:nvPr>
         </p:nvSpPr>
         <p:spPr>
@@ -7154,7 +7247,7 @@
           <a:bodyPr wrap="square" lIns="0" tIns="0" rIns="0" bIns="0" rtlCol="0" anchor="ctr"/>
           <a:lstStyle/>
           <a:p>
-            <a:pPr algn="l" indent="0" marL="0">
+            <a:pPr marL="0" indent="0" algn="l">
               <a:buNone/>
             </a:pPr>
             <a:r>
@@ -7195,6 +7288,13 @@
             <a:prstDash val="solid"/>
           </a:ln>
         </p:spPr>
+        <p:txBody>
+          <a:bodyPr/>
+          <a:lstStyle/>
+          <a:p>
+            <a:endParaRPr lang="de-DE"/>
+          </a:p>
+        </p:txBody>
       </p:sp>
       <p:sp>
         <p:nvSpPr>
@@ -7220,17 +7320,24 @@
             <a:prstDash val="solid"/>
           </a:ln>
         </p:spPr>
+        <p:txBody>
+          <a:bodyPr/>
+          <a:lstStyle/>
+          <a:p>
+            <a:endParaRPr lang="de-DE"/>
+          </a:p>
+        </p:txBody>
       </p:sp>
       <p:pic>
         <p:nvPicPr>
-          <p:cNvPr id="6" name="Image 0" descr="preencoded.png">    </p:cNvPr>
+          <p:cNvPr id="6" name="Image 0" descr="preencoded.png"/>
           <p:cNvPicPr>
             <a:picLocks noChangeAspect="1"/>
           </p:cNvPicPr>
           <p:nvPr/>
         </p:nvPicPr>
         <p:blipFill>
-          <a:blip r:embed="rId1"/>
+          <a:blip r:embed="rId3"/>
           <a:stretch>
             <a:fillRect/>
           </a:stretch>
@@ -7266,7 +7373,7 @@
           <a:bodyPr wrap="square" lIns="0" tIns="0" rIns="0" bIns="0" rtlCol="0" anchor="ctr"/>
           <a:lstStyle/>
           <a:p>
-            <a:pPr indent="0" marL="0">
+            <a:pPr marL="0" indent="0">
               <a:buNone/>
             </a:pPr>
             <a:r>
@@ -7277,9 +7384,6 @@
               </a:rPr>
               <a:t>Als </a:t>
             </a:r>
-            <a:pPr indent="0" marL="0">
-              <a:buNone/>
-            </a:pPr>
             <a:r>
               <a:rPr lang="en-US" sz="2100" b="1" dirty="0">
                 <a:solidFill>
@@ -7288,9 +7392,6 @@
               </a:rPr>
               <a:t>Patient</a:t>
             </a:r>
-            <a:pPr indent="0" marL="0">
-              <a:buNone/>
-            </a:pPr>
             <a:r>
               <a:rPr lang="en-US" sz="2100" dirty="0">
                 <a:solidFill>
@@ -7299,9 +7400,6 @@
               </a:rPr>
               <a:t> möchte ich mich einmalig online registrieren und von der Praxis freischalten lassen, </a:t>
             </a:r>
-            <a:pPr indent="0" marL="0">
-              <a:buNone/>
-            </a:pPr>
             <a:r>
               <a:rPr lang="en-US" sz="2100" dirty="0">
                 <a:solidFill>
@@ -7340,6 +7438,13 @@
             <a:prstDash val="solid"/>
           </a:ln>
         </p:spPr>
+        <p:txBody>
+          <a:bodyPr/>
+          <a:lstStyle/>
+          <a:p>
+            <a:endParaRPr lang="de-DE"/>
+          </a:p>
+        </p:txBody>
       </p:sp>
       <p:sp>
         <p:nvSpPr>
@@ -7365,6 +7470,13 @@
             <a:prstDash val="solid"/>
           </a:ln>
         </p:spPr>
+        <p:txBody>
+          <a:bodyPr/>
+          <a:lstStyle/>
+          <a:p>
+            <a:endParaRPr lang="de-DE"/>
+          </a:p>
+        </p:txBody>
       </p:sp>
       <p:sp>
         <p:nvSpPr>
@@ -7387,7 +7499,7 @@
           <a:bodyPr wrap="square" lIns="0" tIns="0" rIns="0" bIns="0" rtlCol="0" anchor="ctr"/>
           <a:lstStyle/>
           <a:p>
-            <a:pPr algn="ctr" indent="0" marL="0">
+            <a:pPr marL="0" indent="0" algn="ctr">
               <a:buNone/>
             </a:pPr>
             <a:r>
@@ -7423,7 +7535,7 @@
           <a:bodyPr wrap="square" lIns="0" tIns="0" rIns="0" bIns="0" rtlCol="0" anchor="t"/>
           <a:lstStyle/>
           <a:p>
-            <a:pPr algn="ctr" indent="0" marL="0">
+            <a:pPr marL="0" indent="0" algn="ctr">
               <a:buNone/>
             </a:pPr>
             <a:r>
@@ -7440,14 +7552,14 @@
       </p:sp>
       <p:pic>
         <p:nvPicPr>
-          <p:cNvPr id="12" name="Image 1" descr="preencoded.png">    </p:cNvPr>
+          <p:cNvPr id="12" name="Image 1" descr="preencoded.png"/>
           <p:cNvPicPr>
             <a:picLocks noChangeAspect="1"/>
           </p:cNvPicPr>
           <p:nvPr/>
         </p:nvPicPr>
         <p:blipFill>
-          <a:blip r:embed="rId2"/>
+          <a:blip r:embed="rId4"/>
           <a:stretch>
             <a:fillRect/>
           </a:stretch>
@@ -7488,6 +7600,13 @@
             <a:prstDash val="solid"/>
           </a:ln>
         </p:spPr>
+        <p:txBody>
+          <a:bodyPr/>
+          <a:lstStyle/>
+          <a:p>
+            <a:endParaRPr lang="de-DE"/>
+          </a:p>
+        </p:txBody>
       </p:sp>
       <p:sp>
         <p:nvSpPr>
@@ -7513,6 +7632,13 @@
             <a:prstDash val="solid"/>
           </a:ln>
         </p:spPr>
+        <p:txBody>
+          <a:bodyPr/>
+          <a:lstStyle/>
+          <a:p>
+            <a:endParaRPr lang="de-DE"/>
+          </a:p>
+        </p:txBody>
       </p:sp>
       <p:sp>
         <p:nvSpPr>
@@ -7535,7 +7661,7 @@
           <a:bodyPr wrap="square" lIns="0" tIns="0" rIns="0" bIns="0" rtlCol="0" anchor="ctr"/>
           <a:lstStyle/>
           <a:p>
-            <a:pPr algn="ctr" indent="0" marL="0">
+            <a:pPr marL="0" indent="0" algn="ctr">
               <a:buNone/>
             </a:pPr>
             <a:r>
@@ -7571,7 +7697,7 @@
           <a:bodyPr wrap="square" lIns="0" tIns="0" rIns="0" bIns="0" rtlCol="0" anchor="t"/>
           <a:lstStyle/>
           <a:p>
-            <a:pPr algn="ctr" indent="0" marL="0">
+            <a:pPr marL="0" indent="0" algn="ctr">
               <a:buNone/>
             </a:pPr>
             <a:r>
@@ -7588,14 +7714,14 @@
       </p:sp>
       <p:pic>
         <p:nvPicPr>
-          <p:cNvPr id="17" name="Image 2" descr="preencoded.png">    </p:cNvPr>
+          <p:cNvPr id="17" name="Image 2" descr="preencoded.png"/>
           <p:cNvPicPr>
             <a:picLocks noChangeAspect="1"/>
           </p:cNvPicPr>
           <p:nvPr/>
         </p:nvPicPr>
         <p:blipFill>
-          <a:blip r:embed="rId3"/>
+          <a:blip r:embed="rId4"/>
           <a:stretch>
             <a:fillRect/>
           </a:stretch>
@@ -7636,6 +7762,13 @@
             <a:prstDash val="solid"/>
           </a:ln>
         </p:spPr>
+        <p:txBody>
+          <a:bodyPr/>
+          <a:lstStyle/>
+          <a:p>
+            <a:endParaRPr lang="de-DE"/>
+          </a:p>
+        </p:txBody>
       </p:sp>
       <p:sp>
         <p:nvSpPr>
@@ -7661,6 +7794,13 @@
             <a:prstDash val="solid"/>
           </a:ln>
         </p:spPr>
+        <p:txBody>
+          <a:bodyPr/>
+          <a:lstStyle/>
+          <a:p>
+            <a:endParaRPr lang="de-DE"/>
+          </a:p>
+        </p:txBody>
       </p:sp>
       <p:sp>
         <p:nvSpPr>
@@ -7683,7 +7823,7 @@
           <a:bodyPr wrap="square" lIns="0" tIns="0" rIns="0" bIns="0" rtlCol="0" anchor="ctr"/>
           <a:lstStyle/>
           <a:p>
-            <a:pPr algn="ctr" indent="0" marL="0">
+            <a:pPr marL="0" indent="0" algn="ctr">
               <a:buNone/>
             </a:pPr>
             <a:r>
@@ -7719,7 +7859,7 @@
           <a:bodyPr wrap="square" lIns="0" tIns="0" rIns="0" bIns="0" rtlCol="0" anchor="t"/>
           <a:lstStyle/>
           <a:p>
-            <a:pPr algn="ctr" indent="0" marL="0">
+            <a:pPr marL="0" indent="0" algn="ctr">
               <a:buNone/>
             </a:pPr>
             <a:r>
@@ -7736,7 +7876,7 @@
       </p:sp>
       <p:pic>
         <p:nvPicPr>
-          <p:cNvPr id="22" name="Image 3" descr="preencoded.png">    </p:cNvPr>
+          <p:cNvPr id="22" name="Image 3" descr="preencoded.png"/>
           <p:cNvPicPr>
             <a:picLocks noChangeAspect="1"/>
           </p:cNvPicPr>
@@ -7784,6 +7924,13 @@
             <a:prstDash val="solid"/>
           </a:ln>
         </p:spPr>
+        <p:txBody>
+          <a:bodyPr/>
+          <a:lstStyle/>
+          <a:p>
+            <a:endParaRPr lang="de-DE"/>
+          </a:p>
+        </p:txBody>
       </p:sp>
       <p:sp>
         <p:nvSpPr>
@@ -7809,6 +7956,13 @@
             <a:prstDash val="solid"/>
           </a:ln>
         </p:spPr>
+        <p:txBody>
+          <a:bodyPr/>
+          <a:lstStyle/>
+          <a:p>
+            <a:endParaRPr lang="de-DE"/>
+          </a:p>
+        </p:txBody>
       </p:sp>
       <p:sp>
         <p:nvSpPr>
@@ -7831,7 +7985,7 @@
           <a:bodyPr wrap="square" lIns="0" tIns="0" rIns="0" bIns="0" rtlCol="0" anchor="ctr"/>
           <a:lstStyle/>
           <a:p>
-            <a:pPr algn="ctr" indent="0" marL="0">
+            <a:pPr marL="0" indent="0" algn="ctr">
               <a:buNone/>
             </a:pPr>
             <a:r>
@@ -7867,7 +8021,7 @@
           <a:bodyPr wrap="square" lIns="0" tIns="0" rIns="0" bIns="0" rtlCol="0" anchor="t"/>
           <a:lstStyle/>
           <a:p>
-            <a:pPr algn="ctr" indent="0" marL="0">
+            <a:pPr marL="0" indent="0" algn="ctr">
               <a:buNone/>
             </a:pPr>
             <a:r>
@@ -7884,14 +8038,14 @@
       </p:sp>
       <p:pic>
         <p:nvPicPr>
-          <p:cNvPr id="27" name="Image 4" descr="preencoded.png">    </p:cNvPr>
+          <p:cNvPr id="27" name="Image 4" descr="preencoded.png"/>
           <p:cNvPicPr>
             <a:picLocks noChangeAspect="1"/>
           </p:cNvPicPr>
           <p:nvPr/>
         </p:nvPicPr>
         <p:blipFill>
-          <a:blip r:embed="rId5"/>
+          <a:blip r:embed="rId4"/>
           <a:stretch>
             <a:fillRect/>
           </a:stretch>
@@ -7932,6 +8086,13 @@
             <a:prstDash val="solid"/>
           </a:ln>
         </p:spPr>
+        <p:txBody>
+          <a:bodyPr/>
+          <a:lstStyle/>
+          <a:p>
+            <a:endParaRPr lang="de-DE"/>
+          </a:p>
+        </p:txBody>
       </p:sp>
       <p:sp>
         <p:nvSpPr>
@@ -7957,6 +8118,13 @@
             <a:prstDash val="solid"/>
           </a:ln>
         </p:spPr>
+        <p:txBody>
+          <a:bodyPr/>
+          <a:lstStyle/>
+          <a:p>
+            <a:endParaRPr lang="de-DE"/>
+          </a:p>
+        </p:txBody>
       </p:sp>
       <p:sp>
         <p:nvSpPr>
@@ -7979,7 +8147,7 @@
           <a:bodyPr wrap="square" lIns="0" tIns="0" rIns="0" bIns="0" rtlCol="0" anchor="ctr"/>
           <a:lstStyle/>
           <a:p>
-            <a:pPr algn="ctr" indent="0" marL="0">
+            <a:pPr marL="0" indent="0" algn="ctr">
               <a:buNone/>
             </a:pPr>
             <a:r>
@@ -8015,7 +8183,7 @@
           <a:bodyPr wrap="square" lIns="0" tIns="0" rIns="0" bIns="0" rtlCol="0" anchor="t"/>
           <a:lstStyle/>
           <a:p>
-            <a:pPr algn="ctr" indent="0" marL="0">
+            <a:pPr marL="0" indent="0" algn="ctr">
               <a:buNone/>
             </a:pPr>
             <a:r>
@@ -8051,7 +8219,7 @@
           <a:bodyPr wrap="square" lIns="0" tIns="0" rIns="0" bIns="0" rtlCol="0" anchor="ctr"/>
           <a:lstStyle/>
           <a:p>
-            <a:pPr indent="0" marL="0">
+            <a:pPr marL="0" indent="0">
               <a:buNone/>
             </a:pPr>
             <a:r>
@@ -8062,9 +8230,6 @@
               </a:rPr>
               <a:t>Alternativer Ablauf:  </a:t>
             </a:r>
-            <a:pPr indent="0" marL="0">
-              <a:buNone/>
-            </a:pPr>
             <a:r>
               <a:rPr lang="en-US" sz="1500" dirty="0">
                 <a:solidFill>
@@ -8079,7 +8244,7 @@
       </p:sp>
       <p:sp>
         <p:nvSpPr>
-          <p:cNvPr id="25" name="Slide Number Placeholder 0"/>
+          <p:cNvPr id="33" name="Slide Number Placeholder 0"/>
           <p:cNvSpPr>
             <a:spLocks noGrp="1"/>
           </p:cNvSpPr>
@@ -8097,7 +8262,7 @@
           </a:prstGeom>
           <a:extLst>
             <a:ext uri="{C572A759-6A51-4108-AA02-DFA0A04FC94B}">
-              <ma14:wrappingTextBoxFlag xmlns:ma14="http://schemas.microsoft.com/office/mac/drawingml/2011/main" val="0"/>
+              <ma14:wrappingTextBoxFlag xmlns:ma14="http://schemas.microsoft.com/office/mac/drawingml/2011/main" xmlns="" val="0"/>
             </a:ext>
           </a:extLst>
         </p:spPr>
@@ -8115,7 +8280,7 @@
           <a:p>
             <a:pPr algn="r"/>
             <a:fld id="{F7021451-1387-4CA6-816F-3879F97B5CBC}" type="slidenum">
-              <a:rPr b="0" lang="en-US"/>
+              <a:rPr lang="en-US" b="0"/>
               <a:t>14</a:t>
             </a:fld>
             <a:endParaRPr lang="en-US"/>
@@ -8150,9 +8315,11 @@
       <p:sp>
         <p:nvSpPr>
           <p:cNvPr id="2" name="Text 0"/>
-          <p:cNvSpPr/>
+          <p:cNvSpPr>
+            <a:spLocks noGrp="1"/>
+          </p:cNvSpPr>
           <p:nvPr>
-            <p:ph idx="101" type="body" hasCustomPrompt="1"/>
+            <p:ph type="body" idx="101" hasCustomPrompt="1"/>
           </p:nvPr>
         </p:nvSpPr>
         <p:spPr>
@@ -8170,7 +8337,7 @@
           <a:bodyPr wrap="square" lIns="0" tIns="0" rIns="0" bIns="0" rtlCol="0" anchor="ctr"/>
           <a:lstStyle/>
           <a:p>
-            <a:pPr indent="0" marL="0">
+            <a:pPr marL="0" indent="0">
               <a:buNone/>
             </a:pPr>
             <a:r>
@@ -8188,9 +8355,11 @@
       <p:sp>
         <p:nvSpPr>
           <p:cNvPr id="3" name="Text 0"/>
-          <p:cNvSpPr/>
+          <p:cNvSpPr>
+            <a:spLocks noGrp="1"/>
+          </p:cNvSpPr>
           <p:nvPr>
-            <p:ph idx="102" type="title" hasCustomPrompt="1"/>
+            <p:ph type="title" idx="102" hasCustomPrompt="1"/>
           </p:nvPr>
         </p:nvSpPr>
         <p:spPr>
@@ -8208,7 +8377,7 @@
           <a:bodyPr wrap="square" lIns="0" tIns="0" rIns="0" bIns="0" rtlCol="0" anchor="ctr"/>
           <a:lstStyle/>
           <a:p>
-            <a:pPr algn="l" indent="0" marL="0">
+            <a:pPr marL="0" indent="0" algn="l">
               <a:buNone/>
             </a:pPr>
             <a:r>
@@ -8249,6 +8418,13 @@
             <a:prstDash val="solid"/>
           </a:ln>
         </p:spPr>
+        <p:txBody>
+          <a:bodyPr/>
+          <a:lstStyle/>
+          <a:p>
+            <a:endParaRPr lang="de-DE"/>
+          </a:p>
+        </p:txBody>
       </p:sp>
       <p:sp>
         <p:nvSpPr>
@@ -8271,7 +8447,7 @@
           <a:bodyPr wrap="square" lIns="0" tIns="0" rIns="0" bIns="0" rtlCol="0" anchor="ctr"/>
           <a:lstStyle/>
           <a:p>
-            <a:pPr indent="0" marL="0">
+            <a:pPr marL="0" indent="0">
               <a:buNone/>
             </a:pPr>
             <a:r>
@@ -8307,7 +8483,7 @@
           <a:bodyPr wrap="square" lIns="0" tIns="0" rIns="0" bIns="0" rtlCol="0" anchor="t"/>
           <a:lstStyle/>
           <a:p>
-            <a:pPr indent="0" marL="0">
+            <a:pPr marL="0" indent="0">
               <a:buNone/>
             </a:pPr>
             <a:r>
@@ -8348,6 +8524,13 @@
             <a:prstDash val="solid"/>
           </a:ln>
         </p:spPr>
+        <p:txBody>
+          <a:bodyPr/>
+          <a:lstStyle/>
+          <a:p>
+            <a:endParaRPr lang="de-DE"/>
+          </a:p>
+        </p:txBody>
       </p:sp>
       <p:sp>
         <p:nvSpPr>
@@ -8370,7 +8553,7 @@
           <a:bodyPr wrap="square" lIns="0" tIns="0" rIns="0" bIns="0" rtlCol="0" anchor="ctr"/>
           <a:lstStyle/>
           <a:p>
-            <a:pPr indent="0" marL="0">
+            <a:pPr marL="0" indent="0">
               <a:buNone/>
             </a:pPr>
             <a:r>
@@ -8406,7 +8589,7 @@
           <a:bodyPr wrap="square" lIns="0" tIns="0" rIns="0" bIns="0" rtlCol="0" anchor="t"/>
           <a:lstStyle/>
           <a:p>
-            <a:pPr indent="0" marL="0">
+            <a:pPr marL="0" indent="0">
               <a:buNone/>
             </a:pPr>
             <a:r>
@@ -8447,6 +8630,13 @@
             <a:prstDash val="solid"/>
           </a:ln>
         </p:spPr>
+        <p:txBody>
+          <a:bodyPr/>
+          <a:lstStyle/>
+          <a:p>
+            <a:endParaRPr lang="de-DE"/>
+          </a:p>
+        </p:txBody>
       </p:sp>
       <p:sp>
         <p:nvSpPr>
@@ -8469,7 +8659,7 @@
           <a:bodyPr wrap="square" lIns="0" tIns="0" rIns="0" bIns="0" rtlCol="0" anchor="ctr"/>
           <a:lstStyle/>
           <a:p>
-            <a:pPr indent="0" marL="0">
+            <a:pPr marL="0" indent="0">
               <a:buNone/>
             </a:pPr>
             <a:r>
@@ -8505,7 +8695,7 @@
           <a:bodyPr wrap="square" lIns="0" tIns="0" rIns="0" bIns="0" rtlCol="0" anchor="t"/>
           <a:lstStyle/>
           <a:p>
-            <a:pPr indent="0" marL="0">
+            <a:pPr marL="0" indent="0">
               <a:buNone/>
             </a:pPr>
             <a:r>
@@ -8546,6 +8736,13 @@
             <a:prstDash val="solid"/>
           </a:ln>
         </p:spPr>
+        <p:txBody>
+          <a:bodyPr/>
+          <a:lstStyle/>
+          <a:p>
+            <a:endParaRPr lang="de-DE"/>
+          </a:p>
+        </p:txBody>
       </p:sp>
       <p:sp>
         <p:nvSpPr>
@@ -8568,7 +8765,7 @@
           <a:bodyPr wrap="square" lIns="0" tIns="0" rIns="0" bIns="0" rtlCol="0" anchor="ctr"/>
           <a:lstStyle/>
           <a:p>
-            <a:pPr indent="0" marL="0">
+            <a:pPr marL="0" indent="0">
               <a:buNone/>
             </a:pPr>
             <a:r>
@@ -8604,7 +8801,7 @@
           <a:bodyPr wrap="square" lIns="0" tIns="0" rIns="0" bIns="0" rtlCol="0" anchor="t"/>
           <a:lstStyle/>
           <a:p>
-            <a:pPr indent="0" marL="0">
+            <a:pPr marL="0" indent="0">
               <a:buNone/>
             </a:pPr>
             <a:r>
@@ -8645,6 +8842,13 @@
             <a:prstDash val="solid"/>
           </a:ln>
         </p:spPr>
+        <p:txBody>
+          <a:bodyPr/>
+          <a:lstStyle/>
+          <a:p>
+            <a:endParaRPr lang="de-DE"/>
+          </a:p>
+        </p:txBody>
       </p:sp>
       <p:sp>
         <p:nvSpPr>
@@ -8667,7 +8871,7 @@
           <a:bodyPr wrap="square" lIns="0" tIns="0" rIns="0" bIns="0" rtlCol="0" anchor="ctr"/>
           <a:lstStyle/>
           <a:p>
-            <a:pPr indent="0" marL="0">
+            <a:pPr marL="0" indent="0">
               <a:buNone/>
             </a:pPr>
             <a:r>
@@ -8703,7 +8907,7 @@
           <a:bodyPr wrap="square" lIns="0" tIns="0" rIns="0" bIns="0" rtlCol="0" anchor="t"/>
           <a:lstStyle/>
           <a:p>
-            <a:pPr indent="0" marL="0">
+            <a:pPr marL="0" indent="0">
               <a:buNone/>
             </a:pPr>
             <a:r>
@@ -8744,6 +8948,13 @@
             <a:prstDash val="solid"/>
           </a:ln>
         </p:spPr>
+        <p:txBody>
+          <a:bodyPr/>
+          <a:lstStyle/>
+          <a:p>
+            <a:endParaRPr lang="de-DE"/>
+          </a:p>
+        </p:txBody>
       </p:sp>
       <p:sp>
         <p:nvSpPr>
@@ -8766,7 +8977,7 @@
           <a:bodyPr wrap="square" lIns="0" tIns="0" rIns="0" bIns="0" rtlCol="0" anchor="ctr"/>
           <a:lstStyle/>
           <a:p>
-            <a:pPr indent="0" marL="0">
+            <a:pPr marL="0" indent="0">
               <a:buNone/>
             </a:pPr>
             <a:r>
@@ -8802,7 +9013,7 @@
           <a:bodyPr wrap="square" lIns="0" tIns="0" rIns="0" bIns="0" rtlCol="0" anchor="t"/>
           <a:lstStyle/>
           <a:p>
-            <a:pPr indent="0" marL="0">
+            <a:pPr marL="0" indent="0">
               <a:buNone/>
             </a:pPr>
             <a:r>
@@ -8843,6 +9054,13 @@
             <a:prstDash val="solid"/>
           </a:ln>
         </p:spPr>
+        <p:txBody>
+          <a:bodyPr/>
+          <a:lstStyle/>
+          <a:p>
+            <a:endParaRPr lang="de-DE"/>
+          </a:p>
+        </p:txBody>
       </p:sp>
       <p:sp>
         <p:nvSpPr>
@@ -8865,7 +9083,7 @@
           <a:bodyPr wrap="square" lIns="0" tIns="0" rIns="0" bIns="0" rtlCol="0" anchor="ctr"/>
           <a:lstStyle/>
           <a:p>
-            <a:pPr indent="0" marL="0">
+            <a:pPr marL="0" indent="0">
               <a:buNone/>
             </a:pPr>
             <a:r>
@@ -8901,7 +9119,7 @@
           <a:bodyPr wrap="square" lIns="0" tIns="0" rIns="0" bIns="0" rtlCol="0" anchor="t"/>
           <a:lstStyle/>
           <a:p>
-            <a:pPr indent="0" marL="0">
+            <a:pPr marL="0" indent="0">
               <a:buNone/>
             </a:pPr>
             <a:r>
@@ -8942,6 +9160,13 @@
             <a:prstDash val="solid"/>
           </a:ln>
         </p:spPr>
+        <p:txBody>
+          <a:bodyPr/>
+          <a:lstStyle/>
+          <a:p>
+            <a:endParaRPr lang="de-DE"/>
+          </a:p>
+        </p:txBody>
       </p:sp>
       <p:sp>
         <p:nvSpPr>
@@ -8964,7 +9189,7 @@
           <a:bodyPr wrap="square" lIns="0" tIns="0" rIns="0" bIns="0" rtlCol="0" anchor="ctr"/>
           <a:lstStyle/>
           <a:p>
-            <a:pPr indent="0" marL="0">
+            <a:pPr marL="0" indent="0">
               <a:buNone/>
             </a:pPr>
             <a:r>
@@ -9000,7 +9225,7 @@
           <a:bodyPr wrap="square" lIns="0" tIns="0" rIns="0" bIns="0" rtlCol="0" anchor="t"/>
           <a:lstStyle/>
           <a:p>
-            <a:pPr indent="0" marL="0">
+            <a:pPr marL="0" indent="0">
               <a:buNone/>
             </a:pPr>
             <a:r>
@@ -9041,6 +9266,13 @@
             <a:prstDash val="solid"/>
           </a:ln>
         </p:spPr>
+        <p:txBody>
+          <a:bodyPr/>
+          <a:lstStyle/>
+          <a:p>
+            <a:endParaRPr lang="de-DE"/>
+          </a:p>
+        </p:txBody>
       </p:sp>
       <p:sp>
         <p:nvSpPr>
@@ -9063,7 +9295,7 @@
           <a:bodyPr wrap="square" lIns="0" tIns="0" rIns="0" bIns="0" rtlCol="0" anchor="ctr"/>
           <a:lstStyle/>
           <a:p>
-            <a:pPr indent="0" marL="0">
+            <a:pPr marL="0" indent="0">
               <a:buNone/>
             </a:pPr>
             <a:r>
@@ -9099,7 +9331,7 @@
           <a:bodyPr wrap="square" lIns="0" tIns="0" rIns="0" bIns="0" rtlCol="0" anchor="t"/>
           <a:lstStyle/>
           <a:p>
-            <a:pPr indent="0" marL="0">
+            <a:pPr marL="0" indent="0">
               <a:buNone/>
             </a:pPr>
             <a:r>
@@ -9140,6 +9372,13 @@
             <a:prstDash val="solid"/>
           </a:ln>
         </p:spPr>
+        <p:txBody>
+          <a:bodyPr/>
+          <a:lstStyle/>
+          <a:p>
+            <a:endParaRPr lang="de-DE"/>
+          </a:p>
+        </p:txBody>
       </p:sp>
       <p:sp>
         <p:nvSpPr>
@@ -9162,7 +9401,7 @@
           <a:bodyPr wrap="square" lIns="0" tIns="0" rIns="0" bIns="0" rtlCol="0" anchor="ctr"/>
           <a:lstStyle/>
           <a:p>
-            <a:pPr indent="0" marL="0">
+            <a:pPr marL="0" indent="0">
               <a:buNone/>
             </a:pPr>
             <a:r>
@@ -9198,7 +9437,7 @@
           <a:bodyPr wrap="square" lIns="0" tIns="0" rIns="0" bIns="0" rtlCol="0" anchor="t"/>
           <a:lstStyle/>
           <a:p>
-            <a:pPr indent="0" marL="0">
+            <a:pPr marL="0" indent="0">
               <a:buNone/>
             </a:pPr>
             <a:r>
@@ -9234,7 +9473,7 @@
           <a:bodyPr wrap="square" lIns="0" tIns="0" rIns="0" bIns="0" rtlCol="0" anchor="ctr"/>
           <a:lstStyle/>
           <a:p>
-            <a:pPr indent="0" marL="0">
+            <a:pPr marL="0" indent="0">
               <a:buNone/>
             </a:pPr>
             <a:r>
@@ -9251,7 +9490,7 @@
       </p:sp>
       <p:sp>
         <p:nvSpPr>
-          <p:cNvPr id="25" name="Slide Number Placeholder 0"/>
+          <p:cNvPr id="35" name="Slide Number Placeholder 0"/>
           <p:cNvSpPr>
             <a:spLocks noGrp="1"/>
           </p:cNvSpPr>
@@ -9269,7 +9508,7 @@
           </a:prstGeom>
           <a:extLst>
             <a:ext uri="{C572A759-6A51-4108-AA02-DFA0A04FC94B}">
-              <ma14:wrappingTextBoxFlag xmlns:ma14="http://schemas.microsoft.com/office/mac/drawingml/2011/main" val="0"/>
+              <ma14:wrappingTextBoxFlag xmlns:ma14="http://schemas.microsoft.com/office/mac/drawingml/2011/main" xmlns="" val="0"/>
             </a:ext>
           </a:extLst>
         </p:spPr>
@@ -9287,7 +9526,7 @@
           <a:p>
             <a:pPr algn="r"/>
             <a:fld id="{F7021451-1387-4CA6-816F-3879F97B5CBC}" type="slidenum">
-              <a:rPr b="0" lang="en-US"/>
+              <a:rPr lang="en-US" b="0"/>
               <a:t>15</a:t>
             </a:fld>
             <a:endParaRPr lang="en-US"/>
@@ -9322,9 +9561,11 @@
       <p:sp>
         <p:nvSpPr>
           <p:cNvPr id="2" name="Text 0"/>
-          <p:cNvSpPr/>
+          <p:cNvSpPr>
+            <a:spLocks noGrp="1"/>
+          </p:cNvSpPr>
           <p:nvPr>
-            <p:ph idx="101" type="body" hasCustomPrompt="1"/>
+            <p:ph type="body" idx="101" hasCustomPrompt="1"/>
           </p:nvPr>
         </p:nvSpPr>
         <p:spPr>
@@ -9342,7 +9583,7 @@
           <a:bodyPr wrap="square" lIns="0" tIns="0" rIns="0" bIns="0" rtlCol="0" anchor="ctr"/>
           <a:lstStyle/>
           <a:p>
-            <a:pPr indent="0" marL="0">
+            <a:pPr marL="0" indent="0">
               <a:buNone/>
             </a:pPr>
             <a:r>
@@ -9360,9 +9601,11 @@
       <p:sp>
         <p:nvSpPr>
           <p:cNvPr id="3" name="Text 0"/>
-          <p:cNvSpPr/>
+          <p:cNvSpPr>
+            <a:spLocks noGrp="1"/>
+          </p:cNvSpPr>
           <p:nvPr>
-            <p:ph idx="102" type="title" hasCustomPrompt="1"/>
+            <p:ph type="title" idx="102" hasCustomPrompt="1"/>
           </p:nvPr>
         </p:nvSpPr>
         <p:spPr>
@@ -9380,7 +9623,7 @@
           <a:bodyPr wrap="square" lIns="0" tIns="0" rIns="0" bIns="0" rtlCol="0" anchor="ctr"/>
           <a:lstStyle/>
           <a:p>
-            <a:pPr algn="l" indent="0" marL="0">
+            <a:pPr marL="0" indent="0" algn="l">
               <a:buNone/>
             </a:pPr>
             <a:r>
@@ -9421,6 +9664,13 @@
             <a:prstDash val="solid"/>
           </a:ln>
         </p:spPr>
+        <p:txBody>
+          <a:bodyPr/>
+          <a:lstStyle/>
+          <a:p>
+            <a:endParaRPr lang="de-DE"/>
+          </a:p>
+        </p:txBody>
       </p:sp>
       <p:sp>
         <p:nvSpPr>
@@ -9446,17 +9696,24 @@
             <a:prstDash val="solid"/>
           </a:ln>
         </p:spPr>
+        <p:txBody>
+          <a:bodyPr/>
+          <a:lstStyle/>
+          <a:p>
+            <a:endParaRPr lang="de-DE"/>
+          </a:p>
+        </p:txBody>
       </p:sp>
       <p:pic>
         <p:nvPicPr>
-          <p:cNvPr id="6" name="Image 0" descr="preencoded.png">    </p:cNvPr>
+          <p:cNvPr id="6" name="Image 0" descr="preencoded.png"/>
           <p:cNvPicPr>
             <a:picLocks noChangeAspect="1"/>
           </p:cNvPicPr>
           <p:nvPr/>
         </p:nvPicPr>
         <p:blipFill>
-          <a:blip r:embed="rId1"/>
+          <a:blip r:embed="rId3"/>
           <a:stretch>
             <a:fillRect/>
           </a:stretch>
@@ -9492,7 +9749,7 @@
           <a:bodyPr wrap="square" lIns="0" tIns="0" rIns="0" bIns="0" rtlCol="0" anchor="ctr"/>
           <a:lstStyle/>
           <a:p>
-            <a:pPr algn="ctr" indent="0" marL="0">
+            <a:pPr marL="0" indent="0" algn="ctr">
               <a:buNone/>
             </a:pPr>
             <a:r>
@@ -9528,7 +9785,7 @@
           <a:bodyPr wrap="square" lIns="0" tIns="0" rIns="0" bIns="0" rtlCol="0" anchor="ctr"/>
           <a:lstStyle/>
           <a:p>
-            <a:pPr algn="ctr" indent="0" marL="0">
+            <a:pPr marL="0" indent="0" algn="ctr">
               <a:buNone/>
             </a:pPr>
             <a:r>
@@ -9564,7 +9821,7 @@
           <a:bodyPr wrap="square" lIns="0" tIns="0" rIns="0" bIns="0" rtlCol="0" anchor="t"/>
           <a:lstStyle/>
           <a:p>
-            <a:pPr algn="ctr" indent="0" marL="0">
+            <a:pPr marL="0" indent="0" algn="ctr">
               <a:buNone/>
             </a:pPr>
             <a:r>
@@ -9605,6 +9862,13 @@
             <a:prstDash val="solid"/>
           </a:ln>
         </p:spPr>
+        <p:txBody>
+          <a:bodyPr/>
+          <a:lstStyle/>
+          <a:p>
+            <a:endParaRPr lang="de-DE"/>
+          </a:p>
+        </p:txBody>
       </p:sp>
       <p:sp>
         <p:nvSpPr>
@@ -9630,17 +9894,24 @@
             <a:prstDash val="solid"/>
           </a:ln>
         </p:spPr>
+        <p:txBody>
+          <a:bodyPr/>
+          <a:lstStyle/>
+          <a:p>
+            <a:endParaRPr lang="de-DE"/>
+          </a:p>
+        </p:txBody>
       </p:sp>
       <p:pic>
         <p:nvPicPr>
-          <p:cNvPr id="12" name="Image 1" descr="preencoded.png">    </p:cNvPr>
+          <p:cNvPr id="12" name="Image 1" descr="preencoded.png"/>
           <p:cNvPicPr>
             <a:picLocks noChangeAspect="1"/>
           </p:cNvPicPr>
           <p:nvPr/>
         </p:nvPicPr>
         <p:blipFill>
-          <a:blip r:embed="rId2"/>
+          <a:blip r:embed="rId4"/>
           <a:stretch>
             <a:fillRect/>
           </a:stretch>
@@ -9676,7 +9947,7 @@
           <a:bodyPr wrap="square" lIns="0" tIns="0" rIns="0" bIns="0" rtlCol="0" anchor="ctr"/>
           <a:lstStyle/>
           <a:p>
-            <a:pPr algn="ctr" indent="0" marL="0">
+            <a:pPr marL="0" indent="0" algn="ctr">
               <a:buNone/>
             </a:pPr>
             <a:r>
@@ -9712,7 +9983,7 @@
           <a:bodyPr wrap="square" lIns="0" tIns="0" rIns="0" bIns="0" rtlCol="0" anchor="ctr"/>
           <a:lstStyle/>
           <a:p>
-            <a:pPr algn="ctr" indent="0" marL="0">
+            <a:pPr marL="0" indent="0" algn="ctr">
               <a:buNone/>
             </a:pPr>
             <a:r>
@@ -9748,7 +10019,7 @@
           <a:bodyPr wrap="square" lIns="0" tIns="0" rIns="0" bIns="0" rtlCol="0" anchor="t"/>
           <a:lstStyle/>
           <a:p>
-            <a:pPr algn="ctr" indent="0" marL="0">
+            <a:pPr marL="0" indent="0" algn="ctr">
               <a:buNone/>
             </a:pPr>
             <a:r>
@@ -9789,6 +10060,13 @@
             <a:prstDash val="solid"/>
           </a:ln>
         </p:spPr>
+        <p:txBody>
+          <a:bodyPr/>
+          <a:lstStyle/>
+          <a:p>
+            <a:endParaRPr lang="de-DE"/>
+          </a:p>
+        </p:txBody>
       </p:sp>
       <p:sp>
         <p:nvSpPr>
@@ -9814,17 +10092,24 @@
             <a:prstDash val="solid"/>
           </a:ln>
         </p:spPr>
+        <p:txBody>
+          <a:bodyPr/>
+          <a:lstStyle/>
+          <a:p>
+            <a:endParaRPr lang="de-DE"/>
+          </a:p>
+        </p:txBody>
       </p:sp>
       <p:pic>
         <p:nvPicPr>
-          <p:cNvPr id="18" name="Image 2" descr="preencoded.png">    </p:cNvPr>
+          <p:cNvPr id="18" name="Image 2" descr="preencoded.png"/>
           <p:cNvPicPr>
             <a:picLocks noChangeAspect="1"/>
           </p:cNvPicPr>
           <p:nvPr/>
         </p:nvPicPr>
         <p:blipFill>
-          <a:blip r:embed="rId3"/>
+          <a:blip r:embed="rId5"/>
           <a:stretch>
             <a:fillRect/>
           </a:stretch>
@@ -9860,7 +10145,7 @@
           <a:bodyPr wrap="square" lIns="0" tIns="0" rIns="0" bIns="0" rtlCol="0" anchor="ctr"/>
           <a:lstStyle/>
           <a:p>
-            <a:pPr algn="ctr" indent="0" marL="0">
+            <a:pPr marL="0" indent="0" algn="ctr">
               <a:buNone/>
             </a:pPr>
             <a:r>
@@ -9896,7 +10181,7 @@
           <a:bodyPr wrap="square" lIns="0" tIns="0" rIns="0" bIns="0" rtlCol="0" anchor="ctr"/>
           <a:lstStyle/>
           <a:p>
-            <a:pPr algn="ctr" indent="0" marL="0">
+            <a:pPr marL="0" indent="0" algn="ctr">
               <a:buNone/>
             </a:pPr>
             <a:r>
@@ -9932,7 +10217,7 @@
           <a:bodyPr wrap="square" lIns="0" tIns="0" rIns="0" bIns="0" rtlCol="0" anchor="t"/>
           <a:lstStyle/>
           <a:p>
-            <a:pPr algn="ctr" indent="0" marL="0">
+            <a:pPr marL="0" indent="0" algn="ctr">
               <a:buNone/>
             </a:pPr>
             <a:r>
@@ -9968,7 +10253,7 @@
           <a:bodyPr wrap="square" lIns="0" tIns="0" rIns="0" bIns="0" rtlCol="0" anchor="ctr"/>
           <a:lstStyle/>
           <a:p>
-            <a:pPr indent="0" marL="0">
+            <a:pPr marL="0" indent="0">
               <a:buNone/>
             </a:pPr>
             <a:r>
@@ -10003,7 +10288,7 @@
           </a:prstGeom>
           <a:extLst>
             <a:ext uri="{C572A759-6A51-4108-AA02-DFA0A04FC94B}">
-              <ma14:wrappingTextBoxFlag xmlns:ma14="http://schemas.microsoft.com/office/mac/drawingml/2011/main" val="0"/>
+              <ma14:wrappingTextBoxFlag xmlns:ma14="http://schemas.microsoft.com/office/mac/drawingml/2011/main" xmlns="" val="0"/>
             </a:ext>
           </a:extLst>
         </p:spPr>
@@ -10021,7 +10306,7 @@
           <a:p>
             <a:pPr algn="r"/>
             <a:fld id="{F7021451-1387-4CA6-816F-3879F97B5CBC}" type="slidenum">
-              <a:rPr b="0" lang="en-US"/>
+              <a:rPr lang="en-US" b="0"/>
               <a:t>16</a:t>
             </a:fld>
             <a:endParaRPr lang="en-US"/>
@@ -10056,9 +10341,11 @@
       <p:sp>
         <p:nvSpPr>
           <p:cNvPr id="2" name="Text 0"/>
-          <p:cNvSpPr/>
+          <p:cNvSpPr>
+            <a:spLocks noGrp="1"/>
+          </p:cNvSpPr>
           <p:nvPr>
-            <p:ph idx="101" type="body" hasCustomPrompt="1"/>
+            <p:ph type="body" idx="101" hasCustomPrompt="1"/>
           </p:nvPr>
         </p:nvSpPr>
         <p:spPr>
@@ -10076,7 +10363,7 @@
           <a:bodyPr wrap="square" lIns="0" tIns="0" rIns="0" bIns="0" rtlCol="0" anchor="ctr"/>
           <a:lstStyle/>
           <a:p>
-            <a:pPr indent="0" marL="0">
+            <a:pPr marL="0" indent="0">
               <a:buNone/>
             </a:pPr>
             <a:r>
@@ -10094,9 +10381,11 @@
       <p:sp>
         <p:nvSpPr>
           <p:cNvPr id="3" name="Text 0"/>
-          <p:cNvSpPr/>
+          <p:cNvSpPr>
+            <a:spLocks noGrp="1"/>
+          </p:cNvSpPr>
           <p:nvPr>
-            <p:ph idx="102" type="title" hasCustomPrompt="1"/>
+            <p:ph type="title" idx="102" hasCustomPrompt="1"/>
           </p:nvPr>
         </p:nvSpPr>
         <p:spPr>
@@ -10114,7 +10403,7 @@
           <a:bodyPr wrap="square" lIns="0" tIns="0" rIns="0" bIns="0" rtlCol="0" anchor="ctr"/>
           <a:lstStyle/>
           <a:p>
-            <a:pPr algn="l" indent="0" marL="0">
+            <a:pPr marL="0" indent="0" algn="l">
               <a:buNone/>
             </a:pPr>
             <a:r>
@@ -10155,6 +10444,13 @@
             <a:prstDash val="solid"/>
           </a:ln>
         </p:spPr>
+        <p:txBody>
+          <a:bodyPr/>
+          <a:lstStyle/>
+          <a:p>
+            <a:endParaRPr lang="de-DE"/>
+          </a:p>
+        </p:txBody>
       </p:sp>
       <p:sp>
         <p:nvSpPr>
@@ -10180,17 +10476,24 @@
             <a:prstDash val="solid"/>
           </a:ln>
         </p:spPr>
+        <p:txBody>
+          <a:bodyPr/>
+          <a:lstStyle/>
+          <a:p>
+            <a:endParaRPr lang="de-DE"/>
+          </a:p>
+        </p:txBody>
       </p:sp>
       <p:pic>
         <p:nvPicPr>
-          <p:cNvPr id="6" name="Image 0" descr="preencoded.png">    </p:cNvPr>
+          <p:cNvPr id="6" name="Image 0" descr="preencoded.png"/>
           <p:cNvPicPr>
             <a:picLocks noChangeAspect="1"/>
           </p:cNvPicPr>
           <p:nvPr/>
         </p:nvPicPr>
         <p:blipFill>
-          <a:blip r:embed="rId1"/>
+          <a:blip r:embed="rId3"/>
           <a:stretch>
             <a:fillRect/>
           </a:stretch>
@@ -10226,7 +10529,7 @@
           <a:bodyPr wrap="square" lIns="0" tIns="0" rIns="0" bIns="0" rtlCol="0" anchor="ctr"/>
           <a:lstStyle/>
           <a:p>
-            <a:pPr indent="0" marL="0">
+            <a:pPr marL="0" indent="0">
               <a:buNone/>
             </a:pPr>
             <a:r>
@@ -10306,30 +10609,20 @@
               <a:buChar char="•"/>
             </a:pPr>
             <a:r>
+              <a:rPr lang="en-US" sz="1800" dirty="0" err="1">
+                <a:solidFill>
+                  <a:schemeClr val="tx1"/>
+                </a:solidFill>
+              </a:rPr>
+              <a:t>Klares</a:t>
+            </a:r>
+            <a:r>
               <a:rPr lang="en-US" sz="1800" dirty="0">
                 <a:solidFill>
                   <a:schemeClr val="tx1"/>
                 </a:solidFill>
               </a:rPr>
-              <a:t>Konsistente, syntaxkonforme Diagramme</a:t>
-            </a:r>
-            <a:endParaRPr lang="en-US" sz="1800" dirty="0"/>
-          </a:p>
-          <a:p>
-            <a:pPr marL="228600" indent="-228600">
-              <a:spcAft>
-                <a:spcPts val="600"/>
-              </a:spcAft>
-              <a:buSzPct val="100000"/>
-              <a:buChar char="•"/>
-            </a:pPr>
-            <a:r>
-              <a:rPr lang="en-US" sz="1800" dirty="0">
-                <a:solidFill>
-                  <a:schemeClr val="tx1"/>
-                </a:solidFill>
-              </a:rPr>
-              <a:t>Klares Produkt mit Geschäftsmodell</a:t>
+              <a:t> Produkt mit Geschäftsmodell</a:t>
             </a:r>
             <a:endParaRPr lang="en-US" sz="1800" dirty="0"/>
           </a:p>
@@ -10361,6 +10654,13 @@
             <a:prstDash val="solid"/>
           </a:ln>
         </p:spPr>
+        <p:txBody>
+          <a:bodyPr/>
+          <a:lstStyle/>
+          <a:p>
+            <a:endParaRPr lang="de-DE"/>
+          </a:p>
+        </p:txBody>
       </p:sp>
       <p:sp>
         <p:nvSpPr>
@@ -10386,17 +10686,24 @@
             <a:prstDash val="solid"/>
           </a:ln>
         </p:spPr>
+        <p:txBody>
+          <a:bodyPr/>
+          <a:lstStyle/>
+          <a:p>
+            <a:endParaRPr lang="de-DE"/>
+          </a:p>
+        </p:txBody>
       </p:sp>
       <p:pic>
         <p:nvPicPr>
-          <p:cNvPr id="11" name="Image 1" descr="preencoded.png">    </p:cNvPr>
+          <p:cNvPr id="11" name="Image 1" descr="preencoded.png"/>
           <p:cNvPicPr>
             <a:picLocks noChangeAspect="1"/>
           </p:cNvPicPr>
           <p:nvPr/>
         </p:nvPicPr>
         <p:blipFill>
-          <a:blip r:embed="rId2"/>
+          <a:blip r:embed="rId4"/>
           <a:stretch>
             <a:fillRect/>
           </a:stretch>
@@ -10432,7 +10739,7 @@
           <a:bodyPr wrap="square" lIns="0" tIns="0" rIns="0" bIns="0" rtlCol="0" anchor="ctr"/>
           <a:lstStyle/>
           <a:p>
-            <a:pPr indent="0" marL="0">
+            <a:pPr marL="0" indent="0">
               <a:buNone/>
             </a:pPr>
             <a:r>
@@ -10517,9 +10824,37 @@
                   <a:schemeClr val="tx1"/>
                 </a:solidFill>
               </a:rPr>
-              <a:t>KI-gestützte Terminoptimierung</a:t>
-            </a:r>
-            <a:endParaRPr lang="en-US" sz="1800" dirty="0"/>
+              <a:t>KI-</a:t>
+            </a:r>
+            <a:r>
+              <a:rPr lang="en-US" sz="1800" dirty="0" err="1">
+                <a:solidFill>
+                  <a:schemeClr val="tx1"/>
+                </a:solidFill>
+              </a:rPr>
+              <a:t>gestützte</a:t>
+            </a:r>
+            <a:r>
+              <a:rPr lang="en-US" sz="1800" dirty="0">
+                <a:solidFill>
+                  <a:schemeClr val="tx1"/>
+                </a:solidFill>
+              </a:rPr>
+              <a:t> </a:t>
+            </a:r>
+            <a:r>
+              <a:rPr lang="en-US" sz="1800" dirty="0" err="1">
+                <a:solidFill>
+                  <a:schemeClr val="tx1"/>
+                </a:solidFill>
+              </a:rPr>
+              <a:t>Terminoptimierung</a:t>
+            </a:r>
+            <a:endParaRPr lang="en-US" sz="1800" dirty="0">
+              <a:solidFill>
+                <a:schemeClr val="tx1"/>
+              </a:solidFill>
+            </a:endParaRPr>
           </a:p>
           <a:p>
             <a:pPr marL="228600" indent="-228600">
@@ -10527,16 +10862,47 @@
                 <a:spcPts val="600"/>
               </a:spcAft>
               <a:buSzPct val="100000"/>
+              <a:buFontTx/>
               <a:buChar char="•"/>
             </a:pPr>
             <a:r>
-              <a:rPr lang="en-US" sz="1800" dirty="0">
-                <a:solidFill>
-                  <a:schemeClr val="tx1"/>
-                </a:solidFill>
-              </a:rPr>
-              <a:t>Pilotprojekt mit echter Praxis</a:t>
-            </a:r>
+              <a:rPr lang="en-US" dirty="0" err="1"/>
+              <a:t>Konsistente</a:t>
+            </a:r>
+            <a:r>
+              <a:rPr lang="en-US" dirty="0"/>
+              <a:t>, </a:t>
+            </a:r>
+            <a:r>
+              <a:rPr lang="en-US" dirty="0" err="1"/>
+              <a:t>syntaxkonforme</a:t>
+            </a:r>
+            <a:r>
+              <a:rPr lang="en-US" dirty="0"/>
+              <a:t> </a:t>
+            </a:r>
+            <a:r>
+              <a:rPr lang="en-US" dirty="0" err="1"/>
+              <a:t>Diagramme</a:t>
+            </a:r>
+            <a:endParaRPr lang="en-US" dirty="0"/>
+          </a:p>
+          <a:p>
+            <a:pPr>
+              <a:spcAft>
+                <a:spcPts val="600"/>
+              </a:spcAft>
+              <a:buSzPct val="100000"/>
+            </a:pPr>
+            <a:endParaRPr lang="en-US" sz="1800" dirty="0"/>
+          </a:p>
+          <a:p>
+            <a:pPr>
+              <a:spcAft>
+                <a:spcPts val="600"/>
+              </a:spcAft>
+              <a:buSzPct val="100000"/>
+            </a:pPr>
             <a:endParaRPr lang="en-US" sz="1800" dirty="0"/>
           </a:p>
         </p:txBody>
@@ -10562,7 +10928,7 @@
           <a:bodyPr wrap="square" lIns="0" tIns="0" rIns="0" bIns="0" rtlCol="0" anchor="ctr"/>
           <a:lstStyle/>
           <a:p>
-            <a:pPr algn="ctr" indent="0" marL="0">
+            <a:pPr marL="0" indent="0" algn="ctr">
               <a:buNone/>
             </a:pPr>
             <a:r>
@@ -10597,7 +10963,7 @@
           </a:prstGeom>
           <a:extLst>
             <a:ext uri="{C572A759-6A51-4108-AA02-DFA0A04FC94B}">
-              <ma14:wrappingTextBoxFlag xmlns:ma14="http://schemas.microsoft.com/office/mac/drawingml/2011/main" val="0"/>
+              <ma14:wrappingTextBoxFlag xmlns:ma14="http://schemas.microsoft.com/office/mac/drawingml/2011/main" xmlns="" val="0"/>
             </a:ext>
           </a:extLst>
         </p:spPr>
@@ -10615,7 +10981,7 @@
           <a:p>
             <a:pPr algn="r"/>
             <a:fld id="{F7021451-1387-4CA6-816F-3879F97B5CBC}" type="slidenum">
-              <a:rPr b="0" lang="en-US"/>
+              <a:rPr lang="en-US" b="0"/>
               <a:t>17</a:t>
             </a:fld>
             <a:endParaRPr lang="en-US"/>
@@ -10673,17 +11039,24 @@
             <a:prstDash val="solid"/>
           </a:ln>
         </p:spPr>
+        <p:txBody>
+          <a:bodyPr/>
+          <a:lstStyle/>
+          <a:p>
+            <a:endParaRPr lang="de-DE"/>
+          </a:p>
+        </p:txBody>
       </p:sp>
       <p:pic>
         <p:nvPicPr>
-          <p:cNvPr id="3" name="Image 0" descr="/private/tmp/claude-501/-Users-helenstark-Documents-Lernzettel-WebProgrammierung/d4309317-c575-44fe-a25d-9aac008a91a2/scratchpad/un/ppt/media/image-1-1.png">    </p:cNvPr>
+          <p:cNvPr id="3" name="Image 0" descr="/private/tmp/claude-501/-Users-helenstark-Documents-Lernzettel-WebProgrammierung/d4309317-c575-44fe-a25d-9aac008a91a2/scratchpad/un/ppt/media/image-1-1.png"/>
           <p:cNvPicPr>
             <a:picLocks noChangeAspect="1"/>
           </p:cNvPicPr>
           <p:nvPr/>
         </p:nvPicPr>
         <p:blipFill>
-          <a:blip r:embed="rId1"/>
+          <a:blip r:embed="rId3"/>
           <a:stretch>
             <a:fillRect/>
           </a:stretch>
@@ -10719,7 +11092,7 @@
           <a:bodyPr wrap="square" lIns="0" tIns="0" rIns="0" bIns="0" rtlCol="0" anchor="ctr"/>
           <a:lstStyle/>
           <a:p>
-            <a:pPr algn="ctr" indent="0" marL="0">
+            <a:pPr marL="0" indent="0" algn="ctr">
               <a:buNone/>
             </a:pPr>
             <a:r>
@@ -10755,7 +11128,7 @@
           <a:bodyPr wrap="square" lIns="0" tIns="0" rIns="0" bIns="0" rtlCol="0" anchor="ctr"/>
           <a:lstStyle/>
           <a:p>
-            <a:pPr algn="ctr" indent="0" marL="0">
+            <a:pPr marL="0" indent="0" algn="ctr">
               <a:buNone/>
             </a:pPr>
             <a:r>
@@ -10791,7 +11164,7 @@
           <a:bodyPr wrap="square" lIns="0" tIns="0" rIns="0" bIns="0" rtlCol="0" anchor="ctr"/>
           <a:lstStyle/>
           <a:p>
-            <a:pPr algn="ctr" indent="0" marL="0">
+            <a:pPr marL="0" indent="0" algn="ctr">
               <a:buNone/>
             </a:pPr>
             <a:r>
@@ -10834,9 +11207,11 @@
       <p:sp>
         <p:nvSpPr>
           <p:cNvPr id="2" name="Text 0"/>
-          <p:cNvSpPr/>
+          <p:cNvSpPr>
+            <a:spLocks noGrp="1"/>
+          </p:cNvSpPr>
           <p:nvPr>
-            <p:ph idx="101" type="body" hasCustomPrompt="1"/>
+            <p:ph type="body" idx="101" hasCustomPrompt="1"/>
           </p:nvPr>
         </p:nvSpPr>
         <p:spPr>
@@ -10854,7 +11229,7 @@
           <a:bodyPr wrap="square" lIns="0" tIns="0" rIns="0" bIns="0" rtlCol="0" anchor="ctr"/>
           <a:lstStyle/>
           <a:p>
-            <a:pPr indent="0" marL="0">
+            <a:pPr marL="0" indent="0">
               <a:buNone/>
             </a:pPr>
             <a:r>
@@ -10872,9 +11247,11 @@
       <p:sp>
         <p:nvSpPr>
           <p:cNvPr id="3" name="Text 0"/>
-          <p:cNvSpPr/>
+          <p:cNvSpPr>
+            <a:spLocks noGrp="1"/>
+          </p:cNvSpPr>
           <p:nvPr>
-            <p:ph idx="102" type="title" hasCustomPrompt="1"/>
+            <p:ph type="title" idx="102" hasCustomPrompt="1"/>
           </p:nvPr>
         </p:nvSpPr>
         <p:spPr>
@@ -10892,7 +11269,7 @@
           <a:bodyPr wrap="square" lIns="0" tIns="0" rIns="0" bIns="0" rtlCol="0" anchor="ctr"/>
           <a:lstStyle/>
           <a:p>
-            <a:pPr algn="l" indent="0" marL="0">
+            <a:pPr marL="0" indent="0" algn="l">
               <a:buNone/>
             </a:pPr>
             <a:r>
@@ -10929,6 +11306,13 @@
             <a:prstDash val="solid"/>
           </a:ln>
         </p:spPr>
+        <p:txBody>
+          <a:bodyPr/>
+          <a:lstStyle/>
+          <a:p>
+            <a:endParaRPr lang="de-DE"/>
+          </a:p>
+        </p:txBody>
       </p:sp>
       <p:sp>
         <p:nvSpPr>
@@ -10954,17 +11338,24 @@
             <a:prstDash val="solid"/>
           </a:ln>
         </p:spPr>
+        <p:txBody>
+          <a:bodyPr/>
+          <a:lstStyle/>
+          <a:p>
+            <a:endParaRPr lang="de-DE"/>
+          </a:p>
+        </p:txBody>
       </p:sp>
       <p:pic>
         <p:nvPicPr>
-          <p:cNvPr id="6" name="Image 0" descr="preencoded.png">    </p:cNvPr>
+          <p:cNvPr id="6" name="Image 0" descr="preencoded.png"/>
           <p:cNvPicPr>
             <a:picLocks noChangeAspect="1"/>
           </p:cNvPicPr>
           <p:nvPr/>
         </p:nvPicPr>
         <p:blipFill>
-          <a:blip r:embed="rId1"/>
+          <a:blip r:embed="rId3"/>
           <a:stretch>
             <a:fillRect/>
           </a:stretch>
@@ -11000,7 +11391,7 @@
           <a:bodyPr wrap="square" lIns="0" tIns="0" rIns="0" bIns="0" rtlCol="0" anchor="ctr"/>
           <a:lstStyle/>
           <a:p>
-            <a:pPr algn="ctr" indent="0" marL="0">
+            <a:pPr marL="0" indent="0" algn="ctr">
               <a:buNone/>
             </a:pPr>
             <a:r>
@@ -11036,7 +11427,7 @@
           <a:bodyPr wrap="square" lIns="0" tIns="0" rIns="0" bIns="0" rtlCol="0" anchor="t"/>
           <a:lstStyle/>
           <a:p>
-            <a:pPr algn="ctr" indent="0" marL="0">
+            <a:pPr marL="0" indent="0" algn="ctr">
               <a:buNone/>
             </a:pPr>
             <a:r>
@@ -11075,17 +11466,24 @@
             <a:prstDash val="solid"/>
           </a:ln>
         </p:spPr>
+        <p:txBody>
+          <a:bodyPr/>
+          <a:lstStyle/>
+          <a:p>
+            <a:endParaRPr lang="de-DE"/>
+          </a:p>
+        </p:txBody>
       </p:sp>
       <p:pic>
         <p:nvPicPr>
-          <p:cNvPr id="10" name="Image 1" descr="preencoded.png">    </p:cNvPr>
+          <p:cNvPr id="10" name="Image 1" descr="preencoded.png"/>
           <p:cNvPicPr>
             <a:picLocks noChangeAspect="1"/>
           </p:cNvPicPr>
           <p:nvPr/>
         </p:nvPicPr>
         <p:blipFill>
-          <a:blip r:embed="rId2"/>
+          <a:blip r:embed="rId4"/>
           <a:stretch>
             <a:fillRect/>
           </a:stretch>
@@ -11121,7 +11519,7 @@
           <a:bodyPr wrap="square" lIns="0" tIns="0" rIns="0" bIns="0" rtlCol="0" anchor="ctr"/>
           <a:lstStyle/>
           <a:p>
-            <a:pPr algn="ctr" indent="0" marL="0">
+            <a:pPr marL="0" indent="0" algn="ctr">
               <a:buNone/>
             </a:pPr>
             <a:r>
@@ -11157,7 +11555,7 @@
           <a:bodyPr wrap="square" lIns="0" tIns="0" rIns="0" bIns="0" rtlCol="0" anchor="t"/>
           <a:lstStyle/>
           <a:p>
-            <a:pPr algn="ctr" indent="0" marL="0">
+            <a:pPr marL="0" indent="0" algn="ctr">
               <a:buNone/>
             </a:pPr>
             <a:r>
@@ -11196,17 +11594,24 @@
             <a:prstDash val="solid"/>
           </a:ln>
         </p:spPr>
+        <p:txBody>
+          <a:bodyPr/>
+          <a:lstStyle/>
+          <a:p>
+            <a:endParaRPr lang="de-DE"/>
+          </a:p>
+        </p:txBody>
       </p:sp>
       <p:pic>
         <p:nvPicPr>
-          <p:cNvPr id="14" name="Image 2" descr="preencoded.png">    </p:cNvPr>
+          <p:cNvPr id="14" name="Image 2" descr="preencoded.png"/>
           <p:cNvPicPr>
             <a:picLocks noChangeAspect="1"/>
           </p:cNvPicPr>
           <p:nvPr/>
         </p:nvPicPr>
         <p:blipFill>
-          <a:blip r:embed="rId3"/>
+          <a:blip r:embed="rId5"/>
           <a:stretch>
             <a:fillRect/>
           </a:stretch>
@@ -11242,7 +11647,7 @@
           <a:bodyPr wrap="square" lIns="0" tIns="0" rIns="0" bIns="0" rtlCol="0" anchor="ctr"/>
           <a:lstStyle/>
           <a:p>
-            <a:pPr algn="ctr" indent="0" marL="0">
+            <a:pPr marL="0" indent="0" algn="ctr">
               <a:buNone/>
             </a:pPr>
             <a:r>
@@ -11278,7 +11683,7 @@
           <a:bodyPr wrap="square" lIns="0" tIns="0" rIns="0" bIns="0" rtlCol="0" anchor="t"/>
           <a:lstStyle/>
           <a:p>
-            <a:pPr algn="ctr" indent="0" marL="0">
+            <a:pPr marL="0" indent="0" algn="ctr">
               <a:buNone/>
             </a:pPr>
             <a:r>
@@ -11317,17 +11722,24 @@
             <a:prstDash val="solid"/>
           </a:ln>
         </p:spPr>
+        <p:txBody>
+          <a:bodyPr/>
+          <a:lstStyle/>
+          <a:p>
+            <a:endParaRPr lang="de-DE"/>
+          </a:p>
+        </p:txBody>
       </p:sp>
       <p:pic>
         <p:nvPicPr>
-          <p:cNvPr id="18" name="Image 3" descr="preencoded.png">    </p:cNvPr>
+          <p:cNvPr id="18" name="Image 3" descr="preencoded.png"/>
           <p:cNvPicPr>
             <a:picLocks noChangeAspect="1"/>
           </p:cNvPicPr>
           <p:nvPr/>
         </p:nvPicPr>
         <p:blipFill>
-          <a:blip r:embed="rId4"/>
+          <a:blip r:embed="rId6"/>
           <a:stretch>
             <a:fillRect/>
           </a:stretch>
@@ -11363,7 +11775,7 @@
           <a:bodyPr wrap="square" lIns="0" tIns="0" rIns="0" bIns="0" rtlCol="0" anchor="ctr"/>
           <a:lstStyle/>
           <a:p>
-            <a:pPr algn="ctr" indent="0" marL="0">
+            <a:pPr marL="0" indent="0" algn="ctr">
               <a:buNone/>
             </a:pPr>
             <a:r>
@@ -11399,7 +11811,7 @@
           <a:bodyPr wrap="square" lIns="0" tIns="0" rIns="0" bIns="0" rtlCol="0" anchor="t"/>
           <a:lstStyle/>
           <a:p>
-            <a:pPr algn="ctr" indent="0" marL="0">
+            <a:pPr marL="0" indent="0" algn="ctr">
               <a:buNone/>
             </a:pPr>
             <a:r>
@@ -11438,17 +11850,24 @@
             <a:prstDash val="solid"/>
           </a:ln>
         </p:spPr>
+        <p:txBody>
+          <a:bodyPr/>
+          <a:lstStyle/>
+          <a:p>
+            <a:endParaRPr lang="de-DE"/>
+          </a:p>
+        </p:txBody>
       </p:sp>
       <p:pic>
         <p:nvPicPr>
-          <p:cNvPr id="22" name="Image 4" descr="preencoded.png">    </p:cNvPr>
+          <p:cNvPr id="22" name="Image 4" descr="preencoded.png"/>
           <p:cNvPicPr>
             <a:picLocks noChangeAspect="1"/>
           </p:cNvPicPr>
           <p:nvPr/>
         </p:nvPicPr>
         <p:blipFill>
-          <a:blip r:embed="rId5"/>
+          <a:blip r:embed="rId7"/>
           <a:stretch>
             <a:fillRect/>
           </a:stretch>
@@ -11484,7 +11903,7 @@
           <a:bodyPr wrap="square" lIns="0" tIns="0" rIns="0" bIns="0" rtlCol="0" anchor="ctr"/>
           <a:lstStyle/>
           <a:p>
-            <a:pPr algn="ctr" indent="0" marL="0">
+            <a:pPr marL="0" indent="0" algn="ctr">
               <a:buNone/>
             </a:pPr>
             <a:r>
@@ -11520,7 +11939,7 @@
           <a:bodyPr wrap="square" lIns="0" tIns="0" rIns="0" bIns="0" rtlCol="0" anchor="t"/>
           <a:lstStyle/>
           <a:p>
-            <a:pPr algn="ctr" indent="0" marL="0">
+            <a:pPr marL="0" indent="0" algn="ctr">
               <a:buNone/>
             </a:pPr>
             <a:r>
@@ -11559,17 +11978,24 @@
             <a:prstDash val="solid"/>
           </a:ln>
         </p:spPr>
+        <p:txBody>
+          <a:bodyPr/>
+          <a:lstStyle/>
+          <a:p>
+            <a:endParaRPr lang="de-DE"/>
+          </a:p>
+        </p:txBody>
       </p:sp>
       <p:pic>
         <p:nvPicPr>
-          <p:cNvPr id="26" name="Image 5" descr="preencoded.png">    </p:cNvPr>
+          <p:cNvPr id="26" name="Image 5" descr="preencoded.png"/>
           <p:cNvPicPr>
             <a:picLocks noChangeAspect="1"/>
           </p:cNvPicPr>
           <p:nvPr/>
         </p:nvPicPr>
         <p:blipFill>
-          <a:blip r:embed="rId6"/>
+          <a:blip r:embed="rId8"/>
           <a:stretch>
             <a:fillRect/>
           </a:stretch>
@@ -11605,7 +12031,7 @@
           <a:bodyPr wrap="square" lIns="0" tIns="0" rIns="0" bIns="0" rtlCol="0" anchor="ctr"/>
           <a:lstStyle/>
           <a:p>
-            <a:pPr algn="ctr" indent="0" marL="0">
+            <a:pPr marL="0" indent="0" algn="ctr">
               <a:buNone/>
             </a:pPr>
             <a:r>
@@ -11641,7 +12067,7 @@
           <a:bodyPr wrap="square" lIns="0" tIns="0" rIns="0" bIns="0" rtlCol="0" anchor="t"/>
           <a:lstStyle/>
           <a:p>
-            <a:pPr algn="ctr" indent="0" marL="0">
+            <a:pPr marL="0" indent="0" algn="ctr">
               <a:buNone/>
             </a:pPr>
             <a:r>
@@ -11680,17 +12106,24 @@
             <a:prstDash val="solid"/>
           </a:ln>
         </p:spPr>
+        <p:txBody>
+          <a:bodyPr/>
+          <a:lstStyle/>
+          <a:p>
+            <a:endParaRPr lang="de-DE"/>
+          </a:p>
+        </p:txBody>
       </p:sp>
       <p:pic>
         <p:nvPicPr>
-          <p:cNvPr id="30" name="Image 6" descr="preencoded.png">    </p:cNvPr>
+          <p:cNvPr id="30" name="Image 6" descr="preencoded.png"/>
           <p:cNvPicPr>
             <a:picLocks noChangeAspect="1"/>
           </p:cNvPicPr>
           <p:nvPr/>
         </p:nvPicPr>
         <p:blipFill>
-          <a:blip r:embed="rId7"/>
+          <a:blip r:embed="rId9"/>
           <a:stretch>
             <a:fillRect/>
           </a:stretch>
@@ -11726,7 +12159,7 @@
           <a:bodyPr wrap="square" lIns="0" tIns="0" rIns="0" bIns="0" rtlCol="0" anchor="ctr"/>
           <a:lstStyle/>
           <a:p>
-            <a:pPr algn="ctr" indent="0" marL="0">
+            <a:pPr marL="0" indent="0" algn="ctr">
               <a:buNone/>
             </a:pPr>
             <a:r>
@@ -11762,7 +12195,7 @@
           <a:bodyPr wrap="square" lIns="0" tIns="0" rIns="0" bIns="0" rtlCol="0" anchor="t"/>
           <a:lstStyle/>
           <a:p>
-            <a:pPr algn="ctr" indent="0" marL="0">
+            <a:pPr marL="0" indent="0" algn="ctr">
               <a:buNone/>
             </a:pPr>
             <a:r>
@@ -11803,6 +12236,13 @@
             <a:prstDash val="solid"/>
           </a:ln>
         </p:spPr>
+        <p:txBody>
+          <a:bodyPr/>
+          <a:lstStyle/>
+          <a:p>
+            <a:endParaRPr lang="de-DE"/>
+          </a:p>
+        </p:txBody>
       </p:sp>
       <p:sp>
         <p:nvSpPr>
@@ -11825,7 +12265,7 @@
           <a:bodyPr wrap="square" lIns="0" tIns="0" rIns="0" bIns="0" rtlCol="0" anchor="ctr"/>
           <a:lstStyle/>
           <a:p>
-            <a:pPr algn="ctr" indent="0" marL="0">
+            <a:pPr marL="0" indent="0" algn="ctr">
               <a:buNone/>
             </a:pPr>
             <a:r>
@@ -11842,7 +12282,7 @@
       </p:sp>
       <p:sp>
         <p:nvSpPr>
-          <p:cNvPr id="25" name="Slide Number Placeholder 0"/>
+          <p:cNvPr id="35" name="Slide Number Placeholder 0"/>
           <p:cNvSpPr>
             <a:spLocks noGrp="1"/>
           </p:cNvSpPr>
@@ -11860,7 +12300,7 @@
           </a:prstGeom>
           <a:extLst>
             <a:ext uri="{C572A759-6A51-4108-AA02-DFA0A04FC94B}">
-              <ma14:wrappingTextBoxFlag xmlns:ma14="http://schemas.microsoft.com/office/mac/drawingml/2011/main" val="0"/>
+              <ma14:wrappingTextBoxFlag xmlns:ma14="http://schemas.microsoft.com/office/mac/drawingml/2011/main" xmlns="" val="0"/>
             </a:ext>
           </a:extLst>
         </p:spPr>
@@ -11878,7 +12318,7 @@
           <a:p>
             <a:pPr algn="r"/>
             <a:fld id="{F7021451-1387-4CA6-816F-3879F97B5CBC}" type="slidenum">
-              <a:rPr b="0" lang="en-US"/>
+              <a:rPr lang="en-US" b="0"/>
               <a:t>2</a:t>
             </a:fld>
             <a:endParaRPr lang="en-US"/>
@@ -11913,9 +12353,11 @@
       <p:sp>
         <p:nvSpPr>
           <p:cNvPr id="2" name="Text 0"/>
-          <p:cNvSpPr/>
+          <p:cNvSpPr>
+            <a:spLocks noGrp="1"/>
+          </p:cNvSpPr>
           <p:nvPr>
-            <p:ph idx="101" type="body" hasCustomPrompt="1"/>
+            <p:ph type="body" idx="101" hasCustomPrompt="1"/>
           </p:nvPr>
         </p:nvSpPr>
         <p:spPr>
@@ -11933,7 +12375,7 @@
           <a:bodyPr wrap="square" lIns="0" tIns="0" rIns="0" bIns="0" rtlCol="0" anchor="ctr"/>
           <a:lstStyle/>
           <a:p>
-            <a:pPr indent="0" marL="0">
+            <a:pPr marL="0" indent="0">
               <a:buNone/>
             </a:pPr>
             <a:r>
@@ -11951,9 +12393,11 @@
       <p:sp>
         <p:nvSpPr>
           <p:cNvPr id="3" name="Text 0"/>
-          <p:cNvSpPr/>
+          <p:cNvSpPr>
+            <a:spLocks noGrp="1"/>
+          </p:cNvSpPr>
           <p:nvPr>
-            <p:ph idx="102" type="title" hasCustomPrompt="1"/>
+            <p:ph type="title" idx="102" hasCustomPrompt="1"/>
           </p:nvPr>
         </p:nvSpPr>
         <p:spPr>
@@ -11971,7 +12415,7 @@
           <a:bodyPr wrap="square" lIns="0" tIns="0" rIns="0" bIns="0" rtlCol="0" anchor="ctr"/>
           <a:lstStyle/>
           <a:p>
-            <a:pPr algn="l" indent="0" marL="0">
+            <a:pPr marL="0" indent="0" algn="l">
               <a:buNone/>
             </a:pPr>
             <a:r>
@@ -12012,6 +12456,13 @@
             <a:prstDash val="solid"/>
           </a:ln>
         </p:spPr>
+        <p:txBody>
+          <a:bodyPr/>
+          <a:lstStyle/>
+          <a:p>
+            <a:endParaRPr lang="de-DE"/>
+          </a:p>
+        </p:txBody>
       </p:sp>
       <p:sp>
         <p:nvSpPr>
@@ -12037,17 +12488,24 @@
             <a:prstDash val="solid"/>
           </a:ln>
         </p:spPr>
+        <p:txBody>
+          <a:bodyPr/>
+          <a:lstStyle/>
+          <a:p>
+            <a:endParaRPr lang="de-DE"/>
+          </a:p>
+        </p:txBody>
       </p:sp>
       <p:pic>
         <p:nvPicPr>
-          <p:cNvPr id="6" name="Image 0" descr="preencoded.png">    </p:cNvPr>
+          <p:cNvPr id="6" name="Image 0" descr="preencoded.png"/>
           <p:cNvPicPr>
             <a:picLocks noChangeAspect="1"/>
           </p:cNvPicPr>
           <p:nvPr/>
         </p:nvPicPr>
         <p:blipFill>
-          <a:blip r:embed="rId1"/>
+          <a:blip r:embed="rId3"/>
           <a:stretch>
             <a:fillRect/>
           </a:stretch>
@@ -12083,7 +12541,7 @@
           <a:bodyPr wrap="square" lIns="0" tIns="0" rIns="0" bIns="0" rtlCol="0" anchor="ctr"/>
           <a:lstStyle/>
           <a:p>
-            <a:pPr algn="ctr" indent="0" marL="0">
+            <a:pPr marL="0" indent="0" algn="ctr">
               <a:buNone/>
             </a:pPr>
             <a:r>
@@ -12119,7 +12577,7 @@
           <a:bodyPr wrap="square" lIns="0" tIns="0" rIns="0" bIns="0" rtlCol="0" anchor="t"/>
           <a:lstStyle/>
           <a:p>
-            <a:pPr algn="ctr" indent="0" marL="0">
+            <a:pPr marL="0" indent="0" algn="ctr">
               <a:buNone/>
             </a:pPr>
             <a:r>
@@ -12160,6 +12618,13 @@
             <a:prstDash val="solid"/>
           </a:ln>
         </p:spPr>
+        <p:txBody>
+          <a:bodyPr/>
+          <a:lstStyle/>
+          <a:p>
+            <a:endParaRPr lang="de-DE"/>
+          </a:p>
+        </p:txBody>
       </p:sp>
       <p:sp>
         <p:nvSpPr>
@@ -12185,17 +12650,24 @@
             <a:prstDash val="solid"/>
           </a:ln>
         </p:spPr>
+        <p:txBody>
+          <a:bodyPr/>
+          <a:lstStyle/>
+          <a:p>
+            <a:endParaRPr lang="de-DE"/>
+          </a:p>
+        </p:txBody>
       </p:sp>
       <p:pic>
         <p:nvPicPr>
-          <p:cNvPr id="11" name="Image 1" descr="preencoded.png">    </p:cNvPr>
+          <p:cNvPr id="11" name="Image 1" descr="preencoded.png"/>
           <p:cNvPicPr>
             <a:picLocks noChangeAspect="1"/>
           </p:cNvPicPr>
           <p:nvPr/>
         </p:nvPicPr>
         <p:blipFill>
-          <a:blip r:embed="rId2"/>
+          <a:blip r:embed="rId4"/>
           <a:stretch>
             <a:fillRect/>
           </a:stretch>
@@ -12231,7 +12703,7 @@
           <a:bodyPr wrap="square" lIns="0" tIns="0" rIns="0" bIns="0" rtlCol="0" anchor="ctr"/>
           <a:lstStyle/>
           <a:p>
-            <a:pPr algn="ctr" indent="0" marL="0">
+            <a:pPr marL="0" indent="0" algn="ctr">
               <a:buNone/>
             </a:pPr>
             <a:r>
@@ -12267,7 +12739,7 @@
           <a:bodyPr wrap="square" lIns="0" tIns="0" rIns="0" bIns="0" rtlCol="0" anchor="t"/>
           <a:lstStyle/>
           <a:p>
-            <a:pPr algn="ctr" indent="0" marL="0">
+            <a:pPr marL="0" indent="0" algn="ctr">
               <a:buNone/>
             </a:pPr>
             <a:r>
@@ -12308,6 +12780,13 @@
             <a:prstDash val="solid"/>
           </a:ln>
         </p:spPr>
+        <p:txBody>
+          <a:bodyPr/>
+          <a:lstStyle/>
+          <a:p>
+            <a:endParaRPr lang="de-DE"/>
+          </a:p>
+        </p:txBody>
       </p:sp>
       <p:sp>
         <p:nvSpPr>
@@ -12333,17 +12812,24 @@
             <a:prstDash val="solid"/>
           </a:ln>
         </p:spPr>
+        <p:txBody>
+          <a:bodyPr/>
+          <a:lstStyle/>
+          <a:p>
+            <a:endParaRPr lang="de-DE"/>
+          </a:p>
+        </p:txBody>
       </p:sp>
       <p:pic>
         <p:nvPicPr>
-          <p:cNvPr id="16" name="Image 2" descr="preencoded.png">    </p:cNvPr>
+          <p:cNvPr id="16" name="Image 2" descr="preencoded.png"/>
           <p:cNvPicPr>
             <a:picLocks noChangeAspect="1"/>
           </p:cNvPicPr>
           <p:nvPr/>
         </p:nvPicPr>
         <p:blipFill>
-          <a:blip r:embed="rId3"/>
+          <a:blip r:embed="rId5"/>
           <a:stretch>
             <a:fillRect/>
           </a:stretch>
@@ -12379,7 +12865,7 @@
           <a:bodyPr wrap="square" lIns="0" tIns="0" rIns="0" bIns="0" rtlCol="0" anchor="ctr"/>
           <a:lstStyle/>
           <a:p>
-            <a:pPr algn="ctr" indent="0" marL="0">
+            <a:pPr marL="0" indent="0" algn="ctr">
               <a:buNone/>
             </a:pPr>
             <a:r>
@@ -12415,7 +12901,7 @@
           <a:bodyPr wrap="square" lIns="0" tIns="0" rIns="0" bIns="0" rtlCol="0" anchor="t"/>
           <a:lstStyle/>
           <a:p>
-            <a:pPr algn="ctr" indent="0" marL="0">
+            <a:pPr marL="0" indent="0" algn="ctr">
               <a:buNone/>
             </a:pPr>
             <a:r>
@@ -12456,6 +12942,13 @@
             <a:prstDash val="solid"/>
           </a:ln>
         </p:spPr>
+        <p:txBody>
+          <a:bodyPr/>
+          <a:lstStyle/>
+          <a:p>
+            <a:endParaRPr lang="de-DE"/>
+          </a:p>
+        </p:txBody>
       </p:sp>
       <p:sp>
         <p:nvSpPr>
@@ -12481,17 +12974,24 @@
             <a:prstDash val="solid"/>
           </a:ln>
         </p:spPr>
+        <p:txBody>
+          <a:bodyPr/>
+          <a:lstStyle/>
+          <a:p>
+            <a:endParaRPr lang="de-DE"/>
+          </a:p>
+        </p:txBody>
       </p:sp>
       <p:pic>
         <p:nvPicPr>
-          <p:cNvPr id="21" name="Image 3" descr="preencoded.png">    </p:cNvPr>
+          <p:cNvPr id="21" name="Image 3" descr="preencoded.png"/>
           <p:cNvPicPr>
             <a:picLocks noChangeAspect="1"/>
           </p:cNvPicPr>
           <p:nvPr/>
         </p:nvPicPr>
         <p:blipFill>
-          <a:blip r:embed="rId4"/>
+          <a:blip r:embed="rId6"/>
           <a:stretch>
             <a:fillRect/>
           </a:stretch>
@@ -12527,7 +13027,7 @@
           <a:bodyPr wrap="square" lIns="0" tIns="0" rIns="0" bIns="0" rtlCol="0" anchor="ctr"/>
           <a:lstStyle/>
           <a:p>
-            <a:pPr algn="ctr" indent="0" marL="0">
+            <a:pPr marL="0" indent="0" algn="ctr">
               <a:buNone/>
             </a:pPr>
             <a:r>
@@ -12563,7 +13063,7 @@
           <a:bodyPr wrap="square" lIns="0" tIns="0" rIns="0" bIns="0" rtlCol="0" anchor="t"/>
           <a:lstStyle/>
           <a:p>
-            <a:pPr algn="ctr" indent="0" marL="0">
+            <a:pPr marL="0" indent="0" algn="ctr">
               <a:buNone/>
             </a:pPr>
             <a:r>
@@ -12598,7 +13098,7 @@
           </a:prstGeom>
           <a:extLst>
             <a:ext uri="{C572A759-6A51-4108-AA02-DFA0A04FC94B}">
-              <ma14:wrappingTextBoxFlag xmlns:ma14="http://schemas.microsoft.com/office/mac/drawingml/2011/main" val="0"/>
+              <ma14:wrappingTextBoxFlag xmlns:ma14="http://schemas.microsoft.com/office/mac/drawingml/2011/main" xmlns="" val="0"/>
             </a:ext>
           </a:extLst>
         </p:spPr>
@@ -12616,7 +13116,7 @@
           <a:p>
             <a:pPr algn="r"/>
             <a:fld id="{F7021451-1387-4CA6-816F-3879F97B5CBC}" type="slidenum">
-              <a:rPr b="0" lang="en-US"/>
+              <a:rPr lang="en-US" b="0"/>
               <a:t>3</a:t>
             </a:fld>
             <a:endParaRPr lang="en-US"/>
@@ -12651,9 +13151,11 @@
       <p:sp>
         <p:nvSpPr>
           <p:cNvPr id="2" name="Text 0"/>
-          <p:cNvSpPr/>
+          <p:cNvSpPr>
+            <a:spLocks noGrp="1"/>
+          </p:cNvSpPr>
           <p:nvPr>
-            <p:ph idx="101" type="body" hasCustomPrompt="1"/>
+            <p:ph type="body" idx="101" hasCustomPrompt="1"/>
           </p:nvPr>
         </p:nvSpPr>
         <p:spPr>
@@ -12671,7 +13173,7 @@
           <a:bodyPr wrap="square" lIns="0" tIns="0" rIns="0" bIns="0" rtlCol="0" anchor="ctr"/>
           <a:lstStyle/>
           <a:p>
-            <a:pPr indent="0" marL="0">
+            <a:pPr marL="0" indent="0">
               <a:buNone/>
             </a:pPr>
             <a:r>
@@ -12689,9 +13191,11 @@
       <p:sp>
         <p:nvSpPr>
           <p:cNvPr id="3" name="Text 0"/>
-          <p:cNvSpPr/>
+          <p:cNvSpPr>
+            <a:spLocks noGrp="1"/>
+          </p:cNvSpPr>
           <p:nvPr>
-            <p:ph idx="102" type="title" hasCustomPrompt="1"/>
+            <p:ph type="title" idx="102" hasCustomPrompt="1"/>
           </p:nvPr>
         </p:nvSpPr>
         <p:spPr>
@@ -12709,7 +13213,7 @@
           <a:bodyPr wrap="square" lIns="0" tIns="0" rIns="0" bIns="0" rtlCol="0" anchor="ctr"/>
           <a:lstStyle/>
           <a:p>
-            <a:pPr algn="l" indent="0" marL="0">
+            <a:pPr marL="0" indent="0" algn="l">
               <a:buNone/>
             </a:pPr>
             <a:r>
@@ -12748,17 +13252,24 @@
             <a:prstDash val="solid"/>
           </a:ln>
         </p:spPr>
+        <p:txBody>
+          <a:bodyPr/>
+          <a:lstStyle/>
+          <a:p>
+            <a:endParaRPr lang="de-DE"/>
+          </a:p>
+        </p:txBody>
       </p:sp>
       <p:pic>
         <p:nvPicPr>
-          <p:cNvPr id="5" name="Image 0" descr="preencoded.png">    </p:cNvPr>
+          <p:cNvPr id="5" name="Image 0" descr="preencoded.png"/>
           <p:cNvPicPr>
             <a:picLocks noChangeAspect="1"/>
           </p:cNvPicPr>
           <p:nvPr/>
         </p:nvPicPr>
         <p:blipFill>
-          <a:blip r:embed="rId1"/>
+          <a:blip r:embed="rId3"/>
           <a:stretch>
             <a:fillRect/>
           </a:stretch>
@@ -12794,7 +13305,7 @@
           <a:bodyPr wrap="square" lIns="0" tIns="0" rIns="0" bIns="0" rtlCol="0" anchor="ctr"/>
           <a:lstStyle/>
           <a:p>
-            <a:pPr indent="0" marL="0">
+            <a:pPr marL="0" indent="0">
               <a:buNone/>
             </a:pPr>
             <a:r>
@@ -12830,7 +13341,7 @@
           <a:bodyPr wrap="square" lIns="0" tIns="0" rIns="0" bIns="0" rtlCol="0" anchor="ctr"/>
           <a:lstStyle/>
           <a:p>
-            <a:pPr indent="0" marL="0">
+            <a:pPr marL="0" indent="0">
               <a:buNone/>
             </a:pPr>
             <a:r>
@@ -12869,17 +13380,24 @@
             <a:prstDash val="solid"/>
           </a:ln>
         </p:spPr>
+        <p:txBody>
+          <a:bodyPr/>
+          <a:lstStyle/>
+          <a:p>
+            <a:endParaRPr lang="de-DE"/>
+          </a:p>
+        </p:txBody>
       </p:sp>
       <p:pic>
         <p:nvPicPr>
-          <p:cNvPr id="9" name="Image 1" descr="preencoded.png">    </p:cNvPr>
+          <p:cNvPr id="9" name="Image 1" descr="preencoded.png"/>
           <p:cNvPicPr>
             <a:picLocks noChangeAspect="1"/>
           </p:cNvPicPr>
           <p:nvPr/>
         </p:nvPicPr>
         <p:blipFill>
-          <a:blip r:embed="rId2"/>
+          <a:blip r:embed="rId4"/>
           <a:stretch>
             <a:fillRect/>
           </a:stretch>
@@ -12915,7 +13433,7 @@
           <a:bodyPr wrap="square" lIns="0" tIns="0" rIns="0" bIns="0" rtlCol="0" anchor="ctr"/>
           <a:lstStyle/>
           <a:p>
-            <a:pPr indent="0" marL="0">
+            <a:pPr marL="0" indent="0">
               <a:buNone/>
             </a:pPr>
             <a:r>
@@ -12951,7 +13469,7 @@
           <a:bodyPr wrap="square" lIns="0" tIns="0" rIns="0" bIns="0" rtlCol="0" anchor="ctr"/>
           <a:lstStyle/>
           <a:p>
-            <a:pPr indent="0" marL="0">
+            <a:pPr marL="0" indent="0">
               <a:buNone/>
             </a:pPr>
             <a:r>
@@ -12990,17 +13508,24 @@
             <a:prstDash val="solid"/>
           </a:ln>
         </p:spPr>
+        <p:txBody>
+          <a:bodyPr/>
+          <a:lstStyle/>
+          <a:p>
+            <a:endParaRPr lang="de-DE"/>
+          </a:p>
+        </p:txBody>
       </p:sp>
       <p:pic>
         <p:nvPicPr>
-          <p:cNvPr id="13" name="Image 2" descr="preencoded.png">    </p:cNvPr>
+          <p:cNvPr id="13" name="Image 2" descr="preencoded.png"/>
           <p:cNvPicPr>
             <a:picLocks noChangeAspect="1"/>
           </p:cNvPicPr>
           <p:nvPr/>
         </p:nvPicPr>
         <p:blipFill>
-          <a:blip r:embed="rId3"/>
+          <a:blip r:embed="rId5"/>
           <a:stretch>
             <a:fillRect/>
           </a:stretch>
@@ -13036,7 +13561,7 @@
           <a:bodyPr wrap="square" lIns="0" tIns="0" rIns="0" bIns="0" rtlCol="0" anchor="ctr"/>
           <a:lstStyle/>
           <a:p>
-            <a:pPr indent="0" marL="0">
+            <a:pPr marL="0" indent="0">
               <a:buNone/>
             </a:pPr>
             <a:r>
@@ -13072,7 +13597,7 @@
           <a:bodyPr wrap="square" lIns="0" tIns="0" rIns="0" bIns="0" rtlCol="0" anchor="ctr"/>
           <a:lstStyle/>
           <a:p>
-            <a:pPr indent="0" marL="0">
+            <a:pPr marL="0" indent="0">
               <a:buNone/>
             </a:pPr>
             <a:r>
@@ -13113,6 +13638,13 @@
             <a:prstDash val="solid"/>
           </a:ln>
         </p:spPr>
+        <p:txBody>
+          <a:bodyPr/>
+          <a:lstStyle/>
+          <a:p>
+            <a:endParaRPr lang="de-DE"/>
+          </a:p>
+        </p:txBody>
       </p:sp>
       <p:sp>
         <p:nvSpPr>
@@ -13135,7 +13667,7 @@
           <a:bodyPr wrap="square" lIns="0" tIns="0" rIns="0" bIns="0" rtlCol="0" anchor="ctr"/>
           <a:lstStyle/>
           <a:p>
-            <a:pPr indent="0" marL="0">
+            <a:pPr marL="0" indent="0">
               <a:buNone/>
             </a:pPr>
             <a:r>
@@ -13174,6 +13706,13 @@
             <a:prstDash val="solid"/>
           </a:ln>
         </p:spPr>
+        <p:txBody>
+          <a:bodyPr/>
+          <a:lstStyle/>
+          <a:p>
+            <a:endParaRPr lang="de-DE"/>
+          </a:p>
+        </p:txBody>
       </p:sp>
       <p:sp>
         <p:nvSpPr>
@@ -13196,7 +13735,7 @@
           <a:bodyPr wrap="square" lIns="0" tIns="0" rIns="0" bIns="0" rtlCol="0" anchor="ctr"/>
           <a:lstStyle/>
           <a:p>
-            <a:pPr algn="ctr" indent="0" marL="0">
+            <a:pPr marL="0" indent="0" algn="ctr">
               <a:buNone/>
             </a:pPr>
             <a:r>
@@ -13232,7 +13771,7 @@
           <a:bodyPr wrap="square" lIns="0" tIns="0" rIns="0" bIns="0" rtlCol="0" anchor="ctr"/>
           <a:lstStyle/>
           <a:p>
-            <a:pPr algn="ctr" indent="0" marL="0">
+            <a:pPr marL="0" indent="0" algn="ctr">
               <a:buNone/>
             </a:pPr>
             <a:r>
@@ -13271,6 +13810,13 @@
             <a:prstDash val="solid"/>
           </a:ln>
         </p:spPr>
+        <p:txBody>
+          <a:bodyPr/>
+          <a:lstStyle/>
+          <a:p>
+            <a:endParaRPr lang="de-DE"/>
+          </a:p>
+        </p:txBody>
       </p:sp>
       <p:sp>
         <p:nvSpPr>
@@ -13293,7 +13839,7 @@
           <a:bodyPr wrap="square" lIns="0" tIns="0" rIns="0" bIns="0" rtlCol="0" anchor="ctr"/>
           <a:lstStyle/>
           <a:p>
-            <a:pPr algn="ctr" indent="0" marL="0">
+            <a:pPr marL="0" indent="0" algn="ctr">
               <a:buNone/>
             </a:pPr>
             <a:r>
@@ -13329,7 +13875,7 @@
           <a:bodyPr wrap="square" lIns="0" tIns="0" rIns="0" bIns="0" rtlCol="0" anchor="ctr"/>
           <a:lstStyle/>
           <a:p>
-            <a:pPr algn="ctr" indent="0" marL="0">
+            <a:pPr marL="0" indent="0" algn="ctr">
               <a:buNone/>
             </a:pPr>
             <a:r>
@@ -13368,6 +13914,13 @@
             <a:prstDash val="solid"/>
           </a:ln>
         </p:spPr>
+        <p:txBody>
+          <a:bodyPr/>
+          <a:lstStyle/>
+          <a:p>
+            <a:endParaRPr lang="de-DE"/>
+          </a:p>
+        </p:txBody>
       </p:sp>
       <p:sp>
         <p:nvSpPr>
@@ -13390,7 +13943,7 @@
           <a:bodyPr wrap="square" lIns="0" tIns="0" rIns="0" bIns="0" rtlCol="0" anchor="ctr"/>
           <a:lstStyle/>
           <a:p>
-            <a:pPr algn="ctr" indent="0" marL="0">
+            <a:pPr marL="0" indent="0" algn="ctr">
               <a:buNone/>
             </a:pPr>
             <a:r>
@@ -13426,7 +13979,7 @@
           <a:bodyPr wrap="square" lIns="0" tIns="0" rIns="0" bIns="0" rtlCol="0" anchor="ctr"/>
           <a:lstStyle/>
           <a:p>
-            <a:pPr algn="ctr" indent="0" marL="0">
+            <a:pPr marL="0" indent="0" algn="ctr">
               <a:buNone/>
             </a:pPr>
             <a:r>
@@ -13465,6 +14018,13 @@
             <a:prstDash val="solid"/>
           </a:ln>
         </p:spPr>
+        <p:txBody>
+          <a:bodyPr/>
+          <a:lstStyle/>
+          <a:p>
+            <a:endParaRPr lang="de-DE"/>
+          </a:p>
+        </p:txBody>
       </p:sp>
       <p:sp>
         <p:nvSpPr>
@@ -13487,7 +14047,7 @@
           <a:bodyPr wrap="square" lIns="0" tIns="0" rIns="0" bIns="0" rtlCol="0" anchor="ctr"/>
           <a:lstStyle/>
           <a:p>
-            <a:pPr algn="ctr" indent="0" marL="0">
+            <a:pPr marL="0" indent="0" algn="ctr">
               <a:buNone/>
             </a:pPr>
             <a:r>
@@ -13523,7 +14083,7 @@
           <a:bodyPr wrap="square" lIns="0" tIns="0" rIns="0" bIns="0" rtlCol="0" anchor="ctr"/>
           <a:lstStyle/>
           <a:p>
-            <a:pPr algn="ctr" indent="0" marL="0">
+            <a:pPr marL="0" indent="0" algn="ctr">
               <a:buNone/>
             </a:pPr>
             <a:r>
@@ -13562,6 +14122,13 @@
             <a:prstDash val="solid"/>
           </a:ln>
         </p:spPr>
+        <p:txBody>
+          <a:bodyPr/>
+          <a:lstStyle/>
+          <a:p>
+            <a:endParaRPr lang="de-DE"/>
+          </a:p>
+        </p:txBody>
       </p:sp>
       <p:sp>
         <p:nvSpPr>
@@ -13584,7 +14151,7 @@
           <a:bodyPr wrap="square" lIns="0" tIns="0" rIns="0" bIns="0" rtlCol="0" anchor="ctr"/>
           <a:lstStyle/>
           <a:p>
-            <a:pPr algn="ctr" indent="0" marL="0">
+            <a:pPr marL="0" indent="0" algn="ctr">
               <a:buNone/>
             </a:pPr>
             <a:r>
@@ -13620,7 +14187,7 @@
           <a:bodyPr wrap="square" lIns="0" tIns="0" rIns="0" bIns="0" rtlCol="0" anchor="ctr"/>
           <a:lstStyle/>
           <a:p>
-            <a:pPr algn="ctr" indent="0" marL="0">
+            <a:pPr marL="0" indent="0" algn="ctr">
               <a:buNone/>
             </a:pPr>
             <a:r>
@@ -13659,6 +14226,13 @@
             <a:prstDash val="solid"/>
           </a:ln>
         </p:spPr>
+        <p:txBody>
+          <a:bodyPr/>
+          <a:lstStyle/>
+          <a:p>
+            <a:endParaRPr lang="de-DE"/>
+          </a:p>
+        </p:txBody>
       </p:sp>
       <p:sp>
         <p:nvSpPr>
@@ -13681,7 +14255,7 @@
           <a:bodyPr wrap="square" lIns="0" tIns="0" rIns="0" bIns="0" rtlCol="0" anchor="ctr"/>
           <a:lstStyle/>
           <a:p>
-            <a:pPr algn="ctr" indent="0" marL="0">
+            <a:pPr marL="0" indent="0" algn="ctr">
               <a:buNone/>
             </a:pPr>
             <a:r>
@@ -13717,7 +14291,7 @@
           <a:bodyPr wrap="square" lIns="0" tIns="0" rIns="0" bIns="0" rtlCol="0" anchor="ctr"/>
           <a:lstStyle/>
           <a:p>
-            <a:pPr algn="ctr" indent="0" marL="0">
+            <a:pPr marL="0" indent="0" algn="ctr">
               <a:buNone/>
             </a:pPr>
             <a:r>
@@ -13734,7 +14308,7 @@
       </p:sp>
       <p:sp>
         <p:nvSpPr>
-          <p:cNvPr id="25" name="Slide Number Placeholder 0"/>
+          <p:cNvPr id="36" name="Slide Number Placeholder 0"/>
           <p:cNvSpPr>
             <a:spLocks noGrp="1"/>
           </p:cNvSpPr>
@@ -13752,7 +14326,7 @@
           </a:prstGeom>
           <a:extLst>
             <a:ext uri="{C572A759-6A51-4108-AA02-DFA0A04FC94B}">
-              <ma14:wrappingTextBoxFlag xmlns:ma14="http://schemas.microsoft.com/office/mac/drawingml/2011/main" val="0"/>
+              <ma14:wrappingTextBoxFlag xmlns:ma14="http://schemas.microsoft.com/office/mac/drawingml/2011/main" xmlns="" val="0"/>
             </a:ext>
           </a:extLst>
         </p:spPr>
@@ -13770,7 +14344,7 @@
           <a:p>
             <a:pPr algn="r"/>
             <a:fld id="{F7021451-1387-4CA6-816F-3879F97B5CBC}" type="slidenum">
-              <a:rPr b="0" lang="en-US"/>
+              <a:rPr lang="en-US" b="0"/>
               <a:t>4</a:t>
             </a:fld>
             <a:endParaRPr lang="en-US"/>
@@ -13805,9 +14379,11 @@
       <p:sp>
         <p:nvSpPr>
           <p:cNvPr id="2" name="Text 0"/>
-          <p:cNvSpPr/>
+          <p:cNvSpPr>
+            <a:spLocks noGrp="1"/>
+          </p:cNvSpPr>
           <p:nvPr>
-            <p:ph idx="101" type="body" hasCustomPrompt="1"/>
+            <p:ph type="body" idx="101" hasCustomPrompt="1"/>
           </p:nvPr>
         </p:nvSpPr>
         <p:spPr>
@@ -13825,7 +14401,7 @@
           <a:bodyPr wrap="square" lIns="0" tIns="0" rIns="0" bIns="0" rtlCol="0" anchor="ctr"/>
           <a:lstStyle/>
           <a:p>
-            <a:pPr indent="0" marL="0">
+            <a:pPr marL="0" indent="0">
               <a:buNone/>
             </a:pPr>
             <a:r>
@@ -13843,9 +14419,11 @@
       <p:sp>
         <p:nvSpPr>
           <p:cNvPr id="3" name="Text 0"/>
-          <p:cNvSpPr/>
+          <p:cNvSpPr>
+            <a:spLocks noGrp="1"/>
+          </p:cNvSpPr>
           <p:nvPr>
-            <p:ph idx="102" type="title" hasCustomPrompt="1"/>
+            <p:ph type="title" idx="102" hasCustomPrompt="1"/>
           </p:nvPr>
         </p:nvSpPr>
         <p:spPr>
@@ -13863,7 +14441,7 @@
           <a:bodyPr wrap="square" lIns="0" tIns="0" rIns="0" bIns="0" rtlCol="0" anchor="ctr"/>
           <a:lstStyle/>
           <a:p>
-            <a:pPr algn="l" indent="0" marL="0">
+            <a:pPr marL="0" indent="0" algn="l">
               <a:buNone/>
             </a:pPr>
             <a:r>
@@ -13904,6 +14482,13 @@
             <a:prstDash val="solid"/>
           </a:ln>
         </p:spPr>
+        <p:txBody>
+          <a:bodyPr/>
+          <a:lstStyle/>
+          <a:p>
+            <a:endParaRPr lang="de-DE"/>
+          </a:p>
+        </p:txBody>
       </p:sp>
       <p:sp>
         <p:nvSpPr>
@@ -13929,17 +14514,24 @@
             <a:prstDash val="solid"/>
           </a:ln>
         </p:spPr>
+        <p:txBody>
+          <a:bodyPr/>
+          <a:lstStyle/>
+          <a:p>
+            <a:endParaRPr lang="de-DE"/>
+          </a:p>
+        </p:txBody>
       </p:sp>
       <p:pic>
         <p:nvPicPr>
-          <p:cNvPr id="6" name="Image 0" descr="preencoded.png">    </p:cNvPr>
+          <p:cNvPr id="6" name="Image 0" descr="preencoded.png"/>
           <p:cNvPicPr>
             <a:picLocks noChangeAspect="1"/>
           </p:cNvPicPr>
           <p:nvPr/>
         </p:nvPicPr>
         <p:blipFill>
-          <a:blip r:embed="rId1"/>
+          <a:blip r:embed="rId3"/>
           <a:stretch>
             <a:fillRect/>
           </a:stretch>
@@ -13975,7 +14567,7 @@
           <a:bodyPr wrap="square" lIns="0" tIns="0" rIns="0" bIns="0" rtlCol="0" anchor="ctr"/>
           <a:lstStyle/>
           <a:p>
-            <a:pPr indent="0" marL="0">
+            <a:pPr marL="0" indent="0">
               <a:buNone/>
             </a:pPr>
             <a:r>
@@ -14128,6 +14720,13 @@
             <a:prstDash val="solid"/>
           </a:ln>
         </p:spPr>
+        <p:txBody>
+          <a:bodyPr/>
+          <a:lstStyle/>
+          <a:p>
+            <a:endParaRPr lang="de-DE"/>
+          </a:p>
+        </p:txBody>
       </p:sp>
       <p:sp>
         <p:nvSpPr>
@@ -14153,17 +14752,24 @@
             <a:prstDash val="solid"/>
           </a:ln>
         </p:spPr>
+        <p:txBody>
+          <a:bodyPr/>
+          <a:lstStyle/>
+          <a:p>
+            <a:endParaRPr lang="de-DE"/>
+          </a:p>
+        </p:txBody>
       </p:sp>
       <p:pic>
         <p:nvPicPr>
-          <p:cNvPr id="11" name="Image 1" descr="preencoded.png">    </p:cNvPr>
+          <p:cNvPr id="11" name="Image 1" descr="preencoded.png"/>
           <p:cNvPicPr>
             <a:picLocks noChangeAspect="1"/>
           </p:cNvPicPr>
           <p:nvPr/>
         </p:nvPicPr>
         <p:blipFill>
-          <a:blip r:embed="rId2"/>
+          <a:blip r:embed="rId4"/>
           <a:stretch>
             <a:fillRect/>
           </a:stretch>
@@ -14199,7 +14805,7 @@
           <a:bodyPr wrap="square" lIns="0" tIns="0" rIns="0" bIns="0" rtlCol="0" anchor="ctr"/>
           <a:lstStyle/>
           <a:p>
-            <a:pPr indent="0" marL="0">
+            <a:pPr marL="0" indent="0">
               <a:buNone/>
             </a:pPr>
             <a:r>
@@ -14352,6 +14958,13 @@
             <a:prstDash val="solid"/>
           </a:ln>
         </p:spPr>
+        <p:txBody>
+          <a:bodyPr/>
+          <a:lstStyle/>
+          <a:p>
+            <a:endParaRPr lang="de-DE"/>
+          </a:p>
+        </p:txBody>
       </p:sp>
       <p:sp>
         <p:nvSpPr>
@@ -14374,7 +14987,7 @@
           <a:bodyPr wrap="square" lIns="0" tIns="0" rIns="0" bIns="0" rtlCol="0" anchor="ctr"/>
           <a:lstStyle/>
           <a:p>
-            <a:pPr algn="ctr" indent="0" marL="0">
+            <a:pPr marL="0" indent="0" algn="ctr">
               <a:buNone/>
             </a:pPr>
             <a:r>
@@ -14385,9 +14998,6 @@
               </a:rPr>
               <a:t>Automatisch:  </a:t>
             </a:r>
-            <a:pPr algn="ctr" indent="0" marL="0">
-              <a:buNone/>
-            </a:pPr>
             <a:r>
               <a:rPr lang="en-US" sz="1800" dirty="0">
                 <a:solidFill>
@@ -14420,7 +15030,7 @@
           </a:prstGeom>
           <a:extLst>
             <a:ext uri="{C572A759-6A51-4108-AA02-DFA0A04FC94B}">
-              <ma14:wrappingTextBoxFlag xmlns:ma14="http://schemas.microsoft.com/office/mac/drawingml/2011/main" val="0"/>
+              <ma14:wrappingTextBoxFlag xmlns:ma14="http://schemas.microsoft.com/office/mac/drawingml/2011/main" xmlns="" val="0"/>
             </a:ext>
           </a:extLst>
         </p:spPr>
@@ -14438,7 +15048,7 @@
           <a:p>
             <a:pPr algn="r"/>
             <a:fld id="{F7021451-1387-4CA6-816F-3879F97B5CBC}" type="slidenum">
-              <a:rPr b="0" lang="en-US"/>
+              <a:rPr lang="en-US" b="0"/>
               <a:t>5</a:t>
             </a:fld>
             <a:endParaRPr lang="en-US"/>
@@ -14473,9 +15083,11 @@
       <p:sp>
         <p:nvSpPr>
           <p:cNvPr id="2" name="Text 0"/>
-          <p:cNvSpPr/>
+          <p:cNvSpPr>
+            <a:spLocks noGrp="1"/>
+          </p:cNvSpPr>
           <p:nvPr>
-            <p:ph idx="101" type="body" hasCustomPrompt="1"/>
+            <p:ph type="body" idx="101" hasCustomPrompt="1"/>
           </p:nvPr>
         </p:nvSpPr>
         <p:spPr>
@@ -14493,7 +15105,7 @@
           <a:bodyPr wrap="square" lIns="0" tIns="0" rIns="0" bIns="0" rtlCol="0" anchor="ctr"/>
           <a:lstStyle/>
           <a:p>
-            <a:pPr indent="0" marL="0">
+            <a:pPr marL="0" indent="0">
               <a:buNone/>
             </a:pPr>
             <a:r>
@@ -14511,9 +15123,11 @@
       <p:sp>
         <p:nvSpPr>
           <p:cNvPr id="3" name="Text 0"/>
-          <p:cNvSpPr/>
+          <p:cNvSpPr>
+            <a:spLocks noGrp="1"/>
+          </p:cNvSpPr>
           <p:nvPr>
-            <p:ph idx="102" type="title" hasCustomPrompt="1"/>
+            <p:ph type="title" idx="102" hasCustomPrompt="1"/>
           </p:nvPr>
         </p:nvSpPr>
         <p:spPr>
@@ -14531,7 +15145,7 @@
           <a:bodyPr wrap="square" lIns="0" tIns="0" rIns="0" bIns="0" rtlCol="0" anchor="ctr"/>
           <a:lstStyle/>
           <a:p>
-            <a:pPr algn="l" indent="0" marL="0">
+            <a:pPr marL="0" indent="0" algn="l">
               <a:buNone/>
             </a:pPr>
             <a:r>
@@ -14572,6 +15186,13 @@
             <a:prstDash val="solid"/>
           </a:ln>
         </p:spPr>
+        <p:txBody>
+          <a:bodyPr/>
+          <a:lstStyle/>
+          <a:p>
+            <a:endParaRPr lang="de-DE"/>
+          </a:p>
+        </p:txBody>
       </p:sp>
       <p:sp>
         <p:nvSpPr>
@@ -14594,7 +15215,7 @@
           <a:bodyPr wrap="square" lIns="0" tIns="0" rIns="0" bIns="0" rtlCol="0" anchor="ctr"/>
           <a:lstStyle/>
           <a:p>
-            <a:pPr algn="ctr" indent="0" marL="0">
+            <a:pPr marL="0" indent="0" algn="ctr">
               <a:buNone/>
             </a:pPr>
             <a:r>
@@ -14630,7 +15251,7 @@
           <a:bodyPr wrap="square" lIns="0" tIns="0" rIns="0" bIns="0" rtlCol="0" anchor="t"/>
           <a:lstStyle/>
           <a:p>
-            <a:pPr algn="ctr" indent="0" marL="0">
+            <a:pPr marL="0" indent="0" algn="ctr">
               <a:buNone/>
             </a:pPr>
             <a:r>
@@ -14671,6 +15292,13 @@
             <a:prstDash val="solid"/>
           </a:ln>
         </p:spPr>
+        <p:txBody>
+          <a:bodyPr/>
+          <a:lstStyle/>
+          <a:p>
+            <a:endParaRPr lang="de-DE"/>
+          </a:p>
+        </p:txBody>
       </p:sp>
       <p:sp>
         <p:nvSpPr>
@@ -14693,7 +15321,7 @@
           <a:bodyPr wrap="square" lIns="0" tIns="0" rIns="0" bIns="0" rtlCol="0" anchor="ctr"/>
           <a:lstStyle/>
           <a:p>
-            <a:pPr algn="ctr" indent="0" marL="0">
+            <a:pPr marL="0" indent="0" algn="ctr">
               <a:buNone/>
             </a:pPr>
             <a:r>
@@ -14729,7 +15357,7 @@
           <a:bodyPr wrap="square" lIns="0" tIns="0" rIns="0" bIns="0" rtlCol="0" anchor="t"/>
           <a:lstStyle/>
           <a:p>
-            <a:pPr algn="ctr" indent="0" marL="0">
+            <a:pPr marL="0" indent="0" algn="ctr">
               <a:buNone/>
             </a:pPr>
             <a:r>
@@ -14770,6 +15398,13 @@
             <a:prstDash val="solid"/>
           </a:ln>
         </p:spPr>
+        <p:txBody>
+          <a:bodyPr/>
+          <a:lstStyle/>
+          <a:p>
+            <a:endParaRPr lang="de-DE"/>
+          </a:p>
+        </p:txBody>
       </p:sp>
       <p:sp>
         <p:nvSpPr>
@@ -14792,7 +15427,7 @@
           <a:bodyPr wrap="square" lIns="0" tIns="0" rIns="0" bIns="0" rtlCol="0" anchor="ctr"/>
           <a:lstStyle/>
           <a:p>
-            <a:pPr algn="ctr" indent="0" marL="0">
+            <a:pPr marL="0" indent="0" algn="ctr">
               <a:buNone/>
             </a:pPr>
             <a:r>
@@ -14828,7 +15463,7 @@
           <a:bodyPr wrap="square" lIns="0" tIns="0" rIns="0" bIns="0" rtlCol="0" anchor="t"/>
           <a:lstStyle/>
           <a:p>
-            <a:pPr algn="ctr" indent="0" marL="0">
+            <a:pPr marL="0" indent="0" algn="ctr">
               <a:buNone/>
             </a:pPr>
             <a:r>
@@ -14869,6 +15504,13 @@
             <a:prstDash val="solid"/>
           </a:ln>
         </p:spPr>
+        <p:txBody>
+          <a:bodyPr/>
+          <a:lstStyle/>
+          <a:p>
+            <a:endParaRPr lang="de-DE"/>
+          </a:p>
+        </p:txBody>
       </p:sp>
       <p:sp>
         <p:nvSpPr>
@@ -14894,17 +15536,24 @@
             <a:prstDash val="solid"/>
           </a:ln>
         </p:spPr>
+        <p:txBody>
+          <a:bodyPr/>
+          <a:lstStyle/>
+          <a:p>
+            <a:endParaRPr lang="de-DE"/>
+          </a:p>
+        </p:txBody>
       </p:sp>
       <p:pic>
         <p:nvPicPr>
-          <p:cNvPr id="15" name="Image 0" descr="preencoded.png">    </p:cNvPr>
+          <p:cNvPr id="15" name="Image 0" descr="preencoded.png"/>
           <p:cNvPicPr>
             <a:picLocks noChangeAspect="1"/>
           </p:cNvPicPr>
           <p:nvPr/>
         </p:nvPicPr>
         <p:blipFill>
-          <a:blip r:embed="rId1"/>
+          <a:blip r:embed="rId3"/>
           <a:stretch>
             <a:fillRect/>
           </a:stretch>
@@ -14940,7 +15589,7 @@
           <a:bodyPr wrap="square" lIns="0" tIns="0" rIns="0" bIns="0" rtlCol="0" anchor="ctr"/>
           <a:lstStyle/>
           <a:p>
-            <a:pPr indent="0" marL="0">
+            <a:pPr marL="0" indent="0">
               <a:buNone/>
             </a:pPr>
             <a:r>
@@ -14951,9 +15600,6 @@
               </a:rPr>
               <a:t>Unser Fokus: </a:t>
             </a:r>
-            <a:pPr indent="0" marL="0">
-              <a:buNone/>
-            </a:pPr>
             <a:r>
               <a:rPr lang="en-US" sz="2200" dirty="0">
                 <a:solidFill>
@@ -14986,7 +15632,7 @@
           </a:prstGeom>
           <a:extLst>
             <a:ext uri="{C572A759-6A51-4108-AA02-DFA0A04FC94B}">
-              <ma14:wrappingTextBoxFlag xmlns:ma14="http://schemas.microsoft.com/office/mac/drawingml/2011/main" val="0"/>
+              <ma14:wrappingTextBoxFlag xmlns:ma14="http://schemas.microsoft.com/office/mac/drawingml/2011/main" xmlns="" val="0"/>
             </a:ext>
           </a:extLst>
         </p:spPr>
@@ -15004,7 +15650,7 @@
           <a:p>
             <a:pPr algn="r"/>
             <a:fld id="{F7021451-1387-4CA6-816F-3879F97B5CBC}" type="slidenum">
-              <a:rPr b="0" lang="en-US"/>
+              <a:rPr lang="en-US" b="0"/>
               <a:t>6</a:t>
             </a:fld>
             <a:endParaRPr lang="en-US"/>
@@ -15039,9 +15685,11 @@
       <p:sp>
         <p:nvSpPr>
           <p:cNvPr id="2" name="Text 0"/>
-          <p:cNvSpPr/>
+          <p:cNvSpPr>
+            <a:spLocks noGrp="1"/>
+          </p:cNvSpPr>
           <p:nvPr>
-            <p:ph idx="101" type="body" hasCustomPrompt="1"/>
+            <p:ph type="body" idx="101" hasCustomPrompt="1"/>
           </p:nvPr>
         </p:nvSpPr>
         <p:spPr>
@@ -15059,7 +15707,7 @@
           <a:bodyPr wrap="square" lIns="0" tIns="0" rIns="0" bIns="0" rtlCol="0" anchor="ctr"/>
           <a:lstStyle/>
           <a:p>
-            <a:pPr indent="0" marL="0">
+            <a:pPr marL="0" indent="0">
               <a:buNone/>
             </a:pPr>
             <a:r>
@@ -15077,9 +15725,11 @@
       <p:sp>
         <p:nvSpPr>
           <p:cNvPr id="3" name="Text 0"/>
-          <p:cNvSpPr/>
+          <p:cNvSpPr>
+            <a:spLocks noGrp="1"/>
+          </p:cNvSpPr>
           <p:nvPr>
-            <p:ph idx="102" type="title" hasCustomPrompt="1"/>
+            <p:ph type="title" idx="102" hasCustomPrompt="1"/>
           </p:nvPr>
         </p:nvSpPr>
         <p:spPr>
@@ -15097,7 +15747,7 @@
           <a:bodyPr wrap="square" lIns="0" tIns="0" rIns="0" bIns="0" rtlCol="0" anchor="ctr"/>
           <a:lstStyle/>
           <a:p>
-            <a:pPr algn="l" indent="0" marL="0">
+            <a:pPr marL="0" indent="0" algn="l">
               <a:buNone/>
             </a:pPr>
             <a:r>
@@ -15133,7 +15783,7 @@
           <a:bodyPr wrap="square" lIns="0" tIns="0" rIns="0" bIns="0" rtlCol="0" anchor="ctr"/>
           <a:lstStyle/>
           <a:p>
-            <a:pPr indent="0" marL="0">
+            <a:pPr marL="0" indent="0">
               <a:buNone/>
             </a:pPr>
             <a:r>
@@ -15172,17 +15822,24 @@
             <a:prstDash val="solid"/>
           </a:ln>
         </p:spPr>
+        <p:txBody>
+          <a:bodyPr/>
+          <a:lstStyle/>
+          <a:p>
+            <a:endParaRPr lang="de-DE"/>
+          </a:p>
+        </p:txBody>
       </p:sp>
       <p:pic>
         <p:nvPicPr>
-          <p:cNvPr id="6" name="Image 0" descr="preencoded.png">    </p:cNvPr>
+          <p:cNvPr id="6" name="Image 0" descr="preencoded.png"/>
           <p:cNvPicPr>
             <a:picLocks noChangeAspect="1"/>
           </p:cNvPicPr>
           <p:nvPr/>
         </p:nvPicPr>
         <p:blipFill>
-          <a:blip r:embed="rId1"/>
+          <a:blip r:embed="rId3"/>
           <a:stretch>
             <a:fillRect/>
           </a:stretch>
@@ -15218,7 +15875,7 @@
           <a:bodyPr wrap="square" lIns="0" tIns="0" rIns="0" bIns="0" rtlCol="0" anchor="ctr"/>
           <a:lstStyle/>
           <a:p>
-            <a:pPr indent="0" marL="0">
+            <a:pPr marL="0" indent="0">
               <a:buNone/>
             </a:pPr>
             <a:r>
@@ -15257,17 +15914,24 @@
             <a:prstDash val="solid"/>
           </a:ln>
         </p:spPr>
+        <p:txBody>
+          <a:bodyPr/>
+          <a:lstStyle/>
+          <a:p>
+            <a:endParaRPr lang="de-DE"/>
+          </a:p>
+        </p:txBody>
       </p:sp>
       <p:pic>
         <p:nvPicPr>
-          <p:cNvPr id="9" name="Image 1" descr="preencoded.png">    </p:cNvPr>
+          <p:cNvPr id="9" name="Image 1" descr="preencoded.png"/>
           <p:cNvPicPr>
             <a:picLocks noChangeAspect="1"/>
           </p:cNvPicPr>
           <p:nvPr/>
         </p:nvPicPr>
         <p:blipFill>
-          <a:blip r:embed="rId2"/>
+          <a:blip r:embed="rId4"/>
           <a:stretch>
             <a:fillRect/>
           </a:stretch>
@@ -15303,7 +15967,7 @@
           <a:bodyPr wrap="square" lIns="0" tIns="0" rIns="0" bIns="0" rtlCol="0" anchor="ctr"/>
           <a:lstStyle/>
           <a:p>
-            <a:pPr indent="0" marL="0">
+            <a:pPr marL="0" indent="0">
               <a:buNone/>
             </a:pPr>
             <a:r>
@@ -15342,17 +16006,24 @@
             <a:prstDash val="solid"/>
           </a:ln>
         </p:spPr>
+        <p:txBody>
+          <a:bodyPr/>
+          <a:lstStyle/>
+          <a:p>
+            <a:endParaRPr lang="de-DE"/>
+          </a:p>
+        </p:txBody>
       </p:sp>
       <p:pic>
         <p:nvPicPr>
-          <p:cNvPr id="12" name="Image 2" descr="preencoded.png">    </p:cNvPr>
+          <p:cNvPr id="12" name="Image 2" descr="preencoded.png"/>
           <p:cNvPicPr>
             <a:picLocks noChangeAspect="1"/>
           </p:cNvPicPr>
           <p:nvPr/>
         </p:nvPicPr>
         <p:blipFill>
-          <a:blip r:embed="rId3"/>
+          <a:blip r:embed="rId5"/>
           <a:stretch>
             <a:fillRect/>
           </a:stretch>
@@ -15388,7 +16059,7 @@
           <a:bodyPr wrap="square" lIns="0" tIns="0" rIns="0" bIns="0" rtlCol="0" anchor="ctr"/>
           <a:lstStyle/>
           <a:p>
-            <a:pPr indent="0" marL="0">
+            <a:pPr marL="0" indent="0">
               <a:buNone/>
             </a:pPr>
             <a:r>
@@ -15427,17 +16098,24 @@
             <a:prstDash val="solid"/>
           </a:ln>
         </p:spPr>
+        <p:txBody>
+          <a:bodyPr/>
+          <a:lstStyle/>
+          <a:p>
+            <a:endParaRPr lang="de-DE"/>
+          </a:p>
+        </p:txBody>
       </p:sp>
       <p:pic>
         <p:nvPicPr>
-          <p:cNvPr id="15" name="Image 3" descr="preencoded.png">    </p:cNvPr>
+          <p:cNvPr id="15" name="Image 3" descr="preencoded.png"/>
           <p:cNvPicPr>
             <a:picLocks noChangeAspect="1"/>
           </p:cNvPicPr>
           <p:nvPr/>
         </p:nvPicPr>
         <p:blipFill>
-          <a:blip r:embed="rId4"/>
+          <a:blip r:embed="rId6"/>
           <a:stretch>
             <a:fillRect/>
           </a:stretch>
@@ -15473,7 +16151,7 @@
           <a:bodyPr wrap="square" lIns="0" tIns="0" rIns="0" bIns="0" rtlCol="0" anchor="ctr"/>
           <a:lstStyle/>
           <a:p>
-            <a:pPr indent="0" marL="0">
+            <a:pPr marL="0" indent="0">
               <a:buNone/>
             </a:pPr>
             <a:r>
@@ -15509,7 +16187,7 @@
           <a:bodyPr wrap="square" lIns="0" tIns="0" rIns="0" bIns="0" rtlCol="0" anchor="ctr"/>
           <a:lstStyle/>
           <a:p>
-            <a:pPr indent="0" marL="0">
+            <a:pPr marL="0" indent="0">
               <a:buNone/>
             </a:pPr>
             <a:r>
@@ -15550,6 +16228,13 @@
             <a:prstDash val="solid"/>
           </a:ln>
         </p:spPr>
+        <p:txBody>
+          <a:bodyPr/>
+          <a:lstStyle/>
+          <a:p>
+            <a:endParaRPr lang="de-DE"/>
+          </a:p>
+        </p:txBody>
       </p:sp>
       <p:sp>
         <p:nvSpPr>
@@ -15572,7 +16257,7 @@
           <a:bodyPr wrap="square" lIns="0" tIns="0" rIns="0" bIns="0" rtlCol="0" anchor="ctr"/>
           <a:lstStyle/>
           <a:p>
-            <a:pPr algn="ctr" indent="0" marL="0">
+            <a:pPr marL="0" indent="0" algn="ctr">
               <a:buNone/>
             </a:pPr>
             <a:r>
@@ -15608,7 +16293,7 @@
           <a:bodyPr wrap="square" lIns="0" tIns="0" rIns="0" bIns="0" rtlCol="0" anchor="t"/>
           <a:lstStyle/>
           <a:p>
-            <a:pPr algn="ctr" indent="0" marL="0">
+            <a:pPr marL="0" indent="0" algn="ctr">
               <a:spcAft>
                 <a:spcPts val="1400"/>
               </a:spcAft>
@@ -15625,7 +16310,7 @@
             <a:endParaRPr lang="en-US" sz="1600" dirty="0"/>
           </a:p>
           <a:p>
-            <a:pPr algn="ctr" indent="0" marL="0">
+            <a:pPr marL="0" indent="0" algn="ctr">
               <a:spcAft>
                 <a:spcPts val="1400"/>
               </a:spcAft>
@@ -15642,7 +16327,7 @@
             <a:endParaRPr lang="en-US" sz="1600" dirty="0"/>
           </a:p>
           <a:p>
-            <a:pPr algn="ctr" indent="0" marL="0">
+            <a:pPr marL="0" indent="0" algn="ctr">
               <a:spcAft>
                 <a:spcPts val="1400"/>
               </a:spcAft>
@@ -15686,6 +16371,13 @@
             <a:prstDash val="solid"/>
           </a:ln>
         </p:spPr>
+        <p:txBody>
+          <a:bodyPr/>
+          <a:lstStyle/>
+          <a:p>
+            <a:endParaRPr lang="de-DE"/>
+          </a:p>
+        </p:txBody>
       </p:sp>
       <p:sp>
         <p:nvSpPr>
@@ -15708,7 +16400,7 @@
           <a:bodyPr wrap="square" lIns="0" tIns="0" rIns="0" bIns="0" rtlCol="0" anchor="ctr"/>
           <a:lstStyle/>
           <a:p>
-            <a:pPr algn="ctr" indent="0" marL="0">
+            <a:pPr marL="0" indent="0" algn="ctr">
               <a:buNone/>
             </a:pPr>
             <a:r>
@@ -15744,7 +16436,7 @@
           <a:bodyPr wrap="square" lIns="0" tIns="0" rIns="0" bIns="0" rtlCol="0" anchor="t"/>
           <a:lstStyle/>
           <a:p>
-            <a:pPr algn="ctr" indent="0" marL="0">
+            <a:pPr marL="0" indent="0" algn="ctr">
               <a:spcAft>
                 <a:spcPts val="1400"/>
               </a:spcAft>
@@ -15761,7 +16453,7 @@
             <a:endParaRPr lang="en-US" sz="1600" dirty="0"/>
           </a:p>
           <a:p>
-            <a:pPr algn="ctr" indent="0" marL="0">
+            <a:pPr marL="0" indent="0" algn="ctr">
               <a:spcAft>
                 <a:spcPts val="1400"/>
               </a:spcAft>
@@ -15778,7 +16470,7 @@
             <a:endParaRPr lang="en-US" sz="1600" dirty="0"/>
           </a:p>
           <a:p>
-            <a:pPr algn="ctr" indent="0" marL="0">
+            <a:pPr marL="0" indent="0" algn="ctr">
               <a:spcAft>
                 <a:spcPts val="1400"/>
               </a:spcAft>
@@ -15822,6 +16514,13 @@
             <a:prstDash val="solid"/>
           </a:ln>
         </p:spPr>
+        <p:txBody>
+          <a:bodyPr/>
+          <a:lstStyle/>
+          <a:p>
+            <a:endParaRPr lang="de-DE"/>
+          </a:p>
+        </p:txBody>
       </p:sp>
       <p:sp>
         <p:nvSpPr>
@@ -15844,7 +16543,7 @@
           <a:bodyPr wrap="square" lIns="0" tIns="0" rIns="0" bIns="0" rtlCol="0" anchor="ctr"/>
           <a:lstStyle/>
           <a:p>
-            <a:pPr algn="ctr" indent="0" marL="0">
+            <a:pPr marL="0" indent="0" algn="ctr">
               <a:buNone/>
             </a:pPr>
             <a:r>
@@ -15880,7 +16579,7 @@
           <a:bodyPr wrap="square" lIns="0" tIns="0" rIns="0" bIns="0" rtlCol="0" anchor="t"/>
           <a:lstStyle/>
           <a:p>
-            <a:pPr algn="ctr" indent="0" marL="0">
+            <a:pPr marL="0" indent="0" algn="ctr">
               <a:spcAft>
                 <a:spcPts val="1400"/>
               </a:spcAft>
@@ -15897,7 +16596,7 @@
             <a:endParaRPr lang="en-US" sz="1600" dirty="0"/>
           </a:p>
           <a:p>
-            <a:pPr algn="ctr" indent="0" marL="0">
+            <a:pPr marL="0" indent="0" algn="ctr">
               <a:spcAft>
                 <a:spcPts val="1400"/>
               </a:spcAft>
@@ -15914,7 +16613,7 @@
             <a:endParaRPr lang="en-US" sz="1600" dirty="0"/>
           </a:p>
           <a:p>
-            <a:pPr algn="ctr" indent="0" marL="0">
+            <a:pPr marL="0" indent="0" algn="ctr">
               <a:spcAft>
                 <a:spcPts val="1400"/>
               </a:spcAft>
@@ -15934,7 +16633,7 @@
       </p:sp>
       <p:sp>
         <p:nvSpPr>
-          <p:cNvPr id="25" name="Slide Number Placeholder 0"/>
+          <p:cNvPr id="27" name="Slide Number Placeholder 0"/>
           <p:cNvSpPr>
             <a:spLocks noGrp="1"/>
           </p:cNvSpPr>
@@ -15952,7 +16651,7 @@
           </a:prstGeom>
           <a:extLst>
             <a:ext uri="{C572A759-6A51-4108-AA02-DFA0A04FC94B}">
-              <ma14:wrappingTextBoxFlag xmlns:ma14="http://schemas.microsoft.com/office/mac/drawingml/2011/main" val="0"/>
+              <ma14:wrappingTextBoxFlag xmlns:ma14="http://schemas.microsoft.com/office/mac/drawingml/2011/main" xmlns="" val="0"/>
             </a:ext>
           </a:extLst>
         </p:spPr>
@@ -15970,7 +16669,7 @@
           <a:p>
             <a:pPr algn="r"/>
             <a:fld id="{F7021451-1387-4CA6-816F-3879F97B5CBC}" type="slidenum">
-              <a:rPr b="0" lang="en-US"/>
+              <a:rPr lang="en-US" b="0"/>
               <a:t>7</a:t>
             </a:fld>
             <a:endParaRPr lang="en-US"/>
@@ -16005,9 +16704,11 @@
       <p:sp>
         <p:nvSpPr>
           <p:cNvPr id="2" name="Text 0"/>
-          <p:cNvSpPr/>
+          <p:cNvSpPr>
+            <a:spLocks noGrp="1"/>
+          </p:cNvSpPr>
           <p:nvPr>
-            <p:ph idx="101" type="body" hasCustomPrompt="1"/>
+            <p:ph type="body" idx="101" hasCustomPrompt="1"/>
           </p:nvPr>
         </p:nvSpPr>
         <p:spPr>
@@ -16025,7 +16726,7 @@
           <a:bodyPr wrap="square" lIns="0" tIns="0" rIns="0" bIns="0" rtlCol="0" anchor="ctr"/>
           <a:lstStyle/>
           <a:p>
-            <a:pPr indent="0" marL="0">
+            <a:pPr marL="0" indent="0">
               <a:buNone/>
             </a:pPr>
             <a:r>
@@ -16043,9 +16744,11 @@
       <p:sp>
         <p:nvSpPr>
           <p:cNvPr id="3" name="Text 0"/>
-          <p:cNvSpPr/>
+          <p:cNvSpPr>
+            <a:spLocks noGrp="1"/>
+          </p:cNvSpPr>
           <p:nvPr>
-            <p:ph idx="102" type="title" hasCustomPrompt="1"/>
+            <p:ph type="title" idx="102" hasCustomPrompt="1"/>
           </p:nvPr>
         </p:nvSpPr>
         <p:spPr>
@@ -16063,7 +16766,7 @@
           <a:bodyPr wrap="square" lIns="0" tIns="0" rIns="0" bIns="0" rtlCol="0" anchor="ctr"/>
           <a:lstStyle/>
           <a:p>
-            <a:pPr algn="l" indent="0" marL="0">
+            <a:pPr marL="0" indent="0" algn="l">
               <a:buNone/>
             </a:pPr>
             <a:r>
@@ -16094,18 +16797,48 @@
         </p:nvGraphicFramePr>
         <p:xfrm>
           <a:off x="548640" y="1691640"/>
-          <a:ext cx="11094415" cy="914400"/>
+          <a:ext cx="11094415" cy="3950208"/>
         </p:xfrm>
         <a:graphic>
           <a:graphicData uri="http://schemas.openxmlformats.org/drawingml/2006/table">
             <a:tbl>
               <a:tblPr/>
               <a:tblGrid>
-                <a:gridCol w="4144975"/>
-                <a:gridCol w="1645920"/>
-                <a:gridCol w="1645920"/>
-                <a:gridCol w="1645920"/>
-                <a:gridCol w="2011680"/>
+                <a:gridCol w="4144975">
+                  <a:extLst>
+                    <a:ext uri="{9D8B030D-6E8A-4147-A177-3AD203B41FA5}">
+                      <a16:colId xmlns:a16="http://schemas.microsoft.com/office/drawing/2014/main" val="20000"/>
+                    </a:ext>
+                  </a:extLst>
+                </a:gridCol>
+                <a:gridCol w="1645920">
+                  <a:extLst>
+                    <a:ext uri="{9D8B030D-6E8A-4147-A177-3AD203B41FA5}">
+                      <a16:colId xmlns:a16="http://schemas.microsoft.com/office/drawing/2014/main" val="20001"/>
+                    </a:ext>
+                  </a:extLst>
+                </a:gridCol>
+                <a:gridCol w="1645920">
+                  <a:extLst>
+                    <a:ext uri="{9D8B030D-6E8A-4147-A177-3AD203B41FA5}">
+                      <a16:colId xmlns:a16="http://schemas.microsoft.com/office/drawing/2014/main" val="20002"/>
+                    </a:ext>
+                  </a:extLst>
+                </a:gridCol>
+                <a:gridCol w="1645920">
+                  <a:extLst>
+                    <a:ext uri="{9D8B030D-6E8A-4147-A177-3AD203B41FA5}">
+                      <a16:colId xmlns:a16="http://schemas.microsoft.com/office/drawing/2014/main" val="20003"/>
+                    </a:ext>
+                  </a:extLst>
+                </a:gridCol>
+                <a:gridCol w="2011680">
+                  <a:extLst>
+                    <a:ext uri="{9D8B030D-6E8A-4147-A177-3AD203B41FA5}">
+                      <a16:colId xmlns:a16="http://schemas.microsoft.com/office/drawing/2014/main" val="20004"/>
+                    </a:ext>
+                  </a:extLst>
+                </a:gridCol>
               </a:tblGrid>
               <a:tr h="438912">
                 <a:tc>
@@ -16113,7 +16846,7 @@
                     <a:bodyPr/>
                     <a:lstStyle/>
                     <a:p>
-                      <a:pPr algn="l" indent="0" marL="0">
+                      <a:pPr marL="0" indent="0" algn="l">
                         <a:buNone/>
                       </a:pPr>
                       <a:r>
@@ -16174,7 +16907,7 @@
                     <a:bodyPr/>
                     <a:lstStyle/>
                     <a:p>
-                      <a:pPr algn="ctr" indent="0" marL="0">
+                      <a:pPr marL="0" indent="0" algn="ctr">
                         <a:buNone/>
                       </a:pPr>
                       <a:r>
@@ -16235,7 +16968,7 @@
                     <a:bodyPr/>
                     <a:lstStyle/>
                     <a:p>
-                      <a:pPr algn="ctr" indent="0" marL="0">
+                      <a:pPr marL="0" indent="0" algn="ctr">
                         <a:buNone/>
                       </a:pPr>
                       <a:r>
@@ -16296,7 +17029,7 @@
                     <a:bodyPr/>
                     <a:lstStyle/>
                     <a:p>
-                      <a:pPr algn="ctr" indent="0" marL="0">
+                      <a:pPr marL="0" indent="0" algn="ctr">
                         <a:buNone/>
                       </a:pPr>
                       <a:r>
@@ -16357,7 +17090,7 @@
                     <a:bodyPr/>
                     <a:lstStyle/>
                     <a:p>
-                      <a:pPr algn="ctr" indent="0" marL="0">
+                      <a:pPr marL="0" indent="0" algn="ctr">
                         <a:buNone/>
                       </a:pPr>
                       <a:r>
@@ -16413,6 +17146,11 @@
                     </a:solidFill>
                   </a:tcPr>
                 </a:tc>
+                <a:extLst>
+                  <a:ext uri="{0D108BD9-81ED-4DB2-BD59-A6C34878D82A}">
+                    <a16:rowId xmlns:a16="http://schemas.microsoft.com/office/drawing/2014/main" val="10000"/>
+                  </a:ext>
+                </a:extLst>
               </a:tr>
               <a:tr h="438912">
                 <a:tc>
@@ -16420,7 +17158,7 @@
                     <a:bodyPr/>
                     <a:lstStyle/>
                     <a:p>
-                      <a:pPr algn="l" indent="0" marL="0">
+                      <a:pPr marL="0" indent="0" algn="l">
                         <a:buNone/>
                       </a:pPr>
                       <a:r>
@@ -16481,7 +17219,7 @@
                     <a:bodyPr/>
                     <a:lstStyle/>
                     <a:p>
-                      <a:pPr algn="ctr" indent="0" marL="0">
+                      <a:pPr marL="0" indent="0" algn="ctr">
                         <a:buNone/>
                       </a:pPr>
                       <a:r>
@@ -16542,7 +17280,7 @@
                     <a:bodyPr/>
                     <a:lstStyle/>
                     <a:p>
-                      <a:pPr algn="ctr" indent="0" marL="0">
+                      <a:pPr marL="0" indent="0" algn="ctr">
                         <a:buNone/>
                       </a:pPr>
                       <a:r>
@@ -16603,7 +17341,7 @@
                     <a:bodyPr/>
                     <a:lstStyle/>
                     <a:p>
-                      <a:pPr algn="ctr" indent="0" marL="0">
+                      <a:pPr marL="0" indent="0" algn="ctr">
                         <a:buNone/>
                       </a:pPr>
                       <a:r>
@@ -16664,7 +17402,7 @@
                     <a:bodyPr/>
                     <a:lstStyle/>
                     <a:p>
-                      <a:pPr algn="ctr" indent="0" marL="0">
+                      <a:pPr marL="0" indent="0" algn="ctr">
                         <a:buNone/>
                       </a:pPr>
                       <a:r>
@@ -16720,6 +17458,11 @@
                     </a:solidFill>
                   </a:tcPr>
                 </a:tc>
+                <a:extLst>
+                  <a:ext uri="{0D108BD9-81ED-4DB2-BD59-A6C34878D82A}">
+                    <a16:rowId xmlns:a16="http://schemas.microsoft.com/office/drawing/2014/main" val="10001"/>
+                  </a:ext>
+                </a:extLst>
               </a:tr>
               <a:tr h="438912">
                 <a:tc>
@@ -16727,7 +17470,7 @@
                     <a:bodyPr/>
                     <a:lstStyle/>
                     <a:p>
-                      <a:pPr algn="l" indent="0" marL="0">
+                      <a:pPr marL="0" indent="0" algn="l">
                         <a:buNone/>
                       </a:pPr>
                       <a:r>
@@ -16788,7 +17531,7 @@
                     <a:bodyPr/>
                     <a:lstStyle/>
                     <a:p>
-                      <a:pPr algn="ctr" indent="0" marL="0">
+                      <a:pPr marL="0" indent="0" algn="ctr">
                         <a:buNone/>
                       </a:pPr>
                       <a:r>
@@ -16849,7 +17592,7 @@
                     <a:bodyPr/>
                     <a:lstStyle/>
                     <a:p>
-                      <a:pPr algn="ctr" indent="0" marL="0">
+                      <a:pPr marL="0" indent="0" algn="ctr">
                         <a:buNone/>
                       </a:pPr>
                       <a:r>
@@ -16910,7 +17653,7 @@
                     <a:bodyPr/>
                     <a:lstStyle/>
                     <a:p>
-                      <a:pPr algn="ctr" indent="0" marL="0">
+                      <a:pPr marL="0" indent="0" algn="ctr">
                         <a:buNone/>
                       </a:pPr>
                       <a:r>
@@ -16971,7 +17714,7 @@
                     <a:bodyPr/>
                     <a:lstStyle/>
                     <a:p>
-                      <a:pPr algn="ctr" indent="0" marL="0">
+                      <a:pPr marL="0" indent="0" algn="ctr">
                         <a:buNone/>
                       </a:pPr>
                       <a:r>
@@ -17027,6 +17770,11 @@
                     </a:solidFill>
                   </a:tcPr>
                 </a:tc>
+                <a:extLst>
+                  <a:ext uri="{0D108BD9-81ED-4DB2-BD59-A6C34878D82A}">
+                    <a16:rowId xmlns:a16="http://schemas.microsoft.com/office/drawing/2014/main" val="10002"/>
+                  </a:ext>
+                </a:extLst>
               </a:tr>
               <a:tr h="438912">
                 <a:tc>
@@ -17034,7 +17782,7 @@
                     <a:bodyPr/>
                     <a:lstStyle/>
                     <a:p>
-                      <a:pPr algn="l" indent="0" marL="0">
+                      <a:pPr marL="0" indent="0" algn="l">
                         <a:buNone/>
                       </a:pPr>
                       <a:r>
@@ -17095,7 +17843,7 @@
                     <a:bodyPr/>
                     <a:lstStyle/>
                     <a:p>
-                      <a:pPr algn="ctr" indent="0" marL="0">
+                      <a:pPr marL="0" indent="0" algn="ctr">
                         <a:buNone/>
                       </a:pPr>
                       <a:r>
@@ -17156,7 +17904,7 @@
                     <a:bodyPr/>
                     <a:lstStyle/>
                     <a:p>
-                      <a:pPr algn="ctr" indent="0" marL="0">
+                      <a:pPr marL="0" indent="0" algn="ctr">
                         <a:buNone/>
                       </a:pPr>
                       <a:r>
@@ -17217,7 +17965,7 @@
                     <a:bodyPr/>
                     <a:lstStyle/>
                     <a:p>
-                      <a:pPr algn="ctr" indent="0" marL="0">
+                      <a:pPr marL="0" indent="0" algn="ctr">
                         <a:buNone/>
                       </a:pPr>
                       <a:r>
@@ -17278,7 +18026,7 @@
                     <a:bodyPr/>
                     <a:lstStyle/>
                     <a:p>
-                      <a:pPr algn="ctr" indent="0" marL="0">
+                      <a:pPr marL="0" indent="0" algn="ctr">
                         <a:buNone/>
                       </a:pPr>
                       <a:r>
@@ -17334,6 +18082,11 @@
                     </a:solidFill>
                   </a:tcPr>
                 </a:tc>
+                <a:extLst>
+                  <a:ext uri="{0D108BD9-81ED-4DB2-BD59-A6C34878D82A}">
+                    <a16:rowId xmlns:a16="http://schemas.microsoft.com/office/drawing/2014/main" val="10003"/>
+                  </a:ext>
+                </a:extLst>
               </a:tr>
               <a:tr h="438912">
                 <a:tc>
@@ -17341,7 +18094,7 @@
                     <a:bodyPr/>
                     <a:lstStyle/>
                     <a:p>
-                      <a:pPr algn="l" indent="0" marL="0">
+                      <a:pPr marL="0" indent="0" algn="l">
                         <a:buNone/>
                       </a:pPr>
                       <a:r>
@@ -17402,7 +18155,7 @@
                     <a:bodyPr/>
                     <a:lstStyle/>
                     <a:p>
-                      <a:pPr algn="ctr" indent="0" marL="0">
+                      <a:pPr marL="0" indent="0" algn="ctr">
                         <a:buNone/>
                       </a:pPr>
                       <a:r>
@@ -17463,7 +18216,7 @@
                     <a:bodyPr/>
                     <a:lstStyle/>
                     <a:p>
-                      <a:pPr algn="ctr" indent="0" marL="0">
+                      <a:pPr marL="0" indent="0" algn="ctr">
                         <a:buNone/>
                       </a:pPr>
                       <a:r>
@@ -17524,7 +18277,7 @@
                     <a:bodyPr/>
                     <a:lstStyle/>
                     <a:p>
-                      <a:pPr algn="ctr" indent="0" marL="0">
+                      <a:pPr marL="0" indent="0" algn="ctr">
                         <a:buNone/>
                       </a:pPr>
                       <a:r>
@@ -17585,7 +18338,7 @@
                     <a:bodyPr/>
                     <a:lstStyle/>
                     <a:p>
-                      <a:pPr algn="ctr" indent="0" marL="0">
+                      <a:pPr marL="0" indent="0" algn="ctr">
                         <a:buNone/>
                       </a:pPr>
                       <a:r>
@@ -17641,6 +18394,11 @@
                     </a:solidFill>
                   </a:tcPr>
                 </a:tc>
+                <a:extLst>
+                  <a:ext uri="{0D108BD9-81ED-4DB2-BD59-A6C34878D82A}">
+                    <a16:rowId xmlns:a16="http://schemas.microsoft.com/office/drawing/2014/main" val="10004"/>
+                  </a:ext>
+                </a:extLst>
               </a:tr>
               <a:tr h="438912">
                 <a:tc>
@@ -17648,7 +18406,7 @@
                     <a:bodyPr/>
                     <a:lstStyle/>
                     <a:p>
-                      <a:pPr algn="l" indent="0" marL="0">
+                      <a:pPr marL="0" indent="0" algn="l">
                         <a:buNone/>
                       </a:pPr>
                       <a:r>
@@ -17709,7 +18467,7 @@
                     <a:bodyPr/>
                     <a:lstStyle/>
                     <a:p>
-                      <a:pPr algn="ctr" indent="0" marL="0">
+                      <a:pPr marL="0" indent="0" algn="ctr">
                         <a:buNone/>
                       </a:pPr>
                       <a:r>
@@ -17770,7 +18528,7 @@
                     <a:bodyPr/>
                     <a:lstStyle/>
                     <a:p>
-                      <a:pPr algn="ctr" indent="0" marL="0">
+                      <a:pPr marL="0" indent="0" algn="ctr">
                         <a:buNone/>
                       </a:pPr>
                       <a:r>
@@ -17831,7 +18589,7 @@
                     <a:bodyPr/>
                     <a:lstStyle/>
                     <a:p>
-                      <a:pPr algn="ctr" indent="0" marL="0">
+                      <a:pPr marL="0" indent="0" algn="ctr">
                         <a:buNone/>
                       </a:pPr>
                       <a:r>
@@ -17892,7 +18650,7 @@
                     <a:bodyPr/>
                     <a:lstStyle/>
                     <a:p>
-                      <a:pPr algn="ctr" indent="0" marL="0">
+                      <a:pPr marL="0" indent="0" algn="ctr">
                         <a:buNone/>
                       </a:pPr>
                       <a:r>
@@ -17948,6 +18706,11 @@
                     </a:solidFill>
                   </a:tcPr>
                 </a:tc>
+                <a:extLst>
+                  <a:ext uri="{0D108BD9-81ED-4DB2-BD59-A6C34878D82A}">
+                    <a16:rowId xmlns:a16="http://schemas.microsoft.com/office/drawing/2014/main" val="10005"/>
+                  </a:ext>
+                </a:extLst>
               </a:tr>
               <a:tr h="438912">
                 <a:tc>
@@ -17955,7 +18718,7 @@
                     <a:bodyPr/>
                     <a:lstStyle/>
                     <a:p>
-                      <a:pPr algn="l" indent="0" marL="0">
+                      <a:pPr marL="0" indent="0" algn="l">
                         <a:buNone/>
                       </a:pPr>
                       <a:r>
@@ -18016,7 +18779,7 @@
                     <a:bodyPr/>
                     <a:lstStyle/>
                     <a:p>
-                      <a:pPr algn="ctr" indent="0" marL="0">
+                      <a:pPr marL="0" indent="0" algn="ctr">
                         <a:buNone/>
                       </a:pPr>
                       <a:r>
@@ -18077,7 +18840,7 @@
                     <a:bodyPr/>
                     <a:lstStyle/>
                     <a:p>
-                      <a:pPr algn="ctr" indent="0" marL="0">
+                      <a:pPr marL="0" indent="0" algn="ctr">
                         <a:buNone/>
                       </a:pPr>
                       <a:r>
@@ -18138,7 +18901,7 @@
                     <a:bodyPr/>
                     <a:lstStyle/>
                     <a:p>
-                      <a:pPr algn="ctr" indent="0" marL="0">
+                      <a:pPr marL="0" indent="0" algn="ctr">
                         <a:buNone/>
                       </a:pPr>
                       <a:r>
@@ -18199,7 +18962,7 @@
                     <a:bodyPr/>
                     <a:lstStyle/>
                     <a:p>
-                      <a:pPr algn="ctr" indent="0" marL="0">
+                      <a:pPr marL="0" indent="0" algn="ctr">
                         <a:buNone/>
                       </a:pPr>
                       <a:r>
@@ -18255,6 +19018,11 @@
                     </a:solidFill>
                   </a:tcPr>
                 </a:tc>
+                <a:extLst>
+                  <a:ext uri="{0D108BD9-81ED-4DB2-BD59-A6C34878D82A}">
+                    <a16:rowId xmlns:a16="http://schemas.microsoft.com/office/drawing/2014/main" val="10006"/>
+                  </a:ext>
+                </a:extLst>
               </a:tr>
               <a:tr h="438912">
                 <a:tc>
@@ -18262,7 +19030,7 @@
                     <a:bodyPr/>
                     <a:lstStyle/>
                     <a:p>
-                      <a:pPr algn="l" indent="0" marL="0">
+                      <a:pPr marL="0" indent="0" algn="l">
                         <a:buNone/>
                       </a:pPr>
                       <a:r>
@@ -18323,7 +19091,7 @@
                     <a:bodyPr/>
                     <a:lstStyle/>
                     <a:p>
-                      <a:pPr algn="ctr" indent="0" marL="0">
+                      <a:pPr marL="0" indent="0" algn="ctr">
                         <a:buNone/>
                       </a:pPr>
                       <a:r>
@@ -18384,7 +19152,7 @@
                     <a:bodyPr/>
                     <a:lstStyle/>
                     <a:p>
-                      <a:pPr algn="ctr" indent="0" marL="0">
+                      <a:pPr marL="0" indent="0" algn="ctr">
                         <a:buNone/>
                       </a:pPr>
                       <a:r>
@@ -18445,7 +19213,7 @@
                     <a:bodyPr/>
                     <a:lstStyle/>
                     <a:p>
-                      <a:pPr algn="ctr" indent="0" marL="0">
+                      <a:pPr marL="0" indent="0" algn="ctr">
                         <a:buNone/>
                       </a:pPr>
                       <a:r>
@@ -18506,7 +19274,7 @@
                     <a:bodyPr/>
                     <a:lstStyle/>
                     <a:p>
-                      <a:pPr algn="ctr" indent="0" marL="0">
+                      <a:pPr marL="0" indent="0" algn="ctr">
                         <a:buNone/>
                       </a:pPr>
                       <a:r>
@@ -18562,6 +19330,11 @@
                     </a:solidFill>
                   </a:tcPr>
                 </a:tc>
+                <a:extLst>
+                  <a:ext uri="{0D108BD9-81ED-4DB2-BD59-A6C34878D82A}">
+                    <a16:rowId xmlns:a16="http://schemas.microsoft.com/office/drawing/2014/main" val="10007"/>
+                  </a:ext>
+                </a:extLst>
               </a:tr>
               <a:tr h="438912">
                 <a:tc>
@@ -18569,7 +19342,7 @@
                     <a:bodyPr/>
                     <a:lstStyle/>
                     <a:p>
-                      <a:pPr algn="l" indent="0" marL="0">
+                      <a:pPr marL="0" indent="0" algn="l">
                         <a:buNone/>
                       </a:pPr>
                       <a:r>
@@ -18630,7 +19403,7 @@
                     <a:bodyPr/>
                     <a:lstStyle/>
                     <a:p>
-                      <a:pPr algn="ctr" indent="0" marL="0">
+                      <a:pPr marL="0" indent="0" algn="ctr">
                         <a:buNone/>
                       </a:pPr>
                       <a:r>
@@ -18691,7 +19464,7 @@
                     <a:bodyPr/>
                     <a:lstStyle/>
                     <a:p>
-                      <a:pPr algn="ctr" indent="0" marL="0">
+                      <a:pPr marL="0" indent="0" algn="ctr">
                         <a:buNone/>
                       </a:pPr>
                       <a:r>
@@ -18752,7 +19525,7 @@
                     <a:bodyPr/>
                     <a:lstStyle/>
                     <a:p>
-                      <a:pPr algn="ctr" indent="0" marL="0">
+                      <a:pPr marL="0" indent="0" algn="ctr">
                         <a:buNone/>
                       </a:pPr>
                       <a:r>
@@ -18813,7 +19586,7 @@
                     <a:bodyPr/>
                     <a:lstStyle/>
                     <a:p>
-                      <a:pPr algn="ctr" indent="0" marL="0">
+                      <a:pPr marL="0" indent="0" algn="ctr">
                         <a:buNone/>
                       </a:pPr>
                       <a:r>
@@ -18869,6 +19642,11 @@
                     </a:solidFill>
                   </a:tcPr>
                 </a:tc>
+                <a:extLst>
+                  <a:ext uri="{0D108BD9-81ED-4DB2-BD59-A6C34878D82A}">
+                    <a16:rowId xmlns:a16="http://schemas.microsoft.com/office/drawing/2014/main" val="10008"/>
+                  </a:ext>
+                </a:extLst>
               </a:tr>
             </a:tbl>
           </a:graphicData>
@@ -18895,7 +19673,7 @@
           <a:bodyPr wrap="square" lIns="0" tIns="0" rIns="0" bIns="0" rtlCol="0" anchor="ctr"/>
           <a:lstStyle/>
           <a:p>
-            <a:pPr indent="0" marL="0">
+            <a:pPr marL="0" indent="0">
               <a:buNone/>
             </a:pPr>
             <a:r>
@@ -18906,9 +19684,6 @@
               </a:rPr>
               <a:t>✓ vorhanden   </a:t>
             </a:r>
-            <a:pPr indent="0" marL="0">
-              <a:buNone/>
-            </a:pPr>
             <a:r>
               <a:rPr lang="en-US" sz="1300" b="1" dirty="0">
                 <a:solidFill>
@@ -18917,9 +19692,6 @@
               </a:rPr>
               <a:t>– teilweise   </a:t>
             </a:r>
-            <a:pPr indent="0" marL="0">
-              <a:buNone/>
-            </a:pPr>
             <a:r>
               <a:rPr lang="en-US" sz="1300" b="1" dirty="0">
                 <a:solidFill>
@@ -18952,7 +19724,7 @@
           </a:prstGeom>
           <a:extLst>
             <a:ext uri="{C572A759-6A51-4108-AA02-DFA0A04FC94B}">
-              <ma14:wrappingTextBoxFlag xmlns:ma14="http://schemas.microsoft.com/office/mac/drawingml/2011/main" val="0"/>
+              <ma14:wrappingTextBoxFlag xmlns:ma14="http://schemas.microsoft.com/office/mac/drawingml/2011/main" xmlns="" val="0"/>
             </a:ext>
           </a:extLst>
         </p:spPr>
@@ -18970,7 +19742,7 @@
           <a:p>
             <a:pPr algn="r"/>
             <a:fld id="{F7021451-1387-4CA6-816F-3879F97B5CBC}" type="slidenum">
-              <a:rPr b="0" lang="en-US"/>
+              <a:rPr lang="en-US" b="0"/>
               <a:t>8</a:t>
             </a:fld>
             <a:endParaRPr lang="en-US"/>
@@ -19005,9 +19777,11 @@
       <p:sp>
         <p:nvSpPr>
           <p:cNvPr id="2" name="Text 0"/>
-          <p:cNvSpPr/>
+          <p:cNvSpPr>
+            <a:spLocks noGrp="1"/>
+          </p:cNvSpPr>
           <p:nvPr>
-            <p:ph idx="101" type="body" hasCustomPrompt="1"/>
+            <p:ph type="body" idx="101" hasCustomPrompt="1"/>
           </p:nvPr>
         </p:nvSpPr>
         <p:spPr>
@@ -19025,7 +19799,7 @@
           <a:bodyPr wrap="square" lIns="0" tIns="0" rIns="0" bIns="0" rtlCol="0" anchor="ctr"/>
           <a:lstStyle/>
           <a:p>
-            <a:pPr indent="0" marL="0">
+            <a:pPr marL="0" indent="0">
               <a:buNone/>
             </a:pPr>
             <a:r>
@@ -19043,9 +19817,11 @@
       <p:sp>
         <p:nvSpPr>
           <p:cNvPr id="3" name="Text 0"/>
-          <p:cNvSpPr/>
+          <p:cNvSpPr>
+            <a:spLocks noGrp="1"/>
+          </p:cNvSpPr>
           <p:nvPr>
-            <p:ph idx="102" type="title" hasCustomPrompt="1"/>
+            <p:ph type="title" idx="102" hasCustomPrompt="1"/>
           </p:nvPr>
         </p:nvSpPr>
         <p:spPr>
@@ -19063,7 +19839,7 @@
           <a:bodyPr wrap="square" lIns="0" tIns="0" rIns="0" bIns="0" rtlCol="0" anchor="ctr"/>
           <a:lstStyle/>
           <a:p>
-            <a:pPr algn="l" indent="0" marL="0">
+            <a:pPr marL="0" indent="0" algn="l">
               <a:buNone/>
             </a:pPr>
             <a:r>
@@ -19104,6 +19880,13 @@
             <a:prstDash val="solid"/>
           </a:ln>
         </p:spPr>
+        <p:txBody>
+          <a:bodyPr/>
+          <a:lstStyle/>
+          <a:p>
+            <a:endParaRPr lang="de-DE"/>
+          </a:p>
+        </p:txBody>
       </p:sp>
       <p:sp>
         <p:nvSpPr>
@@ -19126,7 +19909,7 @@
           <a:bodyPr wrap="square" lIns="0" tIns="0" rIns="0" bIns="0" rtlCol="0" anchor="ctr"/>
           <a:lstStyle/>
           <a:p>
-            <a:pPr indent="0" marL="0">
+            <a:pPr marL="0" indent="0">
               <a:buNone/>
             </a:pPr>
             <a:r>
@@ -19165,17 +19948,24 @@
             <a:prstDash val="solid"/>
           </a:ln>
         </p:spPr>
+        <p:txBody>
+          <a:bodyPr/>
+          <a:lstStyle/>
+          <a:p>
+            <a:endParaRPr lang="de-DE"/>
+          </a:p>
+        </p:txBody>
       </p:sp>
       <p:pic>
         <p:nvPicPr>
-          <p:cNvPr id="7" name="Image 0" descr="preencoded.png">    </p:cNvPr>
+          <p:cNvPr id="7" name="Image 0" descr="preencoded.png"/>
           <p:cNvPicPr>
             <a:picLocks noChangeAspect="1"/>
           </p:cNvPicPr>
           <p:nvPr/>
         </p:nvPicPr>
         <p:blipFill>
-          <a:blip r:embed="rId1"/>
+          <a:blip r:embed="rId3"/>
           <a:stretch>
             <a:fillRect/>
           </a:stretch>
@@ -19211,7 +20001,7 @@
           <a:bodyPr wrap="square" lIns="0" tIns="0" rIns="0" bIns="0" rtlCol="0" anchor="t"/>
           <a:lstStyle/>
           <a:p>
-            <a:pPr algn="ctr" indent="0" marL="0">
+            <a:pPr marL="0" indent="0" algn="ctr">
               <a:buNone/>
             </a:pPr>
             <a:r>
@@ -19247,7 +20037,7 @@
           <a:bodyPr wrap="square" lIns="0" tIns="0" rIns="0" bIns="0" rtlCol="0" anchor="ctr"/>
           <a:lstStyle/>
           <a:p>
-            <a:pPr algn="ctr" indent="0" marL="0">
+            <a:pPr marL="0" indent="0" algn="ctr">
               <a:buNone/>
             </a:pPr>
             <a:r>
@@ -19288,6 +20078,13 @@
             <a:prstDash val="solid"/>
           </a:ln>
         </p:spPr>
+        <p:txBody>
+          <a:bodyPr/>
+          <a:lstStyle/>
+          <a:p>
+            <a:endParaRPr lang="de-DE"/>
+          </a:p>
+        </p:txBody>
       </p:sp>
       <p:sp>
         <p:nvSpPr>
@@ -19310,7 +20107,7 @@
           <a:bodyPr wrap="square" lIns="0" tIns="0" rIns="0" bIns="0" rtlCol="0" anchor="ctr"/>
           <a:lstStyle/>
           <a:p>
-            <a:pPr indent="0" marL="0">
+            <a:pPr marL="0" indent="0">
               <a:buNone/>
             </a:pPr>
             <a:r>
@@ -19349,17 +20146,24 @@
             <a:prstDash val="solid"/>
           </a:ln>
         </p:spPr>
+        <p:txBody>
+          <a:bodyPr/>
+          <a:lstStyle/>
+          <a:p>
+            <a:endParaRPr lang="de-DE"/>
+          </a:p>
+        </p:txBody>
       </p:sp>
       <p:pic>
         <p:nvPicPr>
-          <p:cNvPr id="13" name="Image 1" descr="preencoded.png">    </p:cNvPr>
+          <p:cNvPr id="13" name="Image 1" descr="preencoded.png"/>
           <p:cNvPicPr>
             <a:picLocks noChangeAspect="1"/>
           </p:cNvPicPr>
           <p:nvPr/>
         </p:nvPicPr>
         <p:blipFill>
-          <a:blip r:embed="rId2"/>
+          <a:blip r:embed="rId4"/>
           <a:stretch>
             <a:fillRect/>
           </a:stretch>
@@ -19395,7 +20199,7 @@
           <a:bodyPr wrap="square" lIns="0" tIns="0" rIns="0" bIns="0" rtlCol="0" anchor="t"/>
           <a:lstStyle/>
           <a:p>
-            <a:pPr algn="ctr" indent="0" marL="0">
+            <a:pPr marL="0" indent="0" algn="ctr">
               <a:buNone/>
             </a:pPr>
             <a:r>
@@ -19431,7 +20235,7 @@
           <a:bodyPr wrap="square" lIns="0" tIns="0" rIns="0" bIns="0" rtlCol="0" anchor="ctr"/>
           <a:lstStyle/>
           <a:p>
-            <a:pPr algn="ctr" indent="0" marL="0">
+            <a:pPr marL="0" indent="0" algn="ctr">
               <a:buNone/>
             </a:pPr>
             <a:r>
@@ -19472,6 +20276,13 @@
             <a:prstDash val="solid"/>
           </a:ln>
         </p:spPr>
+        <p:txBody>
+          <a:bodyPr/>
+          <a:lstStyle/>
+          <a:p>
+            <a:endParaRPr lang="de-DE"/>
+          </a:p>
+        </p:txBody>
       </p:sp>
       <p:sp>
         <p:nvSpPr>
@@ -19494,7 +20305,7 @@
           <a:bodyPr wrap="square" lIns="0" tIns="0" rIns="0" bIns="0" rtlCol="0" anchor="ctr"/>
           <a:lstStyle/>
           <a:p>
-            <a:pPr indent="0" marL="0">
+            <a:pPr marL="0" indent="0">
               <a:buNone/>
             </a:pPr>
             <a:r>
@@ -19533,17 +20344,24 @@
             <a:prstDash val="solid"/>
           </a:ln>
         </p:spPr>
+        <p:txBody>
+          <a:bodyPr/>
+          <a:lstStyle/>
+          <a:p>
+            <a:endParaRPr lang="de-DE"/>
+          </a:p>
+        </p:txBody>
       </p:sp>
       <p:pic>
         <p:nvPicPr>
-          <p:cNvPr id="19" name="Image 2" descr="preencoded.png">    </p:cNvPr>
+          <p:cNvPr id="19" name="Image 2" descr="preencoded.png"/>
           <p:cNvPicPr>
             <a:picLocks noChangeAspect="1"/>
           </p:cNvPicPr>
           <p:nvPr/>
         </p:nvPicPr>
         <p:blipFill>
-          <a:blip r:embed="rId3"/>
+          <a:blip r:embed="rId5"/>
           <a:stretch>
             <a:fillRect/>
           </a:stretch>
@@ -19579,7 +20397,7 @@
           <a:bodyPr wrap="square" lIns="0" tIns="0" rIns="0" bIns="0" rtlCol="0" anchor="t"/>
           <a:lstStyle/>
           <a:p>
-            <a:pPr algn="ctr" indent="0" marL="0">
+            <a:pPr marL="0" indent="0" algn="ctr">
               <a:buNone/>
             </a:pPr>
             <a:r>
@@ -19615,7 +20433,7 @@
           <a:bodyPr wrap="square" lIns="0" tIns="0" rIns="0" bIns="0" rtlCol="0" anchor="ctr"/>
           <a:lstStyle/>
           <a:p>
-            <a:pPr algn="ctr" indent="0" marL="0">
+            <a:pPr marL="0" indent="0" algn="ctr">
               <a:buNone/>
             </a:pPr>
             <a:r>
@@ -19656,6 +20474,13 @@
             <a:prstDash val="solid"/>
           </a:ln>
         </p:spPr>
+        <p:txBody>
+          <a:bodyPr/>
+          <a:lstStyle/>
+          <a:p>
+            <a:endParaRPr lang="de-DE"/>
+          </a:p>
+        </p:txBody>
       </p:sp>
       <p:sp>
         <p:nvSpPr>
@@ -19678,7 +20503,7 @@
           <a:bodyPr wrap="square" lIns="0" tIns="0" rIns="0" bIns="0" rtlCol="0" anchor="ctr"/>
           <a:lstStyle/>
           <a:p>
-            <a:pPr indent="0" marL="0">
+            <a:pPr marL="0" indent="0">
               <a:buNone/>
             </a:pPr>
             <a:r>
@@ -19717,17 +20542,24 @@
             <a:prstDash val="solid"/>
           </a:ln>
         </p:spPr>
+        <p:txBody>
+          <a:bodyPr/>
+          <a:lstStyle/>
+          <a:p>
+            <a:endParaRPr lang="de-DE"/>
+          </a:p>
+        </p:txBody>
       </p:sp>
       <p:pic>
         <p:nvPicPr>
-          <p:cNvPr id="25" name="Image 3" descr="preencoded.png">    </p:cNvPr>
+          <p:cNvPr id="25" name="Image 3" descr="preencoded.png"/>
           <p:cNvPicPr>
             <a:picLocks noChangeAspect="1"/>
           </p:cNvPicPr>
           <p:nvPr/>
         </p:nvPicPr>
         <p:blipFill>
-          <a:blip r:embed="rId4"/>
+          <a:blip r:embed="rId6"/>
           <a:stretch>
             <a:fillRect/>
           </a:stretch>
@@ -19763,7 +20595,7 @@
           <a:bodyPr wrap="square" lIns="0" tIns="0" rIns="0" bIns="0" rtlCol="0" anchor="t"/>
           <a:lstStyle/>
           <a:p>
-            <a:pPr algn="ctr" indent="0" marL="0">
+            <a:pPr marL="0" indent="0" algn="ctr">
               <a:buNone/>
             </a:pPr>
             <a:r>
@@ -19799,7 +20631,7 @@
           <a:bodyPr wrap="square" lIns="0" tIns="0" rIns="0" bIns="0" rtlCol="0" anchor="ctr"/>
           <a:lstStyle/>
           <a:p>
-            <a:pPr algn="ctr" indent="0" marL="0">
+            <a:pPr marL="0" indent="0" algn="ctr">
               <a:buNone/>
             </a:pPr>
             <a:r>
@@ -19840,6 +20672,13 @@
             <a:prstDash val="solid"/>
           </a:ln>
         </p:spPr>
+        <p:txBody>
+          <a:bodyPr/>
+          <a:lstStyle/>
+          <a:p>
+            <a:endParaRPr lang="de-DE"/>
+          </a:p>
+        </p:txBody>
       </p:sp>
       <p:sp>
         <p:nvSpPr>
@@ -19862,7 +20701,7 @@
           <a:bodyPr wrap="square" lIns="0" tIns="0" rIns="0" bIns="0" rtlCol="0" anchor="ctr"/>
           <a:lstStyle/>
           <a:p>
-            <a:pPr indent="0" marL="0">
+            <a:pPr marL="0" indent="0">
               <a:buNone/>
             </a:pPr>
             <a:r>
@@ -19901,17 +20740,24 @@
             <a:prstDash val="solid"/>
           </a:ln>
         </p:spPr>
+        <p:txBody>
+          <a:bodyPr/>
+          <a:lstStyle/>
+          <a:p>
+            <a:endParaRPr lang="de-DE"/>
+          </a:p>
+        </p:txBody>
       </p:sp>
       <p:pic>
         <p:nvPicPr>
-          <p:cNvPr id="31" name="Image 4" descr="preencoded.png">    </p:cNvPr>
+          <p:cNvPr id="31" name="Image 4" descr="preencoded.png"/>
           <p:cNvPicPr>
             <a:picLocks noChangeAspect="1"/>
           </p:cNvPicPr>
           <p:nvPr/>
         </p:nvPicPr>
         <p:blipFill>
-          <a:blip r:embed="rId5"/>
+          <a:blip r:embed="rId7"/>
           <a:stretch>
             <a:fillRect/>
           </a:stretch>
@@ -19947,7 +20793,7 @@
           <a:bodyPr wrap="square" lIns="0" tIns="0" rIns="0" bIns="0" rtlCol="0" anchor="t"/>
           <a:lstStyle/>
           <a:p>
-            <a:pPr algn="ctr" indent="0" marL="0">
+            <a:pPr marL="0" indent="0" algn="ctr">
               <a:buNone/>
             </a:pPr>
             <a:r>
@@ -19983,7 +20829,7 @@
           <a:bodyPr wrap="square" lIns="0" tIns="0" rIns="0" bIns="0" rtlCol="0" anchor="ctr"/>
           <a:lstStyle/>
           <a:p>
-            <a:pPr algn="ctr" indent="0" marL="0">
+            <a:pPr marL="0" indent="0" algn="ctr">
               <a:buNone/>
             </a:pPr>
             <a:r>
@@ -20019,7 +20865,7 @@
           <a:bodyPr wrap="square" lIns="0" tIns="0" rIns="0" bIns="0" rtlCol="0" anchor="ctr"/>
           <a:lstStyle/>
           <a:p>
-            <a:pPr indent="0" marL="0">
+            <a:pPr marL="0" indent="0">
               <a:buNone/>
             </a:pPr>
             <a:r>
@@ -20036,7 +20882,7 @@
       </p:sp>
       <p:sp>
         <p:nvSpPr>
-          <p:cNvPr id="25" name="Slide Number Placeholder 0"/>
+          <p:cNvPr id="35" name="Slide Number Placeholder 0"/>
           <p:cNvSpPr>
             <a:spLocks noGrp="1"/>
           </p:cNvSpPr>
@@ -20054,7 +20900,7 @@
           </a:prstGeom>
           <a:extLst>
             <a:ext uri="{C572A759-6A51-4108-AA02-DFA0A04FC94B}">
-              <ma14:wrappingTextBoxFlag xmlns:ma14="http://schemas.microsoft.com/office/mac/drawingml/2011/main" val="0"/>
+              <ma14:wrappingTextBoxFlag xmlns:ma14="http://schemas.microsoft.com/office/mac/drawingml/2011/main" xmlns="" val="0"/>
             </a:ext>
           </a:extLst>
         </p:spPr>
@@ -20072,7 +20918,7 @@
           <a:p>
             <a:pPr algn="r"/>
             <a:fld id="{F7021451-1387-4CA6-816F-3879F97B5CBC}" type="slidenum">
-              <a:rPr b="0" lang="en-US"/>
+              <a:rPr lang="en-US" b="0"/>
               <a:t>9</a:t>
             </a:fld>
             <a:endParaRPr lang="en-US"/>
@@ -20380,4 +21226,319 @@
     </a:ext>
   </a:extLst>
 </a:theme>
+</file>
+
+<file path=ppt/theme/theme2.xml><?xml version="1.0" encoding="utf-8"?>
+<a:theme xmlns:a="http://schemas.openxmlformats.org/drawingml/2006/main" name="Office">
+  <a:themeElements>
+    <a:clrScheme name="Office">
+      <a:dk1>
+        <a:sysClr val="windowText" lastClr="000000"/>
+      </a:dk1>
+      <a:lt1>
+        <a:sysClr val="window" lastClr="FFFFFF"/>
+      </a:lt1>
+      <a:dk2>
+        <a:srgbClr val="0E2841"/>
+      </a:dk2>
+      <a:lt2>
+        <a:srgbClr val="E8E8E8"/>
+      </a:lt2>
+      <a:accent1>
+        <a:srgbClr val="156082"/>
+      </a:accent1>
+      <a:accent2>
+        <a:srgbClr val="E97132"/>
+      </a:accent2>
+      <a:accent3>
+        <a:srgbClr val="196B24"/>
+      </a:accent3>
+      <a:accent4>
+        <a:srgbClr val="0F9ED5"/>
+      </a:accent4>
+      <a:accent5>
+        <a:srgbClr val="A02B93"/>
+      </a:accent5>
+      <a:accent6>
+        <a:srgbClr val="4EA72E"/>
+      </a:accent6>
+      <a:hlink>
+        <a:srgbClr val="467886"/>
+      </a:hlink>
+      <a:folHlink>
+        <a:srgbClr val="96607D"/>
+      </a:folHlink>
+    </a:clrScheme>
+    <a:fontScheme name="Office">
+      <a:majorFont>
+        <a:latin typeface="Aptos Display" panose="02110004020202020204"/>
+        <a:ea typeface=""/>
+        <a:cs typeface=""/>
+        <a:font script="Jpan" typeface="游ゴシック Light"/>
+        <a:font script="Hang" typeface="맑은 고딕"/>
+        <a:font script="Hans" typeface="等线 Light"/>
+        <a:font script="Hant" typeface="新細明體"/>
+        <a:font script="Arab" typeface="Times New Roman"/>
+        <a:font script="Hebr" typeface="Times New Roman"/>
+        <a:font script="Thai" typeface="Angsana New"/>
+        <a:font script="Ethi" typeface="Nyala"/>
+        <a:font script="Beng" typeface="Vrinda"/>
+        <a:font script="Gujr" typeface="Shruti"/>
+        <a:font script="Khmr" typeface="MoolBoran"/>
+        <a:font script="Knda" typeface="Tunga"/>
+        <a:font script="Guru" typeface="Raavi"/>
+        <a:font script="Cans" typeface="Euphemia"/>
+        <a:font script="Cher" typeface="Plantagenet Cherokee"/>
+        <a:font script="Yiii" typeface="Microsoft Yi Baiti"/>
+        <a:font script="Tibt" typeface="Microsoft Himalaya"/>
+        <a:font script="Thaa" typeface="MV Boli"/>
+        <a:font script="Deva" typeface="Mangal"/>
+        <a:font script="Telu" typeface="Gautami"/>
+        <a:font script="Taml" typeface="Latha"/>
+        <a:font script="Syrc" typeface="Estrangelo Edessa"/>
+        <a:font script="Orya" typeface="Kalinga"/>
+        <a:font script="Mlym" typeface="Kartika"/>
+        <a:font script="Laoo" typeface="DokChampa"/>
+        <a:font script="Sinh" typeface="Iskoola Pota"/>
+        <a:font script="Mong" typeface="Mongolian Baiti"/>
+        <a:font script="Viet" typeface="Times New Roman"/>
+        <a:font script="Uigh" typeface="Microsoft Uighur"/>
+        <a:font script="Geor" typeface="Sylfaen"/>
+        <a:font script="Armn" typeface="Arial"/>
+        <a:font script="Bugi" typeface="Leelawadee UI"/>
+        <a:font script="Bopo" typeface="Microsoft JhengHei"/>
+        <a:font script="Java" typeface="Javanese Text"/>
+        <a:font script="Lisu" typeface="Segoe UI"/>
+        <a:font script="Mymr" typeface="Myanmar Text"/>
+        <a:font script="Nkoo" typeface="Ebrima"/>
+        <a:font script="Olck" typeface="Nirmala UI"/>
+        <a:font script="Osma" typeface="Ebrima"/>
+        <a:font script="Phag" typeface="Phagspa"/>
+        <a:font script="Syrn" typeface="Estrangelo Edessa"/>
+        <a:font script="Syrj" typeface="Estrangelo Edessa"/>
+        <a:font script="Syre" typeface="Estrangelo Edessa"/>
+        <a:font script="Sora" typeface="Nirmala UI"/>
+        <a:font script="Tale" typeface="Microsoft Tai Le"/>
+        <a:font script="Talu" typeface="Microsoft New Tai Lue"/>
+        <a:font script="Tfng" typeface="Ebrima"/>
+      </a:majorFont>
+      <a:minorFont>
+        <a:latin typeface="Aptos" panose="02110004020202020204"/>
+        <a:ea typeface=""/>
+        <a:cs typeface=""/>
+        <a:font script="Jpan" typeface="游ゴシック"/>
+        <a:font script="Hang" typeface="맑은 고딕"/>
+        <a:font script="Hans" typeface="等线"/>
+        <a:font script="Hant" typeface="新細明體"/>
+        <a:font script="Arab" typeface="Arial"/>
+        <a:font script="Hebr" typeface="Arial"/>
+        <a:font script="Thai" typeface="Cordia New"/>
+        <a:font script="Ethi" typeface="Nyala"/>
+        <a:font script="Beng" typeface="Vrinda"/>
+        <a:font script="Gujr" typeface="Shruti"/>
+        <a:font script="Khmr" typeface="DaunPenh"/>
+        <a:font script="Knda" typeface="Tunga"/>
+        <a:font script="Guru" typeface="Raavi"/>
+        <a:font script="Cans" typeface="Euphemia"/>
+        <a:font script="Cher" typeface="Plantagenet Cherokee"/>
+        <a:font script="Yiii" typeface="Microsoft Yi Baiti"/>
+        <a:font script="Tibt" typeface="Microsoft Himalaya"/>
+        <a:font script="Thaa" typeface="MV Boli"/>
+        <a:font script="Deva" typeface="Mangal"/>
+        <a:font script="Telu" typeface="Gautami"/>
+        <a:font script="Taml" typeface="Latha"/>
+        <a:font script="Syrc" typeface="Estrangelo Edessa"/>
+        <a:font script="Orya" typeface="Kalinga"/>
+        <a:font script="Mlym" typeface="Kartika"/>
+        <a:font script="Laoo" typeface="DokChampa"/>
+        <a:font script="Sinh" typeface="Iskoola Pota"/>
+        <a:font script="Mong" typeface="Mongolian Baiti"/>
+        <a:font script="Viet" typeface="Arial"/>
+        <a:font script="Uigh" typeface="Microsoft Uighur"/>
+        <a:font script="Geor" typeface="Sylfaen"/>
+        <a:font script="Armn" typeface="Arial"/>
+        <a:font script="Bugi" typeface="Leelawadee UI"/>
+        <a:font script="Bopo" typeface="Microsoft JhengHei"/>
+        <a:font script="Java" typeface="Javanese Text"/>
+        <a:font script="Lisu" typeface="Segoe UI"/>
+        <a:font script="Mymr" typeface="Myanmar Text"/>
+        <a:font script="Nkoo" typeface="Ebrima"/>
+        <a:font script="Olck" typeface="Nirmala UI"/>
+        <a:font script="Osma" typeface="Ebrima"/>
+        <a:font script="Phag" typeface="Phagspa"/>
+        <a:font script="Syrn" typeface="Estrangelo Edessa"/>
+        <a:font script="Syrj" typeface="Estrangelo Edessa"/>
+        <a:font script="Syre" typeface="Estrangelo Edessa"/>
+        <a:font script="Sora" typeface="Nirmala UI"/>
+        <a:font script="Tale" typeface="Microsoft Tai Le"/>
+        <a:font script="Talu" typeface="Microsoft New Tai Lue"/>
+        <a:font script="Tfng" typeface="Ebrima"/>
+      </a:minorFont>
+    </a:fontScheme>
+    <a:fmtScheme name="Office">
+      <a:fillStyleLst>
+        <a:solidFill>
+          <a:schemeClr val="phClr"/>
+        </a:solidFill>
+        <a:gradFill rotWithShape="1">
+          <a:gsLst>
+            <a:gs pos="0">
+              <a:schemeClr val="phClr">
+                <a:lumMod val="110000"/>
+                <a:satMod val="105000"/>
+                <a:tint val="67000"/>
+              </a:schemeClr>
+            </a:gs>
+            <a:gs pos="50000">
+              <a:schemeClr val="phClr">
+                <a:lumMod val="105000"/>
+                <a:satMod val="103000"/>
+                <a:tint val="73000"/>
+              </a:schemeClr>
+            </a:gs>
+            <a:gs pos="100000">
+              <a:schemeClr val="phClr">
+                <a:lumMod val="105000"/>
+                <a:satMod val="109000"/>
+                <a:tint val="81000"/>
+              </a:schemeClr>
+            </a:gs>
+          </a:gsLst>
+          <a:lin ang="5400000" scaled="0"/>
+        </a:gradFill>
+        <a:gradFill rotWithShape="1">
+          <a:gsLst>
+            <a:gs pos="0">
+              <a:schemeClr val="phClr">
+                <a:satMod val="103000"/>
+                <a:lumMod val="102000"/>
+                <a:tint val="94000"/>
+              </a:schemeClr>
+            </a:gs>
+            <a:gs pos="50000">
+              <a:schemeClr val="phClr">
+                <a:satMod val="110000"/>
+                <a:lumMod val="100000"/>
+                <a:shade val="100000"/>
+              </a:schemeClr>
+            </a:gs>
+            <a:gs pos="100000">
+              <a:schemeClr val="phClr">
+                <a:lumMod val="99000"/>
+                <a:satMod val="120000"/>
+                <a:shade val="78000"/>
+              </a:schemeClr>
+            </a:gs>
+          </a:gsLst>
+          <a:lin ang="5400000" scaled="0"/>
+        </a:gradFill>
+      </a:fillStyleLst>
+      <a:lnStyleLst>
+        <a:ln w="12700" cap="flat" cmpd="sng" algn="ctr">
+          <a:solidFill>
+            <a:schemeClr val="phClr"/>
+          </a:solidFill>
+          <a:prstDash val="solid"/>
+          <a:miter lim="800000"/>
+        </a:ln>
+        <a:ln w="19050" cap="flat" cmpd="sng" algn="ctr">
+          <a:solidFill>
+            <a:schemeClr val="phClr"/>
+          </a:solidFill>
+          <a:prstDash val="solid"/>
+          <a:miter lim="800000"/>
+        </a:ln>
+        <a:ln w="25400" cap="flat" cmpd="sng" algn="ctr">
+          <a:solidFill>
+            <a:schemeClr val="phClr"/>
+          </a:solidFill>
+          <a:prstDash val="solid"/>
+          <a:miter lim="800000"/>
+        </a:ln>
+      </a:lnStyleLst>
+      <a:effectStyleLst>
+        <a:effectStyle>
+          <a:effectLst/>
+        </a:effectStyle>
+        <a:effectStyle>
+          <a:effectLst/>
+        </a:effectStyle>
+        <a:effectStyle>
+          <a:effectLst>
+            <a:outerShdw blurRad="57150" dist="19050" dir="5400000" algn="ctr" rotWithShape="0">
+              <a:srgbClr val="000000">
+                <a:alpha val="63000"/>
+              </a:srgbClr>
+            </a:outerShdw>
+          </a:effectLst>
+        </a:effectStyle>
+      </a:effectStyleLst>
+      <a:bgFillStyleLst>
+        <a:solidFill>
+          <a:schemeClr val="phClr"/>
+        </a:solidFill>
+        <a:solidFill>
+          <a:schemeClr val="phClr">
+            <a:tint val="95000"/>
+            <a:satMod val="170000"/>
+          </a:schemeClr>
+        </a:solidFill>
+        <a:gradFill rotWithShape="1">
+          <a:gsLst>
+            <a:gs pos="0">
+              <a:schemeClr val="phClr">
+                <a:tint val="93000"/>
+                <a:satMod val="150000"/>
+                <a:shade val="98000"/>
+                <a:lumMod val="102000"/>
+              </a:schemeClr>
+            </a:gs>
+            <a:gs pos="50000">
+              <a:schemeClr val="phClr">
+                <a:tint val="98000"/>
+                <a:satMod val="130000"/>
+                <a:shade val="90000"/>
+                <a:lumMod val="103000"/>
+              </a:schemeClr>
+            </a:gs>
+            <a:gs pos="100000">
+              <a:schemeClr val="phClr">
+                <a:shade val="63000"/>
+                <a:satMod val="120000"/>
+              </a:schemeClr>
+            </a:gs>
+          </a:gsLst>
+          <a:lin ang="5400000" scaled="0"/>
+        </a:gradFill>
+      </a:bgFillStyleLst>
+    </a:fmtScheme>
+  </a:themeElements>
+  <a:objectDefaults>
+    <a:lnDef>
+      <a:spPr/>
+      <a:bodyPr/>
+      <a:lstStyle/>
+      <a:style>
+        <a:lnRef idx="2">
+          <a:schemeClr val="accent1"/>
+        </a:lnRef>
+        <a:fillRef idx="0">
+          <a:schemeClr val="accent1"/>
+        </a:fillRef>
+        <a:effectRef idx="1">
+          <a:schemeClr val="accent1"/>
+        </a:effectRef>
+        <a:fontRef idx="minor">
+          <a:schemeClr val="tx1"/>
+        </a:fontRef>
+      </a:style>
+    </a:lnDef>
+  </a:objectDefaults>
+  <a:extraClrSchemeLst/>
+  <a:extLst>
+    <a:ext uri="{05A4C25C-085E-4340-85A3-A5531E510DB2}">
+      <thm15:themeFamily xmlns:thm15="http://schemas.microsoft.com/office/thememl/2012/main" name="Office Theme" id="{2E142A2C-CD16-42D6-873A-C26D2A0506FA}" vid="{1BDDFF52-6CD6-40A5-AB3C-68EB2F1E4D0A}"/>
+    </a:ext>
+  </a:extLst>
+</a:theme>
 </file>